--- a/presentation/CMPE255_Project.pptx
+++ b/presentation/CMPE255_Project.pptx
@@ -4,28 +4,31 @@
   <p:sldMasterIdLst>
     <p:sldMasterId id="2147483648" r:id="rId1"/>
   </p:sldMasterIdLst>
+  <p:notesMasterIdLst>
+    <p:notesMasterId r:id="rId21"/>
+  </p:notesMasterIdLst>
   <p:sldIdLst>
-    <p:sldId id="256" r:id="rId7"/>
-    <p:sldId id="257" r:id="rId9"/>
-    <p:sldId id="258" r:id="rId10"/>
-    <p:sldId id="259" r:id="rId11"/>
-    <p:sldId id="260" r:id="rId12"/>
-    <p:sldId id="261" r:id="rId13"/>
-    <p:sldId id="262" r:id="rId14"/>
-    <p:sldId id="263" r:id="rId15"/>
-    <p:sldId id="264" r:id="rId16"/>
-    <p:sldId id="265" r:id="rId17"/>
-    <p:sldId id="266" r:id="rId18"/>
-    <p:sldId id="267" r:id="rId19"/>
-    <p:sldId id="268" r:id="rId20"/>
-    <p:sldId id="269" r:id="rId21"/>
-    <p:sldId id="270" r:id="rId22"/>
-    <p:sldId id="271" r:id="rId23"/>
-    <p:sldId id="272" r:id="rId24"/>
-    <p:sldId id="273" r:id="rId25"/>
-    <p:sldId id="274" r:id="rId26"/>
+    <p:sldId id="256" r:id="rId2"/>
+    <p:sldId id="257" r:id="rId3"/>
+    <p:sldId id="258" r:id="rId4"/>
+    <p:sldId id="259" r:id="rId5"/>
+    <p:sldId id="260" r:id="rId6"/>
+    <p:sldId id="261" r:id="rId7"/>
+    <p:sldId id="262" r:id="rId8"/>
+    <p:sldId id="263" r:id="rId9"/>
+    <p:sldId id="264" r:id="rId10"/>
+    <p:sldId id="265" r:id="rId11"/>
+    <p:sldId id="266" r:id="rId12"/>
+    <p:sldId id="267" r:id="rId13"/>
+    <p:sldId id="268" r:id="rId14"/>
+    <p:sldId id="269" r:id="rId15"/>
+    <p:sldId id="270" r:id="rId16"/>
+    <p:sldId id="271" r:id="rId17"/>
+    <p:sldId id="272" r:id="rId18"/>
+    <p:sldId id="273" r:id="rId19"/>
+    <p:sldId id="274" r:id="rId20"/>
   </p:sldIdLst>
-  <p:sldSz cx="12191695" cy="6858000" type="screen4x3"/>
+  <p:sldSz cx="12192000" cy="6858000"/>
   <p:notesSz cx="6858000" cy="9144000"/>
   <p:defaultTextStyle>
     <a:defPPr>
@@ -122,11 +125,27 @@
       </a:defRPr>
     </a:lvl9pPr>
   </p:defaultTextStyle>
+  <p:extLst>
+    <p:ext uri="{EFAFB233-063F-42B5-8137-9DF3F51BA10A}">
+      <p15:sldGuideLst xmlns:p15="http://schemas.microsoft.com/office/powerpoint/2012/main">
+        <p15:guide id="1" orient="horz" pos="2160">
+          <p15:clr>
+            <a:srgbClr val="A4A3A4"/>
+          </p15:clr>
+        </p15:guide>
+        <p15:guide id="2" pos="2880">
+          <p15:clr>
+            <a:srgbClr val="A4A3A4"/>
+          </p15:clr>
+        </p15:guide>
+      </p15:sldGuideLst>
+    </p:ext>
+  </p:extLst>
 </p:presentation>
 </file>
 
 <file path=ppt/notesMasters/notesMaster1.xml><?xml version="1.0" encoding="utf-8"?>
-<p:notesMaster xmlns:a="http://schemas.openxmlformats.org/drawingml/2006/main" xmlns:p="http://schemas.openxmlformats.org/presentationml/2006/main" xmlns:r="http://schemas.openxmlformats.org/officeDocument/2006/relationships">
+<p:notesMaster xmlns:a="http://schemas.openxmlformats.org/drawingml/2006/main" xmlns:r="http://schemas.openxmlformats.org/officeDocument/2006/relationships" xmlns:p="http://schemas.openxmlformats.org/presentationml/2006/main">
   <p:cSld>
     <p:bg>
       <p:bgRef idx="1001">
@@ -147,241 +166,16 @@
           <a:chExt cx="0" cy="0"/>
         </a:xfrm>
       </p:grpSpPr>
-      <p:sp>
-        <p:nvSpPr>
-          <p:cNvPr id="2" name="Header Placeholder 1"/>
-          <p:cNvSpPr>
-            <a:spLocks noGrp="1"/>
-          </p:cNvSpPr>
-          <p:nvPr>
-            <p:ph type="hdr" sz="quarter"/>
-          </p:nvPr>
-        </p:nvSpPr>
-        <p:spPr>
-          <a:xfrm>
-            <a:off x="0" y="0"/>
-            <a:ext cx="2971800" cy="457200"/>
-          </a:xfrm>
-          <a:prstGeom prst="rect">
-            <a:avLst/>
-          </a:prstGeom>
-        </p:spPr>
-        <p:txBody>
-          <a:bodyPr vert="horz" lIns="91440" tIns="45720" rIns="91440" bIns="45720" rtlCol="0"/>
-          <a:lstStyle>
-            <a:lvl1pPr algn="l">
-              <a:defRPr sz="1200"/>
-            </a:lvl1pPr>
-          </a:lstStyle>
-          <a:p>
-            <a:endParaRPr lang="en-US"/>
-          </a:p>
-        </p:txBody>
-      </p:sp>
-      <p:sp>
-        <p:nvSpPr>
-          <p:cNvPr id="3" name="Date Placeholder 2"/>
-          <p:cNvSpPr>
-            <a:spLocks noGrp="1"/>
-          </p:cNvSpPr>
-          <p:nvPr>
-            <p:ph type="dt" idx="1"/>
-          </p:nvPr>
-        </p:nvSpPr>
-        <p:spPr>
-          <a:xfrm>
-            <a:off x="3884613" y="0"/>
-            <a:ext cx="2971800" cy="457200"/>
-          </a:xfrm>
-          <a:prstGeom prst="rect">
-            <a:avLst/>
-          </a:prstGeom>
-        </p:spPr>
-        <p:txBody>
-          <a:bodyPr vert="horz" lIns="91440" tIns="45720" rIns="91440" bIns="45720" rtlCol="0"/>
-          <a:lstStyle>
-            <a:lvl1pPr algn="r">
-              <a:defRPr sz="1200"/>
-            </a:lvl1pPr>
-          </a:lstStyle>
-          <a:p>
-            <a:fld id="{0F89C1C7-3DCD-1040-A9CF-14679D8B5DDD}" type="datetimeFigureOut">
-              <a:rPr lang="en-US" smtClean="0"/>
-              <a:t>10/17/16</a:t>
-            </a:fld>
-            <a:endParaRPr lang="en-US"/>
-          </a:p>
-        </p:txBody>
-      </p:sp>
-      <p:sp>
-        <p:nvSpPr>
-          <p:cNvPr id="4" name="Slide Image Placeholder 3"/>
-          <p:cNvSpPr>
-            <a:spLocks noGrp="1" noRot="1" noChangeAspect="1"/>
-          </p:cNvSpPr>
-          <p:nvPr>
-            <p:ph type="sldImg" idx="2"/>
-          </p:nvPr>
-        </p:nvSpPr>
-        <p:spPr>
-          <a:xfrm>
-            <a:off x="1143000" y="685800"/>
-            <a:ext cx="4572000" cy="3429000"/>
-          </a:xfrm>
-          <a:prstGeom prst="rect">
-            <a:avLst/>
-          </a:prstGeom>
-          <a:noFill/>
-          <a:ln w="12700">
-            <a:solidFill>
-              <a:prstClr val="black"/>
-            </a:solidFill>
-          </a:ln>
-        </p:spPr>
-        <p:txBody>
-          <a:bodyPr vert="horz" lIns="91440" tIns="45720" rIns="91440" bIns="45720" rtlCol="0" anchor="ctr"/>
-          <a:lstStyle/>
-          <a:p>
-            <a:endParaRPr lang="en-US"/>
-          </a:p>
-        </p:txBody>
-      </p:sp>
-      <p:sp>
-        <p:nvSpPr>
-          <p:cNvPr id="5" name="Notes Placeholder 4"/>
-          <p:cNvSpPr>
-            <a:spLocks noGrp="1"/>
-          </p:cNvSpPr>
-          <p:nvPr>
-            <p:ph type="body" sz="quarter" idx="3"/>
-          </p:nvPr>
-        </p:nvSpPr>
-        <p:spPr>
-          <a:xfrm>
-            <a:off x="685800" y="4343400"/>
-            <a:ext cx="5486400" cy="4114800"/>
-          </a:xfrm>
-          <a:prstGeom prst="rect">
-            <a:avLst/>
-          </a:prstGeom>
-        </p:spPr>
-        <p:txBody>
-          <a:bodyPr vert="horz" lIns="91440" tIns="45720" rIns="91440" bIns="45720" rtlCol="0"/>
-          <a:lstStyle/>
-          <a:p>
-            <a:pPr lvl="0"/>
-            <a:r>
-              <a:rPr lang="en-US" smtClean="0"/>
-              <a:t>Click to edit Master text styles</a:t>
-            </a:r>
-          </a:p>
-          <a:p>
-            <a:pPr lvl="1"/>
-            <a:r>
-              <a:rPr lang="en-US" smtClean="0"/>
-              <a:t>Second level</a:t>
-            </a:r>
-          </a:p>
-          <a:p>
-            <a:pPr lvl="2"/>
-            <a:r>
-              <a:rPr lang="en-US" smtClean="0"/>
-              <a:t>Third level</a:t>
-            </a:r>
-          </a:p>
-          <a:p>
-            <a:pPr lvl="3"/>
-            <a:r>
-              <a:rPr lang="en-US" smtClean="0"/>
-              <a:t>Fourth level</a:t>
-            </a:r>
-          </a:p>
-          <a:p>
-            <a:pPr lvl="4"/>
-            <a:r>
-              <a:rPr lang="en-US" smtClean="0"/>
-              <a:t>Fifth level</a:t>
-            </a:r>
-            <a:endParaRPr lang="en-US"/>
-          </a:p>
-        </p:txBody>
-      </p:sp>
-      <p:sp>
-        <p:nvSpPr>
-          <p:cNvPr id="6" name="Footer Placeholder 5"/>
-          <p:cNvSpPr>
-            <a:spLocks noGrp="1"/>
-          </p:cNvSpPr>
-          <p:nvPr>
-            <p:ph type="ftr" sz="quarter" idx="4"/>
-          </p:nvPr>
-        </p:nvSpPr>
-        <p:spPr>
-          <a:xfrm>
-            <a:off x="0" y="8685213"/>
-            <a:ext cx="2971800" cy="457200"/>
-          </a:xfrm>
-          <a:prstGeom prst="rect">
-            <a:avLst/>
-          </a:prstGeom>
-        </p:spPr>
-        <p:txBody>
-          <a:bodyPr vert="horz" lIns="91440" tIns="45720" rIns="91440" bIns="45720" rtlCol="0" anchor="b"/>
-          <a:lstStyle>
-            <a:lvl1pPr algn="l">
-              <a:defRPr sz="1200"/>
-            </a:lvl1pPr>
-          </a:lstStyle>
-          <a:p>
-            <a:endParaRPr lang="en-US"/>
-          </a:p>
-        </p:txBody>
-      </p:sp>
-      <p:sp>
-        <p:nvSpPr>
-          <p:cNvPr id="7" name="Slide Number Placeholder 6"/>
-          <p:cNvSpPr>
-            <a:spLocks noGrp="1"/>
-          </p:cNvSpPr>
-          <p:nvPr>
-            <p:ph type="sldNum" sz="quarter" idx="5"/>
-          </p:nvPr>
-        </p:nvSpPr>
-        <p:spPr>
-          <a:xfrm>
-            <a:off x="3884613" y="8685213"/>
-            <a:ext cx="2971800" cy="457200"/>
-          </a:xfrm>
-          <a:prstGeom prst="rect">
-            <a:avLst/>
-          </a:prstGeom>
-        </p:spPr>
-        <p:txBody>
-          <a:bodyPr vert="horz" lIns="91440" tIns="45720" rIns="91440" bIns="45720" rtlCol="0" anchor="b"/>
-          <a:lstStyle>
-            <a:lvl1pPr algn="r">
-              <a:defRPr sz="1200"/>
-            </a:lvl1pPr>
-          </a:lstStyle>
-          <a:p>
-            <a:fld id="{BB5E49A5-4136-284D-997B-48E1D791AD67}" type="slidenum">
-              <a:rPr lang="en-US" smtClean="0"/>
-              <a:t>‹#›</a:t>
-            </a:fld>
-            <a:endParaRPr lang="en-US"/>
-          </a:p>
-        </p:txBody>
-      </p:sp>
     </p:spTree>
     <p:extLst>
       <p:ext uri="{BB962C8B-B14F-4D97-AF65-F5344CB8AC3E}">
-        <p14:creationId xmlns:p14="http://schemas.microsoft.com/office/powerpoint/2010/main" val="2623252185"/>
+        <p14:creationId xmlns:p14="http://schemas.microsoft.com/office/powerpoint/2010/main" val="3840010557"/>
       </p:ext>
     </p:extLst>
   </p:cSld>
   <p:clrMap bg1="lt1" tx1="dk1" bg2="lt2" tx2="dk2" accent1="accent1" accent2="accent2" accent3="accent3" accent4="accent4" accent5="accent5" accent6="accent6" hlink="hlink" folHlink="folHlink"/>
   <p:notesStyle>
-    <a:lvl1pPr marL="0" algn="l" defTabSz="457200" rtl="0" eaLnBrk="1" latinLnBrk="0" hangingPunct="1">
+    <a:lvl1pPr marL="0" algn="l" defTabSz="914400" rtl="0" eaLnBrk="1" latinLnBrk="0" hangingPunct="1">
       <a:defRPr sz="1200" kern="1200">
         <a:solidFill>
           <a:schemeClr val="tx1"/>
@@ -391,7 +185,7 @@
         <a:cs typeface="+mn-cs"/>
       </a:defRPr>
     </a:lvl1pPr>
-    <a:lvl2pPr marL="457200" algn="l" defTabSz="457200" rtl="0" eaLnBrk="1" latinLnBrk="0" hangingPunct="1">
+    <a:lvl2pPr marL="457200" algn="l" defTabSz="914400" rtl="0" eaLnBrk="1" latinLnBrk="0" hangingPunct="1">
       <a:defRPr sz="1200" kern="1200">
         <a:solidFill>
           <a:schemeClr val="tx1"/>
@@ -401,7 +195,7 @@
         <a:cs typeface="+mn-cs"/>
       </a:defRPr>
     </a:lvl2pPr>
-    <a:lvl3pPr marL="914400" algn="l" defTabSz="457200" rtl="0" eaLnBrk="1" latinLnBrk="0" hangingPunct="1">
+    <a:lvl3pPr marL="914400" algn="l" defTabSz="914400" rtl="0" eaLnBrk="1" latinLnBrk="0" hangingPunct="1">
       <a:defRPr sz="1200" kern="1200">
         <a:solidFill>
           <a:schemeClr val="tx1"/>
@@ -411,7 +205,7 @@
         <a:cs typeface="+mn-cs"/>
       </a:defRPr>
     </a:lvl3pPr>
-    <a:lvl4pPr marL="1371600" algn="l" defTabSz="457200" rtl="0" eaLnBrk="1" latinLnBrk="0" hangingPunct="1">
+    <a:lvl4pPr marL="1371600" algn="l" defTabSz="914400" rtl="0" eaLnBrk="1" latinLnBrk="0" hangingPunct="1">
       <a:defRPr sz="1200" kern="1200">
         <a:solidFill>
           <a:schemeClr val="tx1"/>
@@ -421,7 +215,7 @@
         <a:cs typeface="+mn-cs"/>
       </a:defRPr>
     </a:lvl4pPr>
-    <a:lvl5pPr marL="1828800" algn="l" defTabSz="457200" rtl="0" eaLnBrk="1" latinLnBrk="0" hangingPunct="1">
+    <a:lvl5pPr marL="1828800" algn="l" defTabSz="914400" rtl="0" eaLnBrk="1" latinLnBrk="0" hangingPunct="1">
       <a:defRPr sz="1200" kern="1200">
         <a:solidFill>
           <a:schemeClr val="tx1"/>
@@ -431,7 +225,7 @@
         <a:cs typeface="+mn-cs"/>
       </a:defRPr>
     </a:lvl5pPr>
-    <a:lvl6pPr marL="2286000" algn="l" defTabSz="457200" rtl="0" eaLnBrk="1" latinLnBrk="0" hangingPunct="1">
+    <a:lvl6pPr marL="2286000" algn="l" defTabSz="914400" rtl="0" eaLnBrk="1" latinLnBrk="0" hangingPunct="1">
       <a:defRPr sz="1200" kern="1200">
         <a:solidFill>
           <a:schemeClr val="tx1"/>
@@ -441,7 +235,7 @@
         <a:cs typeface="+mn-cs"/>
       </a:defRPr>
     </a:lvl6pPr>
-    <a:lvl7pPr marL="2743200" algn="l" defTabSz="457200" rtl="0" eaLnBrk="1" latinLnBrk="0" hangingPunct="1">
+    <a:lvl7pPr marL="2743200" algn="l" defTabSz="914400" rtl="0" eaLnBrk="1" latinLnBrk="0" hangingPunct="1">
       <a:defRPr sz="1200" kern="1200">
         <a:solidFill>
           <a:schemeClr val="tx1"/>
@@ -451,7 +245,7 @@
         <a:cs typeface="+mn-cs"/>
       </a:defRPr>
     </a:lvl7pPr>
-    <a:lvl8pPr marL="3200400" algn="l" defTabSz="457200" rtl="0" eaLnBrk="1" latinLnBrk="0" hangingPunct="1">
+    <a:lvl8pPr marL="3200400" algn="l" defTabSz="914400" rtl="0" eaLnBrk="1" latinLnBrk="0" hangingPunct="1">
       <a:defRPr sz="1200" kern="1200">
         <a:solidFill>
           <a:schemeClr val="tx1"/>
@@ -461,7 +255,7 @@
         <a:cs typeface="+mn-cs"/>
       </a:defRPr>
     </a:lvl8pPr>
-    <a:lvl9pPr marL="3657600" algn="l" defTabSz="457200" rtl="0" eaLnBrk="1" latinLnBrk="0" hangingPunct="1">
+    <a:lvl9pPr marL="3657600" algn="l" defTabSz="914400" rtl="0" eaLnBrk="1" latinLnBrk="0" hangingPunct="1">
       <a:defRPr sz="1200" kern="1200">
         <a:solidFill>
           <a:schemeClr val="tx1"/>
@@ -476,7 +270,7 @@
 </file>
 
 <file path=ppt/notesSlides/notesSlide1.xml><?xml version="1.0" encoding="utf-8"?>
-<p:notes xmlns:a="http://schemas.openxmlformats.org/drawingml/2006/main" xmlns:p="http://schemas.openxmlformats.org/presentationml/2006/main" xmlns:r="http://schemas.openxmlformats.org/officeDocument/2006/relationships">
+<p:notes xmlns:a="http://schemas.openxmlformats.org/drawingml/2006/main" xmlns:r="http://schemas.openxmlformats.org/officeDocument/2006/relationships" xmlns:p="http://schemas.openxmlformats.org/presentationml/2006/main">
   <p:cSld>
     <p:spTree>
       <p:nvGrpSpPr>
@@ -496,7 +290,7 @@
         <p:nvSpPr>
           <p:cNvPr id="2" name="Slide Image Placeholder 1"/>
           <p:cNvSpPr>
-            <a:spLocks noGrp="1"/>
+            <a:spLocks noGrp="1" noRot="1" noChangeAspect="1"/>
           </p:cNvSpPr>
           <p:nvPr>
             <p:ph type="sldImg" idx="2"/>
@@ -511,7 +305,7 @@
             <a:spLocks noGrp="1"/>
           </p:cNvSpPr>
           <p:nvPr>
-            <p:ph type="body" idx="3" sz="quarter"/>
+            <p:ph type="body" sz="quarter" idx="3"/>
           </p:nvPr>
         </p:nvSpPr>
         <p:spPr/>
@@ -520,6 +314,7 @@
           <a:lstStyle/>
           <a:p>
             <a:r>
+              <a:rPr dirty="0"/>
               <a:t>Welcome everyone. Today we present our CMPE 255 project on predicting student dropout using data mining techniques. We analyzed a dataset of over 4,400 students from a Portuguese university to identify key risk factors and build predictive models.</a:t>
             </a:r>
           </a:p>
@@ -532,7 +327,7 @@
             <a:spLocks noGrp="1"/>
           </p:cNvSpPr>
           <p:nvPr>
-            <p:ph type="sldNum" idx="5" sz="quarter"/>
+            <p:ph type="sldNum" sz="quarter" idx="5"/>
           </p:nvPr>
         </p:nvSpPr>
         <p:spPr/>
@@ -546,7 +341,7 @@
 </file>
 
 <file path=ppt/notesSlides/notesSlide10.xml><?xml version="1.0" encoding="utf-8"?>
-<p:notes xmlns:a="http://schemas.openxmlformats.org/drawingml/2006/main" xmlns:p="http://schemas.openxmlformats.org/presentationml/2006/main" xmlns:r="http://schemas.openxmlformats.org/officeDocument/2006/relationships">
+<p:notes xmlns:a="http://schemas.openxmlformats.org/drawingml/2006/main" xmlns:r="http://schemas.openxmlformats.org/officeDocument/2006/relationships" xmlns:p="http://schemas.openxmlformats.org/presentationml/2006/main">
   <p:cSld>
     <p:spTree>
       <p:nvGrpSpPr>
@@ -566,7 +361,7 @@
         <p:nvSpPr>
           <p:cNvPr id="2" name="Slide Image Placeholder 1"/>
           <p:cNvSpPr>
-            <a:spLocks noGrp="1"/>
+            <a:spLocks noGrp="1" noRot="1" noChangeAspect="1"/>
           </p:cNvSpPr>
           <p:nvPr>
             <p:ph type="sldImg" idx="2"/>
@@ -581,7 +376,7 @@
             <a:spLocks noGrp="1"/>
           </p:cNvSpPr>
           <p:nvPr>
-            <p:ph type="body" idx="3" sz="quarter"/>
+            <p:ph type="body" sz="quarter" idx="3"/>
           </p:nvPr>
         </p:nvSpPr>
         <p:spPr/>
@@ -602,7 +397,7 @@
             <a:spLocks noGrp="1"/>
           </p:cNvSpPr>
           <p:nvPr>
-            <p:ph type="sldNum" idx="5" sz="quarter"/>
+            <p:ph type="sldNum" sz="quarter" idx="5"/>
           </p:nvPr>
         </p:nvSpPr>
         <p:spPr/>
@@ -616,7 +411,7 @@
 </file>
 
 <file path=ppt/notesSlides/notesSlide11.xml><?xml version="1.0" encoding="utf-8"?>
-<p:notes xmlns:a="http://schemas.openxmlformats.org/drawingml/2006/main" xmlns:p="http://schemas.openxmlformats.org/presentationml/2006/main" xmlns:r="http://schemas.openxmlformats.org/officeDocument/2006/relationships">
+<p:notes xmlns:a="http://schemas.openxmlformats.org/drawingml/2006/main" xmlns:r="http://schemas.openxmlformats.org/officeDocument/2006/relationships" xmlns:p="http://schemas.openxmlformats.org/presentationml/2006/main">
   <p:cSld>
     <p:spTree>
       <p:nvGrpSpPr>
@@ -636,7 +431,7 @@
         <p:nvSpPr>
           <p:cNvPr id="2" name="Slide Image Placeholder 1"/>
           <p:cNvSpPr>
-            <a:spLocks noGrp="1"/>
+            <a:spLocks noGrp="1" noRot="1" noChangeAspect="1"/>
           </p:cNvSpPr>
           <p:nvPr>
             <p:ph type="sldImg" idx="2"/>
@@ -651,7 +446,7 @@
             <a:spLocks noGrp="1"/>
           </p:cNvSpPr>
           <p:nvPr>
-            <p:ph type="body" idx="3" sz="quarter"/>
+            <p:ph type="body" sz="quarter" idx="3"/>
           </p:nvPr>
         </p:nvSpPr>
         <p:spPr/>
@@ -672,7 +467,7 @@
             <a:spLocks noGrp="1"/>
           </p:cNvSpPr>
           <p:nvPr>
-            <p:ph type="sldNum" idx="5" sz="quarter"/>
+            <p:ph type="sldNum" sz="quarter" idx="5"/>
           </p:nvPr>
         </p:nvSpPr>
         <p:spPr/>
@@ -686,7 +481,7 @@
 </file>
 
 <file path=ppt/notesSlides/notesSlide12.xml><?xml version="1.0" encoding="utf-8"?>
-<p:notes xmlns:a="http://schemas.openxmlformats.org/drawingml/2006/main" xmlns:p="http://schemas.openxmlformats.org/presentationml/2006/main" xmlns:r="http://schemas.openxmlformats.org/officeDocument/2006/relationships">
+<p:notes xmlns:a="http://schemas.openxmlformats.org/drawingml/2006/main" xmlns:r="http://schemas.openxmlformats.org/officeDocument/2006/relationships" xmlns:p="http://schemas.openxmlformats.org/presentationml/2006/main">
   <p:cSld>
     <p:spTree>
       <p:nvGrpSpPr>
@@ -706,7 +501,7 @@
         <p:nvSpPr>
           <p:cNvPr id="2" name="Slide Image Placeholder 1"/>
           <p:cNvSpPr>
-            <a:spLocks noGrp="1"/>
+            <a:spLocks noGrp="1" noRot="1" noChangeAspect="1"/>
           </p:cNvSpPr>
           <p:nvPr>
             <p:ph type="sldImg" idx="2"/>
@@ -721,7 +516,7 @@
             <a:spLocks noGrp="1"/>
           </p:cNvSpPr>
           <p:nvPr>
-            <p:ph type="body" idx="3" sz="quarter"/>
+            <p:ph type="body" sz="quarter" idx="3"/>
           </p:nvPr>
         </p:nvSpPr>
         <p:spPr/>
@@ -742,7 +537,7 @@
             <a:spLocks noGrp="1"/>
           </p:cNvSpPr>
           <p:nvPr>
-            <p:ph type="sldNum" idx="5" sz="quarter"/>
+            <p:ph type="sldNum" sz="quarter" idx="5"/>
           </p:nvPr>
         </p:nvSpPr>
         <p:spPr/>
@@ -756,7 +551,7 @@
 </file>
 
 <file path=ppt/notesSlides/notesSlide13.xml><?xml version="1.0" encoding="utf-8"?>
-<p:notes xmlns:a="http://schemas.openxmlformats.org/drawingml/2006/main" xmlns:p="http://schemas.openxmlformats.org/presentationml/2006/main" xmlns:r="http://schemas.openxmlformats.org/officeDocument/2006/relationships">
+<p:notes xmlns:a="http://schemas.openxmlformats.org/drawingml/2006/main" xmlns:r="http://schemas.openxmlformats.org/officeDocument/2006/relationships" xmlns:p="http://schemas.openxmlformats.org/presentationml/2006/main">
   <p:cSld>
     <p:spTree>
       <p:nvGrpSpPr>
@@ -776,7 +571,7 @@
         <p:nvSpPr>
           <p:cNvPr id="2" name="Slide Image Placeholder 1"/>
           <p:cNvSpPr>
-            <a:spLocks noGrp="1"/>
+            <a:spLocks noGrp="1" noRot="1" noChangeAspect="1"/>
           </p:cNvSpPr>
           <p:nvPr>
             <p:ph type="sldImg" idx="2"/>
@@ -791,7 +586,7 @@
             <a:spLocks noGrp="1"/>
           </p:cNvSpPr>
           <p:nvPr>
-            <p:ph type="body" idx="3" sz="quarter"/>
+            <p:ph type="body" sz="quarter" idx="3"/>
           </p:nvPr>
         </p:nvSpPr>
         <p:spPr/>
@@ -812,7 +607,7 @@
             <a:spLocks noGrp="1"/>
           </p:cNvSpPr>
           <p:nvPr>
-            <p:ph type="sldNum" idx="5" sz="quarter"/>
+            <p:ph type="sldNum" sz="quarter" idx="5"/>
           </p:nvPr>
         </p:nvSpPr>
         <p:spPr/>
@@ -826,7 +621,7 @@
 </file>
 
 <file path=ppt/notesSlides/notesSlide14.xml><?xml version="1.0" encoding="utf-8"?>
-<p:notes xmlns:a="http://schemas.openxmlformats.org/drawingml/2006/main" xmlns:p="http://schemas.openxmlformats.org/presentationml/2006/main" xmlns:r="http://schemas.openxmlformats.org/officeDocument/2006/relationships">
+<p:notes xmlns:a="http://schemas.openxmlformats.org/drawingml/2006/main" xmlns:r="http://schemas.openxmlformats.org/officeDocument/2006/relationships" xmlns:p="http://schemas.openxmlformats.org/presentationml/2006/main">
   <p:cSld>
     <p:spTree>
       <p:nvGrpSpPr>
@@ -846,7 +641,7 @@
         <p:nvSpPr>
           <p:cNvPr id="2" name="Slide Image Placeholder 1"/>
           <p:cNvSpPr>
-            <a:spLocks noGrp="1"/>
+            <a:spLocks noGrp="1" noRot="1" noChangeAspect="1"/>
           </p:cNvSpPr>
           <p:nvPr>
             <p:ph type="sldImg" idx="2"/>
@@ -861,7 +656,7 @@
             <a:spLocks noGrp="1"/>
           </p:cNvSpPr>
           <p:nvPr>
-            <p:ph type="body" idx="3" sz="quarter"/>
+            <p:ph type="body" sz="quarter" idx="3"/>
           </p:nvPr>
         </p:nvSpPr>
         <p:spPr/>
@@ -882,7 +677,7 @@
             <a:spLocks noGrp="1"/>
           </p:cNvSpPr>
           <p:nvPr>
-            <p:ph type="sldNum" idx="5" sz="quarter"/>
+            <p:ph type="sldNum" sz="quarter" idx="5"/>
           </p:nvPr>
         </p:nvSpPr>
         <p:spPr/>
@@ -896,7 +691,7 @@
 </file>
 
 <file path=ppt/notesSlides/notesSlide15.xml><?xml version="1.0" encoding="utf-8"?>
-<p:notes xmlns:a="http://schemas.openxmlformats.org/drawingml/2006/main" xmlns:p="http://schemas.openxmlformats.org/presentationml/2006/main" xmlns:r="http://schemas.openxmlformats.org/officeDocument/2006/relationships">
+<p:notes xmlns:a="http://schemas.openxmlformats.org/drawingml/2006/main" xmlns:r="http://schemas.openxmlformats.org/officeDocument/2006/relationships" xmlns:p="http://schemas.openxmlformats.org/presentationml/2006/main">
   <p:cSld>
     <p:spTree>
       <p:nvGrpSpPr>
@@ -916,7 +711,7 @@
         <p:nvSpPr>
           <p:cNvPr id="2" name="Slide Image Placeholder 1"/>
           <p:cNvSpPr>
-            <a:spLocks noGrp="1"/>
+            <a:spLocks noGrp="1" noRot="1" noChangeAspect="1"/>
           </p:cNvSpPr>
           <p:nvPr>
             <p:ph type="sldImg" idx="2"/>
@@ -931,7 +726,7 @@
             <a:spLocks noGrp="1"/>
           </p:cNvSpPr>
           <p:nvPr>
-            <p:ph type="body" idx="3" sz="quarter"/>
+            <p:ph type="body" sz="quarter" idx="3"/>
           </p:nvPr>
         </p:nvSpPr>
         <p:spPr/>
@@ -952,7 +747,7 @@
             <a:spLocks noGrp="1"/>
           </p:cNvSpPr>
           <p:nvPr>
-            <p:ph type="sldNum" idx="5" sz="quarter"/>
+            <p:ph type="sldNum" sz="quarter" idx="5"/>
           </p:nvPr>
         </p:nvSpPr>
         <p:spPr/>
@@ -966,7 +761,7 @@
 </file>
 
 <file path=ppt/notesSlides/notesSlide16.xml><?xml version="1.0" encoding="utf-8"?>
-<p:notes xmlns:a="http://schemas.openxmlformats.org/drawingml/2006/main" xmlns:p="http://schemas.openxmlformats.org/presentationml/2006/main" xmlns:r="http://schemas.openxmlformats.org/officeDocument/2006/relationships">
+<p:notes xmlns:a="http://schemas.openxmlformats.org/drawingml/2006/main" xmlns:r="http://schemas.openxmlformats.org/officeDocument/2006/relationships" xmlns:p="http://schemas.openxmlformats.org/presentationml/2006/main">
   <p:cSld>
     <p:spTree>
       <p:nvGrpSpPr>
@@ -986,7 +781,7 @@
         <p:nvSpPr>
           <p:cNvPr id="2" name="Slide Image Placeholder 1"/>
           <p:cNvSpPr>
-            <a:spLocks noGrp="1"/>
+            <a:spLocks noGrp="1" noRot="1" noChangeAspect="1"/>
           </p:cNvSpPr>
           <p:nvPr>
             <p:ph type="sldImg" idx="2"/>
@@ -1001,7 +796,7 @@
             <a:spLocks noGrp="1"/>
           </p:cNvSpPr>
           <p:nvPr>
-            <p:ph type="body" idx="3" sz="quarter"/>
+            <p:ph type="body" sz="quarter" idx="3"/>
           </p:nvPr>
         </p:nvSpPr>
         <p:spPr/>
@@ -1022,7 +817,7 @@
             <a:spLocks noGrp="1"/>
           </p:cNvSpPr>
           <p:nvPr>
-            <p:ph type="sldNum" idx="5" sz="quarter"/>
+            <p:ph type="sldNum" sz="quarter" idx="5"/>
           </p:nvPr>
         </p:nvSpPr>
         <p:spPr/>
@@ -1036,7 +831,7 @@
 </file>
 
 <file path=ppt/notesSlides/notesSlide17.xml><?xml version="1.0" encoding="utf-8"?>
-<p:notes xmlns:a="http://schemas.openxmlformats.org/drawingml/2006/main" xmlns:p="http://schemas.openxmlformats.org/presentationml/2006/main" xmlns:r="http://schemas.openxmlformats.org/officeDocument/2006/relationships">
+<p:notes xmlns:a="http://schemas.openxmlformats.org/drawingml/2006/main" xmlns:r="http://schemas.openxmlformats.org/officeDocument/2006/relationships" xmlns:p="http://schemas.openxmlformats.org/presentationml/2006/main">
   <p:cSld>
     <p:spTree>
       <p:nvGrpSpPr>
@@ -1056,7 +851,7 @@
         <p:nvSpPr>
           <p:cNvPr id="2" name="Slide Image Placeholder 1"/>
           <p:cNvSpPr>
-            <a:spLocks noGrp="1"/>
+            <a:spLocks noGrp="1" noRot="1" noChangeAspect="1"/>
           </p:cNvSpPr>
           <p:nvPr>
             <p:ph type="sldImg" idx="2"/>
@@ -1071,7 +866,7 @@
             <a:spLocks noGrp="1"/>
           </p:cNvSpPr>
           <p:nvPr>
-            <p:ph type="body" idx="3" sz="quarter"/>
+            <p:ph type="body" sz="quarter" idx="3"/>
           </p:nvPr>
         </p:nvSpPr>
         <p:spPr/>
@@ -1092,7 +887,7 @@
             <a:spLocks noGrp="1"/>
           </p:cNvSpPr>
           <p:nvPr>
-            <p:ph type="sldNum" idx="5" sz="quarter"/>
+            <p:ph type="sldNum" sz="quarter" idx="5"/>
           </p:nvPr>
         </p:nvSpPr>
         <p:spPr/>
@@ -1106,7 +901,7 @@
 </file>
 
 <file path=ppt/notesSlides/notesSlide18.xml><?xml version="1.0" encoding="utf-8"?>
-<p:notes xmlns:a="http://schemas.openxmlformats.org/drawingml/2006/main" xmlns:p="http://schemas.openxmlformats.org/presentationml/2006/main" xmlns:r="http://schemas.openxmlformats.org/officeDocument/2006/relationships">
+<p:notes xmlns:a="http://schemas.openxmlformats.org/drawingml/2006/main" xmlns:r="http://schemas.openxmlformats.org/officeDocument/2006/relationships" xmlns:p="http://schemas.openxmlformats.org/presentationml/2006/main">
   <p:cSld>
     <p:spTree>
       <p:nvGrpSpPr>
@@ -1126,7 +921,7 @@
         <p:nvSpPr>
           <p:cNvPr id="2" name="Slide Image Placeholder 1"/>
           <p:cNvSpPr>
-            <a:spLocks noGrp="1"/>
+            <a:spLocks noGrp="1" noRot="1" noChangeAspect="1"/>
           </p:cNvSpPr>
           <p:nvPr>
             <p:ph type="sldImg" idx="2"/>
@@ -1141,7 +936,7 @@
             <a:spLocks noGrp="1"/>
           </p:cNvSpPr>
           <p:nvPr>
-            <p:ph type="body" idx="3" sz="quarter"/>
+            <p:ph type="body" sz="quarter" idx="3"/>
           </p:nvPr>
         </p:nvSpPr>
         <p:spPr/>
@@ -1162,7 +957,7 @@
             <a:spLocks noGrp="1"/>
           </p:cNvSpPr>
           <p:nvPr>
-            <p:ph type="sldNum" idx="5" sz="quarter"/>
+            <p:ph type="sldNum" sz="quarter" idx="5"/>
           </p:nvPr>
         </p:nvSpPr>
         <p:spPr/>
@@ -1176,7 +971,7 @@
 </file>
 
 <file path=ppt/notesSlides/notesSlide19.xml><?xml version="1.0" encoding="utf-8"?>
-<p:notes xmlns:a="http://schemas.openxmlformats.org/drawingml/2006/main" xmlns:p="http://schemas.openxmlformats.org/presentationml/2006/main" xmlns:r="http://schemas.openxmlformats.org/officeDocument/2006/relationships">
+<p:notes xmlns:a="http://schemas.openxmlformats.org/drawingml/2006/main" xmlns:r="http://schemas.openxmlformats.org/officeDocument/2006/relationships" xmlns:p="http://schemas.openxmlformats.org/presentationml/2006/main">
   <p:cSld>
     <p:spTree>
       <p:nvGrpSpPr>
@@ -1196,7 +991,7 @@
         <p:nvSpPr>
           <p:cNvPr id="2" name="Slide Image Placeholder 1"/>
           <p:cNvSpPr>
-            <a:spLocks noGrp="1"/>
+            <a:spLocks noGrp="1" noRot="1" noChangeAspect="1"/>
           </p:cNvSpPr>
           <p:nvPr>
             <p:ph type="sldImg" idx="2"/>
@@ -1211,7 +1006,7 @@
             <a:spLocks noGrp="1"/>
           </p:cNvSpPr>
           <p:nvPr>
-            <p:ph type="body" idx="3" sz="quarter"/>
+            <p:ph type="body" sz="quarter" idx="3"/>
           </p:nvPr>
         </p:nvSpPr>
         <p:spPr/>
@@ -1232,7 +1027,7 @@
             <a:spLocks noGrp="1"/>
           </p:cNvSpPr>
           <p:nvPr>
-            <p:ph type="sldNum" idx="5" sz="quarter"/>
+            <p:ph type="sldNum" sz="quarter" idx="5"/>
           </p:nvPr>
         </p:nvSpPr>
         <p:spPr/>
@@ -1246,7 +1041,7 @@
 </file>
 
 <file path=ppt/notesSlides/notesSlide2.xml><?xml version="1.0" encoding="utf-8"?>
-<p:notes xmlns:a="http://schemas.openxmlformats.org/drawingml/2006/main" xmlns:p="http://schemas.openxmlformats.org/presentationml/2006/main" xmlns:r="http://schemas.openxmlformats.org/officeDocument/2006/relationships">
+<p:notes xmlns:a="http://schemas.openxmlformats.org/drawingml/2006/main" xmlns:r="http://schemas.openxmlformats.org/officeDocument/2006/relationships" xmlns:p="http://schemas.openxmlformats.org/presentationml/2006/main">
   <p:cSld>
     <p:spTree>
       <p:nvGrpSpPr>
@@ -1266,7 +1061,7 @@
         <p:nvSpPr>
           <p:cNvPr id="2" name="Slide Image Placeholder 1"/>
           <p:cNvSpPr>
-            <a:spLocks noGrp="1"/>
+            <a:spLocks noGrp="1" noRot="1" noChangeAspect="1"/>
           </p:cNvSpPr>
           <p:nvPr>
             <p:ph type="sldImg" idx="2"/>
@@ -1281,7 +1076,7 @@
             <a:spLocks noGrp="1"/>
           </p:cNvSpPr>
           <p:nvPr>
-            <p:ph type="body" idx="3" sz="quarter"/>
+            <p:ph type="body" sz="quarter" idx="3"/>
           </p:nvPr>
         </p:nvSpPr>
         <p:spPr/>
@@ -1290,6 +1085,7 @@
           <a:lstStyle/>
           <a:p>
             <a:r>
+              <a:rPr dirty="0"/>
               <a:t>Student dropout is costly — both for students who invest time and money, and for universities that lose funding and reputation. In our dataset, nearly one-third of students dropped out. Our goal is to use data mining to build an early-warning system that flags at-risk students so advisors can intervene before it's too late.</a:t>
             </a:r>
           </a:p>
@@ -1302,7 +1098,7 @@
             <a:spLocks noGrp="1"/>
           </p:cNvSpPr>
           <p:nvPr>
-            <p:ph type="sldNum" idx="5" sz="quarter"/>
+            <p:ph type="sldNum" sz="quarter" idx="5"/>
           </p:nvPr>
         </p:nvSpPr>
         <p:spPr/>
@@ -1316,7 +1112,7 @@
 </file>
 
 <file path=ppt/notesSlides/notesSlide3.xml><?xml version="1.0" encoding="utf-8"?>
-<p:notes xmlns:a="http://schemas.openxmlformats.org/drawingml/2006/main" xmlns:p="http://schemas.openxmlformats.org/presentationml/2006/main" xmlns:r="http://schemas.openxmlformats.org/officeDocument/2006/relationships">
+<p:notes xmlns:a="http://schemas.openxmlformats.org/drawingml/2006/main" xmlns:r="http://schemas.openxmlformats.org/officeDocument/2006/relationships" xmlns:p="http://schemas.openxmlformats.org/presentationml/2006/main">
   <p:cSld>
     <p:spTree>
       <p:nvGrpSpPr>
@@ -1336,7 +1132,7 @@
         <p:nvSpPr>
           <p:cNvPr id="2" name="Slide Image Placeholder 1"/>
           <p:cNvSpPr>
-            <a:spLocks noGrp="1"/>
+            <a:spLocks noGrp="1" noRot="1" noChangeAspect="1"/>
           </p:cNvSpPr>
           <p:nvPr>
             <p:ph type="sldImg" idx="2"/>
@@ -1351,7 +1147,7 @@
             <a:spLocks noGrp="1"/>
           </p:cNvSpPr>
           <p:nvPr>
-            <p:ph type="body" idx="3" sz="quarter"/>
+            <p:ph type="body" sz="quarter" idx="3"/>
           </p:nvPr>
         </p:nvSpPr>
         <p:spPr/>
@@ -1360,6 +1156,7 @@
           <a:lstStyle/>
           <a:p>
             <a:r>
+              <a:rPr dirty="0"/>
               <a:t>Our core research question is whether we can predict student outcomes using data available at enrollment time and after the first semesters. This is a multi-class problem with three outcomes. The class imbalance is a key challenge — Enrolled students make up only 18% of the data, making them harder to predict correctly.</a:t>
             </a:r>
           </a:p>
@@ -1372,7 +1169,7 @@
             <a:spLocks noGrp="1"/>
           </p:cNvSpPr>
           <p:nvPr>
-            <p:ph type="sldNum" idx="5" sz="quarter"/>
+            <p:ph type="sldNum" sz="quarter" idx="5"/>
           </p:nvPr>
         </p:nvSpPr>
         <p:spPr/>
@@ -1386,7 +1183,7 @@
 </file>
 
 <file path=ppt/notesSlides/notesSlide4.xml><?xml version="1.0" encoding="utf-8"?>
-<p:notes xmlns:a="http://schemas.openxmlformats.org/drawingml/2006/main" xmlns:p="http://schemas.openxmlformats.org/presentationml/2006/main" xmlns:r="http://schemas.openxmlformats.org/officeDocument/2006/relationships">
+<p:notes xmlns:a="http://schemas.openxmlformats.org/drawingml/2006/main" xmlns:r="http://schemas.openxmlformats.org/officeDocument/2006/relationships" xmlns:p="http://schemas.openxmlformats.org/presentationml/2006/main">
   <p:cSld>
     <p:spTree>
       <p:nvGrpSpPr>
@@ -1406,7 +1203,7 @@
         <p:nvSpPr>
           <p:cNvPr id="2" name="Slide Image Placeholder 1"/>
           <p:cNvSpPr>
-            <a:spLocks noGrp="1"/>
+            <a:spLocks noGrp="1" noRot="1" noChangeAspect="1"/>
           </p:cNvSpPr>
           <p:nvPr>
             <p:ph type="sldImg" idx="2"/>
@@ -1421,7 +1218,7 @@
             <a:spLocks noGrp="1"/>
           </p:cNvSpPr>
           <p:nvPr>
-            <p:ph type="body" idx="3" sz="quarter"/>
+            <p:ph type="body" sz="quarter" idx="3"/>
           </p:nvPr>
         </p:nvSpPr>
         <p:spPr/>
@@ -1430,6 +1227,7 @@
           <a:lstStyle/>
           <a:p>
             <a:r>
+              <a:rPr dirty="0"/>
               <a:t>Our dataset comes from the UCI repository — compiled from institutional databases at a Portuguese polytechnic. It contains 4,424 student records with 36 features spanning demographics, prior academics, socio-economic factors, and semester performance. Importantly, there are no missing values, so we could focus on modeling rather than imputation.</a:t>
             </a:r>
           </a:p>
@@ -1442,7 +1240,7 @@
             <a:spLocks noGrp="1"/>
           </p:cNvSpPr>
           <p:nvPr>
-            <p:ph type="sldNum" idx="5" sz="quarter"/>
+            <p:ph type="sldNum" sz="quarter" idx="5"/>
           </p:nvPr>
         </p:nvSpPr>
         <p:spPr/>
@@ -1456,7 +1254,7 @@
 </file>
 
 <file path=ppt/notesSlides/notesSlide5.xml><?xml version="1.0" encoding="utf-8"?>
-<p:notes xmlns:a="http://schemas.openxmlformats.org/drawingml/2006/main" xmlns:p="http://schemas.openxmlformats.org/presentationml/2006/main" xmlns:r="http://schemas.openxmlformats.org/officeDocument/2006/relationships">
+<p:notes xmlns:a="http://schemas.openxmlformats.org/drawingml/2006/main" xmlns:r="http://schemas.openxmlformats.org/officeDocument/2006/relationships" xmlns:p="http://schemas.openxmlformats.org/presentationml/2006/main">
   <p:cSld>
     <p:spTree>
       <p:nvGrpSpPr>
@@ -1476,7 +1274,7 @@
         <p:nvSpPr>
           <p:cNvPr id="2" name="Slide Image Placeholder 1"/>
           <p:cNvSpPr>
-            <a:spLocks noGrp="1"/>
+            <a:spLocks noGrp="1" noRot="1" noChangeAspect="1"/>
           </p:cNvSpPr>
           <p:nvPr>
             <p:ph type="sldImg" idx="2"/>
@@ -1491,7 +1289,7 @@
             <a:spLocks noGrp="1"/>
           </p:cNvSpPr>
           <p:nvPr>
-            <p:ph type="body" idx="3" sz="quarter"/>
+            <p:ph type="body" sz="quarter" idx="3"/>
           </p:nvPr>
         </p:nvSpPr>
         <p:spPr/>
@@ -1512,7 +1310,7 @@
             <a:spLocks noGrp="1"/>
           </p:cNvSpPr>
           <p:nvPr>
-            <p:ph type="sldNum" idx="5" sz="quarter"/>
+            <p:ph type="sldNum" sz="quarter" idx="5"/>
           </p:nvPr>
         </p:nvSpPr>
         <p:spPr/>
@@ -1526,7 +1324,7 @@
 </file>
 
 <file path=ppt/notesSlides/notesSlide6.xml><?xml version="1.0" encoding="utf-8"?>
-<p:notes xmlns:a="http://schemas.openxmlformats.org/drawingml/2006/main" xmlns:p="http://schemas.openxmlformats.org/presentationml/2006/main" xmlns:r="http://schemas.openxmlformats.org/officeDocument/2006/relationships">
+<p:notes xmlns:a="http://schemas.openxmlformats.org/drawingml/2006/main" xmlns:r="http://schemas.openxmlformats.org/officeDocument/2006/relationships" xmlns:p="http://schemas.openxmlformats.org/presentationml/2006/main">
   <p:cSld>
     <p:spTree>
       <p:nvGrpSpPr>
@@ -1546,7 +1344,7 @@
         <p:nvSpPr>
           <p:cNvPr id="2" name="Slide Image Placeholder 1"/>
           <p:cNvSpPr>
-            <a:spLocks noGrp="1"/>
+            <a:spLocks noGrp="1" noRot="1" noChangeAspect="1"/>
           </p:cNvSpPr>
           <p:nvPr>
             <p:ph type="sldImg" idx="2"/>
@@ -1561,7 +1359,7 @@
             <a:spLocks noGrp="1"/>
           </p:cNvSpPr>
           <p:nvPr>
-            <p:ph type="body" idx="3" sz="quarter"/>
+            <p:ph type="body" sz="quarter" idx="3"/>
           </p:nvPr>
         </p:nvSpPr>
         <p:spPr/>
@@ -1582,7 +1380,7 @@
             <a:spLocks noGrp="1"/>
           </p:cNvSpPr>
           <p:nvPr>
-            <p:ph type="sldNum" idx="5" sz="quarter"/>
+            <p:ph type="sldNum" sz="quarter" idx="5"/>
           </p:nvPr>
         </p:nvSpPr>
         <p:spPr/>
@@ -1596,7 +1394,7 @@
 </file>
 
 <file path=ppt/notesSlides/notesSlide7.xml><?xml version="1.0" encoding="utf-8"?>
-<p:notes xmlns:a="http://schemas.openxmlformats.org/drawingml/2006/main" xmlns:p="http://schemas.openxmlformats.org/presentationml/2006/main" xmlns:r="http://schemas.openxmlformats.org/officeDocument/2006/relationships">
+<p:notes xmlns:a="http://schemas.openxmlformats.org/drawingml/2006/main" xmlns:r="http://schemas.openxmlformats.org/officeDocument/2006/relationships" xmlns:p="http://schemas.openxmlformats.org/presentationml/2006/main">
   <p:cSld>
     <p:spTree>
       <p:nvGrpSpPr>
@@ -1616,7 +1414,7 @@
         <p:nvSpPr>
           <p:cNvPr id="2" name="Slide Image Placeholder 1"/>
           <p:cNvSpPr>
-            <a:spLocks noGrp="1"/>
+            <a:spLocks noGrp="1" noRot="1" noChangeAspect="1"/>
           </p:cNvSpPr>
           <p:nvPr>
             <p:ph type="sldImg" idx="2"/>
@@ -1631,7 +1429,7 @@
             <a:spLocks noGrp="1"/>
           </p:cNvSpPr>
           <p:nvPr>
-            <p:ph type="body" idx="3" sz="quarter"/>
+            <p:ph type="body" sz="quarter" idx="3"/>
           </p:nvPr>
         </p:nvSpPr>
         <p:spPr/>
@@ -1652,7 +1450,7 @@
             <a:spLocks noGrp="1"/>
           </p:cNvSpPr>
           <p:nvPr>
-            <p:ph type="sldNum" idx="5" sz="quarter"/>
+            <p:ph type="sldNum" sz="quarter" idx="5"/>
           </p:nvPr>
         </p:nvSpPr>
         <p:spPr/>
@@ -1666,7 +1464,7 @@
 </file>
 
 <file path=ppt/notesSlides/notesSlide8.xml><?xml version="1.0" encoding="utf-8"?>
-<p:notes xmlns:a="http://schemas.openxmlformats.org/drawingml/2006/main" xmlns:p="http://schemas.openxmlformats.org/presentationml/2006/main" xmlns:r="http://schemas.openxmlformats.org/officeDocument/2006/relationships">
+<p:notes xmlns:a="http://schemas.openxmlformats.org/drawingml/2006/main" xmlns:r="http://schemas.openxmlformats.org/officeDocument/2006/relationships" xmlns:p="http://schemas.openxmlformats.org/presentationml/2006/main">
   <p:cSld>
     <p:spTree>
       <p:nvGrpSpPr>
@@ -1686,7 +1484,7 @@
         <p:nvSpPr>
           <p:cNvPr id="2" name="Slide Image Placeholder 1"/>
           <p:cNvSpPr>
-            <a:spLocks noGrp="1"/>
+            <a:spLocks noGrp="1" noRot="1" noChangeAspect="1"/>
           </p:cNvSpPr>
           <p:nvPr>
             <p:ph type="sldImg" idx="2"/>
@@ -1701,7 +1499,7 @@
             <a:spLocks noGrp="1"/>
           </p:cNvSpPr>
           <p:nvPr>
-            <p:ph type="body" idx="3" sz="quarter"/>
+            <p:ph type="body" sz="quarter" idx="3"/>
           </p:nvPr>
         </p:nvSpPr>
         <p:spPr/>
@@ -1722,7 +1520,7 @@
             <a:spLocks noGrp="1"/>
           </p:cNvSpPr>
           <p:nvPr>
-            <p:ph type="sldNum" idx="5" sz="quarter"/>
+            <p:ph type="sldNum" sz="quarter" idx="5"/>
           </p:nvPr>
         </p:nvSpPr>
         <p:spPr/>
@@ -1736,7 +1534,7 @@
 </file>
 
 <file path=ppt/notesSlides/notesSlide9.xml><?xml version="1.0" encoding="utf-8"?>
-<p:notes xmlns:a="http://schemas.openxmlformats.org/drawingml/2006/main" xmlns:p="http://schemas.openxmlformats.org/presentationml/2006/main" xmlns:r="http://schemas.openxmlformats.org/officeDocument/2006/relationships">
+<p:notes xmlns:a="http://schemas.openxmlformats.org/drawingml/2006/main" xmlns:r="http://schemas.openxmlformats.org/officeDocument/2006/relationships" xmlns:p="http://schemas.openxmlformats.org/presentationml/2006/main">
   <p:cSld>
     <p:spTree>
       <p:nvGrpSpPr>
@@ -1756,7 +1554,7 @@
         <p:nvSpPr>
           <p:cNvPr id="2" name="Slide Image Placeholder 1"/>
           <p:cNvSpPr>
-            <a:spLocks noGrp="1"/>
+            <a:spLocks noGrp="1" noRot="1" noChangeAspect="1"/>
           </p:cNvSpPr>
           <p:nvPr>
             <p:ph type="sldImg" idx="2"/>
@@ -1771,7 +1569,7 @@
             <a:spLocks noGrp="1"/>
           </p:cNvSpPr>
           <p:nvPr>
-            <p:ph type="body" idx="3" sz="quarter"/>
+            <p:ph type="body" sz="quarter" idx="3"/>
           </p:nvPr>
         </p:nvSpPr>
         <p:spPr/>
@@ -1792,7 +1590,7 @@
             <a:spLocks noGrp="1"/>
           </p:cNvSpPr>
           <p:nvPr>
-            <p:ph type="sldNum" idx="5" sz="quarter"/>
+            <p:ph type="sldNum" sz="quarter" idx="5"/>
           </p:nvPr>
         </p:nvSpPr>
         <p:spPr/>
@@ -1843,10 +1641,9 @@
           <a:lstStyle/>
           <a:p>
             <a:r>
-              <a:rPr lang="en-US" smtClean="0"/>
+              <a:rPr lang="en-US"/>
               <a:t>Click to edit Master title style</a:t>
             </a:r>
-            <a:endParaRPr lang="en-US"/>
           </a:p>
         </p:txBody>
       </p:sp>
@@ -1962,10 +1759,9 @@
           </a:lstStyle>
           <a:p>
             <a:r>
-              <a:rPr lang="en-US" smtClean="0"/>
+              <a:rPr lang="en-US"/>
               <a:t>Click to edit Master subtitle style</a:t>
             </a:r>
-            <a:endParaRPr lang="en-US"/>
           </a:p>
         </p:txBody>
       </p:sp>
@@ -1986,7 +1782,7 @@
           <a:p>
             <a:fld id="{5BCAD085-E8A6-8845-BD4E-CB4CCA059FC4}" type="datetimeFigureOut">
               <a:rPr lang="en-US" smtClean="0"/>
-              <a:t>1/27/13</a:t>
+              <a:t>4/29/26</a:t>
             </a:fld>
             <a:endParaRPr lang="en-US"/>
           </a:p>
@@ -2080,10 +1876,9 @@
           <a:lstStyle/>
           <a:p>
             <a:r>
-              <a:rPr lang="en-US" smtClean="0"/>
+              <a:rPr lang="en-US"/>
               <a:t>Click to edit Master title style</a:t>
             </a:r>
-            <a:endParaRPr lang="en-US"/>
           </a:p>
         </p:txBody>
       </p:sp>
@@ -2104,38 +1899,37 @@
           <a:p>
             <a:pPr lvl="0"/>
             <a:r>
-              <a:rPr lang="en-US" smtClean="0"/>
+              <a:rPr lang="en-US"/>
               <a:t>Click to edit Master text styles</a:t>
             </a:r>
           </a:p>
           <a:p>
             <a:pPr lvl="1"/>
             <a:r>
-              <a:rPr lang="en-US" smtClean="0"/>
+              <a:rPr lang="en-US"/>
               <a:t>Second level</a:t>
             </a:r>
           </a:p>
           <a:p>
             <a:pPr lvl="2"/>
             <a:r>
-              <a:rPr lang="en-US" smtClean="0"/>
+              <a:rPr lang="en-US"/>
               <a:t>Third level</a:t>
             </a:r>
           </a:p>
           <a:p>
             <a:pPr lvl="3"/>
             <a:r>
-              <a:rPr lang="en-US" smtClean="0"/>
+              <a:rPr lang="en-US"/>
               <a:t>Fourth level</a:t>
             </a:r>
           </a:p>
           <a:p>
             <a:pPr lvl="4"/>
             <a:r>
-              <a:rPr lang="en-US" smtClean="0"/>
+              <a:rPr lang="en-US"/>
               <a:t>Fifth level</a:t>
             </a:r>
-            <a:endParaRPr lang="en-US"/>
           </a:p>
         </p:txBody>
       </p:sp>
@@ -2156,7 +1950,7 @@
           <a:p>
             <a:fld id="{5BCAD085-E8A6-8845-BD4E-CB4CCA059FC4}" type="datetimeFigureOut">
               <a:rPr lang="en-US" smtClean="0"/>
-              <a:t>1/27/13</a:t>
+              <a:t>4/29/26</a:t>
             </a:fld>
             <a:endParaRPr lang="en-US"/>
           </a:p>
@@ -2255,10 +2049,9 @@
           <a:lstStyle/>
           <a:p>
             <a:r>
-              <a:rPr lang="en-US" smtClean="0"/>
+              <a:rPr lang="en-US"/>
               <a:t>Click to edit Master title style</a:t>
             </a:r>
-            <a:endParaRPr lang="en-US"/>
           </a:p>
         </p:txBody>
       </p:sp>
@@ -2284,38 +2077,37 @@
           <a:p>
             <a:pPr lvl="0"/>
             <a:r>
-              <a:rPr lang="en-US" smtClean="0"/>
+              <a:rPr lang="en-US"/>
               <a:t>Click to edit Master text styles</a:t>
             </a:r>
           </a:p>
           <a:p>
             <a:pPr lvl="1"/>
             <a:r>
-              <a:rPr lang="en-US" smtClean="0"/>
+              <a:rPr lang="en-US"/>
               <a:t>Second level</a:t>
             </a:r>
           </a:p>
           <a:p>
             <a:pPr lvl="2"/>
             <a:r>
-              <a:rPr lang="en-US" smtClean="0"/>
+              <a:rPr lang="en-US"/>
               <a:t>Third level</a:t>
             </a:r>
           </a:p>
           <a:p>
             <a:pPr lvl="3"/>
             <a:r>
-              <a:rPr lang="en-US" smtClean="0"/>
+              <a:rPr lang="en-US"/>
               <a:t>Fourth level</a:t>
             </a:r>
           </a:p>
           <a:p>
             <a:pPr lvl="4"/>
             <a:r>
-              <a:rPr lang="en-US" smtClean="0"/>
+              <a:rPr lang="en-US"/>
               <a:t>Fifth level</a:t>
             </a:r>
-            <a:endParaRPr lang="en-US"/>
           </a:p>
         </p:txBody>
       </p:sp>
@@ -2336,7 +2128,7 @@
           <a:p>
             <a:fld id="{5BCAD085-E8A6-8845-BD4E-CB4CCA059FC4}" type="datetimeFigureOut">
               <a:rPr lang="en-US" smtClean="0"/>
-              <a:t>1/27/13</a:t>
+              <a:t>4/29/26</a:t>
             </a:fld>
             <a:endParaRPr lang="en-US"/>
           </a:p>
@@ -2430,10 +2222,9 @@
           <a:lstStyle/>
           <a:p>
             <a:r>
-              <a:rPr lang="en-US" smtClean="0"/>
+              <a:rPr lang="en-US"/>
               <a:t>Click to edit Master title style</a:t>
             </a:r>
-            <a:endParaRPr lang="en-US"/>
           </a:p>
         </p:txBody>
       </p:sp>
@@ -2454,38 +2245,37 @@
           <a:p>
             <a:pPr lvl="0"/>
             <a:r>
-              <a:rPr lang="en-US" smtClean="0"/>
+              <a:rPr lang="en-US"/>
               <a:t>Click to edit Master text styles</a:t>
             </a:r>
           </a:p>
           <a:p>
             <a:pPr lvl="1"/>
             <a:r>
-              <a:rPr lang="en-US" smtClean="0"/>
+              <a:rPr lang="en-US"/>
               <a:t>Second level</a:t>
             </a:r>
           </a:p>
           <a:p>
             <a:pPr lvl="2"/>
             <a:r>
-              <a:rPr lang="en-US" smtClean="0"/>
+              <a:rPr lang="en-US"/>
               <a:t>Third level</a:t>
             </a:r>
           </a:p>
           <a:p>
             <a:pPr lvl="3"/>
             <a:r>
-              <a:rPr lang="en-US" smtClean="0"/>
+              <a:rPr lang="en-US"/>
               <a:t>Fourth level</a:t>
             </a:r>
           </a:p>
           <a:p>
             <a:pPr lvl="4"/>
             <a:r>
-              <a:rPr lang="en-US" smtClean="0"/>
+              <a:rPr lang="en-US"/>
               <a:t>Fifth level</a:t>
             </a:r>
-            <a:endParaRPr lang="en-US"/>
           </a:p>
         </p:txBody>
       </p:sp>
@@ -2506,7 +2296,7 @@
           <a:p>
             <a:fld id="{5BCAD085-E8A6-8845-BD4E-CB4CCA059FC4}" type="datetimeFigureOut">
               <a:rPr lang="en-US" smtClean="0"/>
-              <a:t>1/27/13</a:t>
+              <a:t>4/29/26</a:t>
             </a:fld>
             <a:endParaRPr lang="en-US"/>
           </a:p>
@@ -2609,10 +2399,9 @@
           </a:lstStyle>
           <a:p>
             <a:r>
-              <a:rPr lang="en-US" smtClean="0"/>
+              <a:rPr lang="en-US"/>
               <a:t>Click to edit Master title style</a:t>
             </a:r>
-            <a:endParaRPr lang="en-US"/>
           </a:p>
         </p:txBody>
       </p:sp>
@@ -2729,7 +2518,7 @@
           <a:p>
             <a:pPr lvl="0"/>
             <a:r>
-              <a:rPr lang="en-US" smtClean="0"/>
+              <a:rPr lang="en-US"/>
               <a:t>Click to edit Master text styles</a:t>
             </a:r>
           </a:p>
@@ -2752,7 +2541,7 @@
           <a:p>
             <a:fld id="{5BCAD085-E8A6-8845-BD4E-CB4CCA059FC4}" type="datetimeFigureOut">
               <a:rPr lang="en-US" smtClean="0"/>
-              <a:t>1/27/13</a:t>
+              <a:t>4/29/26</a:t>
             </a:fld>
             <a:endParaRPr lang="en-US"/>
           </a:p>
@@ -2846,10 +2635,9 @@
           <a:lstStyle/>
           <a:p>
             <a:r>
-              <a:rPr lang="en-US" smtClean="0"/>
+              <a:rPr lang="en-US"/>
               <a:t>Click to edit Master title style</a:t>
             </a:r>
-            <a:endParaRPr lang="en-US"/>
           </a:p>
         </p:txBody>
       </p:sp>
@@ -2903,38 +2691,37 @@
           <a:p>
             <a:pPr lvl="0"/>
             <a:r>
-              <a:rPr lang="en-US" smtClean="0"/>
+              <a:rPr lang="en-US"/>
               <a:t>Click to edit Master text styles</a:t>
             </a:r>
           </a:p>
           <a:p>
             <a:pPr lvl="1"/>
             <a:r>
-              <a:rPr lang="en-US" smtClean="0"/>
+              <a:rPr lang="en-US"/>
               <a:t>Second level</a:t>
             </a:r>
           </a:p>
           <a:p>
             <a:pPr lvl="2"/>
             <a:r>
-              <a:rPr lang="en-US" smtClean="0"/>
+              <a:rPr lang="en-US"/>
               <a:t>Third level</a:t>
             </a:r>
           </a:p>
           <a:p>
             <a:pPr lvl="3"/>
             <a:r>
-              <a:rPr lang="en-US" smtClean="0"/>
+              <a:rPr lang="en-US"/>
               <a:t>Fourth level</a:t>
             </a:r>
           </a:p>
           <a:p>
             <a:pPr lvl="4"/>
             <a:r>
-              <a:rPr lang="en-US" smtClean="0"/>
+              <a:rPr lang="en-US"/>
               <a:t>Fifth level</a:t>
             </a:r>
-            <a:endParaRPr lang="en-US"/>
           </a:p>
         </p:txBody>
       </p:sp>
@@ -2988,38 +2775,37 @@
           <a:p>
             <a:pPr lvl="0"/>
             <a:r>
-              <a:rPr lang="en-US" smtClean="0"/>
+              <a:rPr lang="en-US"/>
               <a:t>Click to edit Master text styles</a:t>
             </a:r>
           </a:p>
           <a:p>
             <a:pPr lvl="1"/>
             <a:r>
-              <a:rPr lang="en-US" smtClean="0"/>
+              <a:rPr lang="en-US"/>
               <a:t>Second level</a:t>
             </a:r>
           </a:p>
           <a:p>
             <a:pPr lvl="2"/>
             <a:r>
-              <a:rPr lang="en-US" smtClean="0"/>
+              <a:rPr lang="en-US"/>
               <a:t>Third level</a:t>
             </a:r>
           </a:p>
           <a:p>
             <a:pPr lvl="3"/>
             <a:r>
-              <a:rPr lang="en-US" smtClean="0"/>
+              <a:rPr lang="en-US"/>
               <a:t>Fourth level</a:t>
             </a:r>
           </a:p>
           <a:p>
             <a:pPr lvl="4"/>
             <a:r>
-              <a:rPr lang="en-US" smtClean="0"/>
+              <a:rPr lang="en-US"/>
               <a:t>Fifth level</a:t>
             </a:r>
-            <a:endParaRPr lang="en-US"/>
           </a:p>
         </p:txBody>
       </p:sp>
@@ -3040,7 +2826,7 @@
           <a:p>
             <a:fld id="{5BCAD085-E8A6-8845-BD4E-CB4CCA059FC4}" type="datetimeFigureOut">
               <a:rPr lang="en-US" smtClean="0"/>
-              <a:t>1/27/13</a:t>
+              <a:t>4/29/26</a:t>
             </a:fld>
             <a:endParaRPr lang="en-US"/>
           </a:p>
@@ -3138,10 +2924,9 @@
           </a:lstStyle>
           <a:p>
             <a:r>
-              <a:rPr lang="en-US" smtClean="0"/>
+              <a:rPr lang="en-US"/>
               <a:t>Click to edit Master title style</a:t>
             </a:r>
-            <a:endParaRPr lang="en-US"/>
           </a:p>
         </p:txBody>
       </p:sp>
@@ -3204,7 +2989,7 @@
           <a:p>
             <a:pPr lvl="0"/>
             <a:r>
-              <a:rPr lang="en-US" smtClean="0"/>
+              <a:rPr lang="en-US"/>
               <a:t>Click to edit Master text styles</a:t>
             </a:r>
           </a:p>
@@ -3260,38 +3045,37 @@
           <a:p>
             <a:pPr lvl="0"/>
             <a:r>
-              <a:rPr lang="en-US" smtClean="0"/>
+              <a:rPr lang="en-US"/>
               <a:t>Click to edit Master text styles</a:t>
             </a:r>
           </a:p>
           <a:p>
             <a:pPr lvl="1"/>
             <a:r>
-              <a:rPr lang="en-US" smtClean="0"/>
+              <a:rPr lang="en-US"/>
               <a:t>Second level</a:t>
             </a:r>
           </a:p>
           <a:p>
             <a:pPr lvl="2"/>
             <a:r>
-              <a:rPr lang="en-US" smtClean="0"/>
+              <a:rPr lang="en-US"/>
               <a:t>Third level</a:t>
             </a:r>
           </a:p>
           <a:p>
             <a:pPr lvl="3"/>
             <a:r>
-              <a:rPr lang="en-US" smtClean="0"/>
+              <a:rPr lang="en-US"/>
               <a:t>Fourth level</a:t>
             </a:r>
           </a:p>
           <a:p>
             <a:pPr lvl="4"/>
             <a:r>
-              <a:rPr lang="en-US" smtClean="0"/>
+              <a:rPr lang="en-US"/>
               <a:t>Fifth level</a:t>
             </a:r>
-            <a:endParaRPr lang="en-US"/>
           </a:p>
         </p:txBody>
       </p:sp>
@@ -3354,7 +3138,7 @@
           <a:p>
             <a:pPr lvl="0"/>
             <a:r>
-              <a:rPr lang="en-US" smtClean="0"/>
+              <a:rPr lang="en-US"/>
               <a:t>Click to edit Master text styles</a:t>
             </a:r>
           </a:p>
@@ -3410,38 +3194,37 @@
           <a:p>
             <a:pPr lvl="0"/>
             <a:r>
-              <a:rPr lang="en-US" smtClean="0"/>
+              <a:rPr lang="en-US"/>
               <a:t>Click to edit Master text styles</a:t>
             </a:r>
           </a:p>
           <a:p>
             <a:pPr lvl="1"/>
             <a:r>
-              <a:rPr lang="en-US" smtClean="0"/>
+              <a:rPr lang="en-US"/>
               <a:t>Second level</a:t>
             </a:r>
           </a:p>
           <a:p>
             <a:pPr lvl="2"/>
             <a:r>
-              <a:rPr lang="en-US" smtClean="0"/>
+              <a:rPr lang="en-US"/>
               <a:t>Third level</a:t>
             </a:r>
           </a:p>
           <a:p>
             <a:pPr lvl="3"/>
             <a:r>
-              <a:rPr lang="en-US" smtClean="0"/>
+              <a:rPr lang="en-US"/>
               <a:t>Fourth level</a:t>
             </a:r>
           </a:p>
           <a:p>
             <a:pPr lvl="4"/>
             <a:r>
-              <a:rPr lang="en-US" smtClean="0"/>
+              <a:rPr lang="en-US"/>
               <a:t>Fifth level</a:t>
             </a:r>
-            <a:endParaRPr lang="en-US"/>
           </a:p>
         </p:txBody>
       </p:sp>
@@ -3462,7 +3245,7 @@
           <a:p>
             <a:fld id="{5BCAD085-E8A6-8845-BD4E-CB4CCA059FC4}" type="datetimeFigureOut">
               <a:rPr lang="en-US" smtClean="0"/>
-              <a:t>1/27/13</a:t>
+              <a:t>4/29/26</a:t>
             </a:fld>
             <a:endParaRPr lang="en-US"/>
           </a:p>
@@ -3556,10 +3339,9 @@
           <a:lstStyle/>
           <a:p>
             <a:r>
-              <a:rPr lang="en-US" smtClean="0"/>
+              <a:rPr lang="en-US"/>
               <a:t>Click to edit Master title style</a:t>
             </a:r>
-            <a:endParaRPr lang="en-US"/>
           </a:p>
         </p:txBody>
       </p:sp>
@@ -3580,7 +3362,7 @@
           <a:p>
             <a:fld id="{5BCAD085-E8A6-8845-BD4E-CB4CCA059FC4}" type="datetimeFigureOut">
               <a:rPr lang="en-US" smtClean="0"/>
-              <a:t>1/27/13</a:t>
+              <a:t>4/29/26</a:t>
             </a:fld>
             <a:endParaRPr lang="en-US"/>
           </a:p>
@@ -3675,7 +3457,7 @@
           <a:p>
             <a:fld id="{5BCAD085-E8A6-8845-BD4E-CB4CCA059FC4}" type="datetimeFigureOut">
               <a:rPr lang="en-US" smtClean="0"/>
-              <a:t>1/27/13</a:t>
+              <a:t>4/29/26</a:t>
             </a:fld>
             <a:endParaRPr lang="en-US"/>
           </a:p>
@@ -3778,10 +3560,9 @@
           </a:lstStyle>
           <a:p>
             <a:r>
-              <a:rPr lang="en-US" smtClean="0"/>
+              <a:rPr lang="en-US"/>
               <a:t>Click to edit Master title style</a:t>
             </a:r>
-            <a:endParaRPr lang="en-US"/>
           </a:p>
         </p:txBody>
       </p:sp>
@@ -3835,38 +3616,37 @@
           <a:p>
             <a:pPr lvl="0"/>
             <a:r>
-              <a:rPr lang="en-US" smtClean="0"/>
+              <a:rPr lang="en-US"/>
               <a:t>Click to edit Master text styles</a:t>
             </a:r>
           </a:p>
           <a:p>
             <a:pPr lvl="1"/>
             <a:r>
-              <a:rPr lang="en-US" smtClean="0"/>
+              <a:rPr lang="en-US"/>
               <a:t>Second level</a:t>
             </a:r>
           </a:p>
           <a:p>
             <a:pPr lvl="2"/>
             <a:r>
-              <a:rPr lang="en-US" smtClean="0"/>
+              <a:rPr lang="en-US"/>
               <a:t>Third level</a:t>
             </a:r>
           </a:p>
           <a:p>
             <a:pPr lvl="3"/>
             <a:r>
-              <a:rPr lang="en-US" smtClean="0"/>
+              <a:rPr lang="en-US"/>
               <a:t>Fourth level</a:t>
             </a:r>
           </a:p>
           <a:p>
             <a:pPr lvl="4"/>
             <a:r>
-              <a:rPr lang="en-US" smtClean="0"/>
+              <a:rPr lang="en-US"/>
               <a:t>Fifth level</a:t>
             </a:r>
-            <a:endParaRPr lang="en-US"/>
           </a:p>
         </p:txBody>
       </p:sp>
@@ -3929,7 +3709,7 @@
           <a:p>
             <a:pPr lvl="0"/>
             <a:r>
-              <a:rPr lang="en-US" smtClean="0"/>
+              <a:rPr lang="en-US"/>
               <a:t>Click to edit Master text styles</a:t>
             </a:r>
           </a:p>
@@ -3952,7 +3732,7 @@
           <a:p>
             <a:fld id="{5BCAD085-E8A6-8845-BD4E-CB4CCA059FC4}" type="datetimeFigureOut">
               <a:rPr lang="en-US" smtClean="0"/>
-              <a:t>1/27/13</a:t>
+              <a:t>4/29/26</a:t>
             </a:fld>
             <a:endParaRPr lang="en-US"/>
           </a:p>
@@ -4055,10 +3835,9 @@
           </a:lstStyle>
           <a:p>
             <a:r>
-              <a:rPr lang="en-US" smtClean="0"/>
+              <a:rPr lang="en-US"/>
               <a:t>Click to edit Master title style</a:t>
             </a:r>
-            <a:endParaRPr lang="en-US"/>
           </a:p>
         </p:txBody>
       </p:sp>
@@ -4182,7 +3961,7 @@
           <a:p>
             <a:pPr lvl="0"/>
             <a:r>
-              <a:rPr lang="en-US" smtClean="0"/>
+              <a:rPr lang="en-US"/>
               <a:t>Click to edit Master text styles</a:t>
             </a:r>
           </a:p>
@@ -4205,7 +3984,7 @@
           <a:p>
             <a:fld id="{5BCAD085-E8A6-8845-BD4E-CB4CCA059FC4}" type="datetimeFigureOut">
               <a:rPr lang="en-US" smtClean="0"/>
-              <a:t>1/27/13</a:t>
+              <a:t>4/29/26</a:t>
             </a:fld>
             <a:endParaRPr lang="en-US"/>
           </a:p>
@@ -4314,10 +4093,9 @@
           <a:lstStyle/>
           <a:p>
             <a:r>
-              <a:rPr lang="en-US" smtClean="0"/>
+              <a:rPr lang="en-US"/>
               <a:t>Click to edit Master title style</a:t>
             </a:r>
-            <a:endParaRPr lang="en-US"/>
           </a:p>
         </p:txBody>
       </p:sp>
@@ -4348,38 +4126,37 @@
           <a:p>
             <a:pPr lvl="0"/>
             <a:r>
-              <a:rPr lang="en-US" smtClean="0"/>
+              <a:rPr lang="en-US"/>
               <a:t>Click to edit Master text styles</a:t>
             </a:r>
           </a:p>
           <a:p>
             <a:pPr lvl="1"/>
             <a:r>
-              <a:rPr lang="en-US" smtClean="0"/>
+              <a:rPr lang="en-US"/>
               <a:t>Second level</a:t>
             </a:r>
           </a:p>
           <a:p>
             <a:pPr lvl="2"/>
             <a:r>
-              <a:rPr lang="en-US" smtClean="0"/>
+              <a:rPr lang="en-US"/>
               <a:t>Third level</a:t>
             </a:r>
           </a:p>
           <a:p>
             <a:pPr lvl="3"/>
             <a:r>
-              <a:rPr lang="en-US" smtClean="0"/>
+              <a:rPr lang="en-US"/>
               <a:t>Fourth level</a:t>
             </a:r>
           </a:p>
           <a:p>
             <a:pPr lvl="4"/>
             <a:r>
-              <a:rPr lang="en-US" smtClean="0"/>
+              <a:rPr lang="en-US"/>
               <a:t>Fifth level</a:t>
             </a:r>
-            <a:endParaRPr lang="en-US"/>
           </a:p>
         </p:txBody>
       </p:sp>
@@ -4418,7 +4195,7 @@
           <a:p>
             <a:fld id="{5BCAD085-E8A6-8845-BD4E-CB4CCA059FC4}" type="datetimeFigureOut">
               <a:rPr lang="en-US" smtClean="0"/>
-              <a:t>1/27/13</a:t>
+              <a:t>4/29/26</a:t>
             </a:fld>
             <a:endParaRPr lang="en-US"/>
           </a:p>
@@ -4777,7 +4554,7 @@
 </file>
 
 <file path=ppt/slides/slide1.xml><?xml version="1.0" encoding="utf-8"?>
-<p:sld xmlns:a="http://schemas.openxmlformats.org/drawingml/2006/main" xmlns:p="http://schemas.openxmlformats.org/presentationml/2006/main" xmlns:r="http://schemas.openxmlformats.org/officeDocument/2006/relationships">
+<p:sld xmlns:a="http://schemas.openxmlformats.org/drawingml/2006/main" xmlns:r="http://schemas.openxmlformats.org/officeDocument/2006/relationships" xmlns:p="http://schemas.openxmlformats.org/presentationml/2006/main">
   <p:cSld>
     <p:spTree>
       <p:nvGrpSpPr>
@@ -4785,7 +4562,14 @@
         <p:cNvGrpSpPr/>
         <p:nvPr/>
       </p:nvGrpSpPr>
-      <p:grpSpPr/>
+      <p:grpSpPr>
+        <a:xfrm>
+          <a:off x="0" y="0"/>
+          <a:ext cx="0" cy="0"/>
+          <a:chOff x="0" y="0"/>
+          <a:chExt cx="0" cy="0"/>
+        </a:xfrm>
+      </p:grpSpPr>
       <p:sp>
         <p:nvSpPr>
           <p:cNvPr id="2" name="Rectangle 1"/>
@@ -4826,6 +4610,7 @@
           <a:lstStyle/>
           <a:p>
             <a:pPr algn="ctr"/>
+            <a:endParaRPr/>
           </a:p>
         </p:txBody>
       </p:sp>
@@ -4869,6 +4654,7 @@
           <a:lstStyle/>
           <a:p>
             <a:pPr algn="ctr"/>
+            <a:endParaRPr/>
           </a:p>
         </p:txBody>
       </p:sp>
@@ -4957,7 +4743,7 @@
         <p:spPr>
           <a:xfrm>
             <a:off x="1371600" y="4114800"/>
-            <a:ext cx="9418320" cy="1645920"/>
+            <a:ext cx="9418320" cy="964367"/>
           </a:xfrm>
           <a:prstGeom prst="rect">
             <a:avLst/>
@@ -4982,8 +4768,14 @@
               </a:defRPr>
             </a:pPr>
             <a:r>
+              <a:rPr dirty="0"/>
               <a:t>Lam Nguyen (018229432)  •  Tri Ngo</a:t>
             </a:r>
+            <a:r>
+              <a:rPr lang="vi-VN" dirty="0"/>
+              <a:t> (015712749)</a:t>
+            </a:r>
+            <a:endParaRPr dirty="0"/>
           </a:p>
           <a:p>
             <a:pPr algn="l">
@@ -4998,6 +4790,7 @@
               </a:defRPr>
             </a:pPr>
             <a:r>
+              <a:rPr dirty="0"/>
               <a:t>San José State University</a:t>
             </a:r>
           </a:p>
@@ -5014,6 +4807,7 @@
               </a:defRPr>
             </a:pPr>
             <a:r>
+              <a:rPr dirty="0"/>
               <a:t>April 2026</a:t>
             </a:r>
           </a:p>
@@ -5064,7 +4858,7 @@
 </file>
 
 <file path=ppt/slides/slide10.xml><?xml version="1.0" encoding="utf-8"?>
-<p:sld xmlns:a="http://schemas.openxmlformats.org/drawingml/2006/main" xmlns:p="http://schemas.openxmlformats.org/presentationml/2006/main" xmlns:r="http://schemas.openxmlformats.org/officeDocument/2006/relationships">
+<p:sld xmlns:a="http://schemas.openxmlformats.org/drawingml/2006/main" xmlns:r="http://schemas.openxmlformats.org/officeDocument/2006/relationships" xmlns:p="http://schemas.openxmlformats.org/presentationml/2006/main">
   <p:cSld>
     <p:spTree>
       <p:nvGrpSpPr>
@@ -5072,7 +4866,14 @@
         <p:cNvGrpSpPr/>
         <p:nvPr/>
       </p:nvGrpSpPr>
-      <p:grpSpPr/>
+      <p:grpSpPr>
+        <a:xfrm>
+          <a:off x="0" y="0"/>
+          <a:ext cx="0" cy="0"/>
+          <a:chOff x="0" y="0"/>
+          <a:chExt cx="0" cy="0"/>
+        </a:xfrm>
+      </p:grpSpPr>
       <p:sp>
         <p:nvSpPr>
           <p:cNvPr id="2" name="Rectangle 1"/>
@@ -5109,7 +4910,7 @@
           </a:fontRef>
         </p:style>
         <p:txBody>
-          <a:bodyPr rtlCol="0" anchor="ctr" wrap="square" lIns="548640" tIns="137160"/>
+          <a:bodyPr wrap="square" lIns="548640" tIns="137160" rtlCol="0" anchor="ctr"/>
           <a:lstStyle/>
           <a:p>
             <a:pPr algn="l">
@@ -5129,66 +4930,6 @@
       <p:pic>
         <p:nvPicPr>
           <p:cNvPr id="3" name="Picture 2" descr="correlation_heatmap.png"/>
-          <p:cNvPicPr>
-            <a:picLocks noChangeAspect="1"/>
-          </p:cNvPicPr>
-          <p:nvPr/>
-        </p:nvPicPr>
-        <p:blipFill>
-          <a:blip r:embed="rId2"/>
-          <a:stretch>
-            <a:fillRect/>
-          </a:stretch>
-        </p:blipFill>
-        <p:spPr>
-          <a:xfrm>
-            <a:off x="365760" y="1280160"/>
-            <a:ext cx="3474720" cy="1920240"/>
-          </a:xfrm>
-          <a:prstGeom prst="rect">
-            <a:avLst/>
-          </a:prstGeom>
-        </p:spPr>
-      </p:pic>
-      <p:sp>
-        <p:nvSpPr>
-          <p:cNvPr id="4" name="TextBox 3"/>
-          <p:cNvSpPr txBox="1"/>
-          <p:nvPr/>
-        </p:nvSpPr>
-        <p:spPr>
-          <a:xfrm>
-            <a:off x="365760" y="3200400"/>
-            <a:ext cx="3474720" cy="365760"/>
-          </a:xfrm>
-          <a:prstGeom prst="rect">
-            <a:avLst/>
-          </a:prstGeom>
-          <a:noFill/>
-        </p:spPr>
-        <p:txBody>
-          <a:bodyPr wrap="none">
-            <a:spAutoFit/>
-          </a:bodyPr>
-          <a:lstStyle/>
-          <a:p>
-            <a:pPr algn="ctr">
-              <a:defRPr sz="1200" b="1">
-                <a:solidFill>
-                  <a:srgbClr val="333333"/>
-                </a:solidFill>
-                <a:latin typeface="Calibri"/>
-              </a:defRPr>
-            </a:pPr>
-            <a:r>
-              <a:t>Correlation Heatmap</a:t>
-            </a:r>
-          </a:p>
-        </p:txBody>
-      </p:sp>
-      <p:pic>
-        <p:nvPicPr>
-          <p:cNvPr id="5" name="Picture 4" descr="feature_distributions.png"/>
           <p:cNvPicPr>
             <a:picLocks noChangeAspect="1"/>
           </p:cNvPicPr>
@@ -5202,7 +4943,7 @@
         </p:blipFill>
         <p:spPr>
           <a:xfrm>
-            <a:off x="4114800" y="1280160"/>
+            <a:off x="365760" y="1280160"/>
             <a:ext cx="3474720" cy="1920240"/>
           </a:xfrm>
           <a:prstGeom prst="rect">
@@ -5212,13 +4953,13 @@
       </p:pic>
       <p:sp>
         <p:nvSpPr>
-          <p:cNvPr id="6" name="TextBox 5"/>
+          <p:cNvPr id="4" name="TextBox 3"/>
           <p:cNvSpPr txBox="1"/>
           <p:nvPr/>
         </p:nvSpPr>
         <p:spPr>
           <a:xfrm>
-            <a:off x="4114800" y="3200400"/>
+            <a:off x="365760" y="3200400"/>
             <a:ext cx="3474720" cy="365760"/>
           </a:xfrm>
           <a:prstGeom prst="rect">
@@ -5241,14 +4982,14 @@
               </a:defRPr>
             </a:pPr>
             <a:r>
-              <a:t>KDE Distributions</a:t>
+              <a:t>Correlation Heatmap</a:t>
             </a:r>
           </a:p>
         </p:txBody>
       </p:sp>
       <p:pic>
         <p:nvPicPr>
-          <p:cNvPr id="7" name="Picture 6" descr="boxplots_grades.png"/>
+          <p:cNvPr id="5" name="Picture 4" descr="feature_distributions.png"/>
           <p:cNvPicPr>
             <a:picLocks noChangeAspect="1"/>
           </p:cNvPicPr>
@@ -5262,7 +5003,7 @@
         </p:blipFill>
         <p:spPr>
           <a:xfrm>
-            <a:off x="7863840" y="1280160"/>
+            <a:off x="4114800" y="1280160"/>
             <a:ext cx="3474720" cy="1920240"/>
           </a:xfrm>
           <a:prstGeom prst="rect">
@@ -5272,13 +5013,13 @@
       </p:pic>
       <p:sp>
         <p:nvSpPr>
-          <p:cNvPr id="8" name="TextBox 7"/>
+          <p:cNvPr id="6" name="TextBox 5"/>
           <p:cNvSpPr txBox="1"/>
           <p:nvPr/>
         </p:nvSpPr>
         <p:spPr>
           <a:xfrm>
-            <a:off x="7863840" y="3200400"/>
+            <a:off x="4114800" y="3200400"/>
             <a:ext cx="3474720" cy="365760"/>
           </a:xfrm>
           <a:prstGeom prst="rect">
@@ -5301,14 +5042,14 @@
               </a:defRPr>
             </a:pPr>
             <a:r>
-              <a:t>Boxplots</a:t>
+              <a:t>KDE Distributions</a:t>
             </a:r>
           </a:p>
         </p:txBody>
       </p:sp>
       <p:pic>
         <p:nvPicPr>
-          <p:cNvPr id="9" name="Picture 8" descr="stacked_bar_binary.png"/>
+          <p:cNvPr id="7" name="Picture 6" descr="boxplots_grades.png"/>
           <p:cNvPicPr>
             <a:picLocks noChangeAspect="1"/>
           </p:cNvPicPr>
@@ -5322,7 +5063,7 @@
         </p:blipFill>
         <p:spPr>
           <a:xfrm>
-            <a:off x="365760" y="3474720"/>
+            <a:off x="7863840" y="1280160"/>
             <a:ext cx="3474720" cy="1920240"/>
           </a:xfrm>
           <a:prstGeom prst="rect">
@@ -5332,13 +5073,13 @@
       </p:pic>
       <p:sp>
         <p:nvSpPr>
-          <p:cNvPr id="10" name="TextBox 9"/>
+          <p:cNvPr id="8" name="TextBox 7"/>
           <p:cNvSpPr txBox="1"/>
           <p:nvPr/>
         </p:nvSpPr>
         <p:spPr>
           <a:xfrm>
-            <a:off x="365760" y="5394960"/>
+            <a:off x="7863840" y="3200400"/>
             <a:ext cx="3474720" cy="365760"/>
           </a:xfrm>
           <a:prstGeom prst="rect">
@@ -5361,14 +5102,14 @@
               </a:defRPr>
             </a:pPr>
             <a:r>
-              <a:t>Stacked Bar Charts</a:t>
+              <a:t>Boxplots</a:t>
             </a:r>
           </a:p>
         </p:txBody>
       </p:sp>
       <p:pic>
         <p:nvPicPr>
-          <p:cNvPr id="11" name="Picture 10" descr="pca_scatter.png"/>
+          <p:cNvPr id="9" name="Picture 8" descr="stacked_bar_binary.png"/>
           <p:cNvPicPr>
             <a:picLocks noChangeAspect="1"/>
           </p:cNvPicPr>
@@ -5382,7 +5123,7 @@
         </p:blipFill>
         <p:spPr>
           <a:xfrm>
-            <a:off x="4114800" y="3474720"/>
+            <a:off x="365760" y="3474720"/>
             <a:ext cx="3474720" cy="1920240"/>
           </a:xfrm>
           <a:prstGeom prst="rect">
@@ -5392,13 +5133,13 @@
       </p:pic>
       <p:sp>
         <p:nvSpPr>
-          <p:cNvPr id="12" name="TextBox 11"/>
+          <p:cNvPr id="10" name="TextBox 9"/>
           <p:cNvSpPr txBox="1"/>
           <p:nvPr/>
         </p:nvSpPr>
         <p:spPr>
           <a:xfrm>
-            <a:off x="4114800" y="5394960"/>
+            <a:off x="365760" y="5394960"/>
             <a:ext cx="3474720" cy="365760"/>
           </a:xfrm>
           <a:prstGeom prst="rect">
@@ -5421,14 +5162,14 @@
               </a:defRPr>
             </a:pPr>
             <a:r>
-              <a:t>PCA Scatter Plot</a:t>
+              <a:t>Stacked Bar Charts</a:t>
             </a:r>
           </a:p>
         </p:txBody>
       </p:sp>
       <p:pic>
         <p:nvPicPr>
-          <p:cNvPr id="13" name="Picture 12" descr="rf_feature_importance.png"/>
+          <p:cNvPr id="11" name="Picture 10" descr="pca_scatter.png"/>
           <p:cNvPicPr>
             <a:picLocks noChangeAspect="1"/>
           </p:cNvPicPr>
@@ -5442,6 +5183,66 @@
         </p:blipFill>
         <p:spPr>
           <a:xfrm>
+            <a:off x="4114800" y="3474720"/>
+            <a:ext cx="3474720" cy="1920240"/>
+          </a:xfrm>
+          <a:prstGeom prst="rect">
+            <a:avLst/>
+          </a:prstGeom>
+        </p:spPr>
+      </p:pic>
+      <p:sp>
+        <p:nvSpPr>
+          <p:cNvPr id="12" name="TextBox 11"/>
+          <p:cNvSpPr txBox="1"/>
+          <p:nvPr/>
+        </p:nvSpPr>
+        <p:spPr>
+          <a:xfrm>
+            <a:off x="4114800" y="5394960"/>
+            <a:ext cx="3474720" cy="365760"/>
+          </a:xfrm>
+          <a:prstGeom prst="rect">
+            <a:avLst/>
+          </a:prstGeom>
+          <a:noFill/>
+        </p:spPr>
+        <p:txBody>
+          <a:bodyPr wrap="none">
+            <a:spAutoFit/>
+          </a:bodyPr>
+          <a:lstStyle/>
+          <a:p>
+            <a:pPr algn="ctr">
+              <a:defRPr sz="1200" b="1">
+                <a:solidFill>
+                  <a:srgbClr val="333333"/>
+                </a:solidFill>
+                <a:latin typeface="Calibri"/>
+              </a:defRPr>
+            </a:pPr>
+            <a:r>
+              <a:t>PCA Scatter Plot</a:t>
+            </a:r>
+          </a:p>
+        </p:txBody>
+      </p:sp>
+      <p:pic>
+        <p:nvPicPr>
+          <p:cNvPr id="13" name="Picture 12" descr="rf_feature_importance.png"/>
+          <p:cNvPicPr>
+            <a:picLocks noChangeAspect="1"/>
+          </p:cNvPicPr>
+          <p:nvPr/>
+        </p:nvPicPr>
+        <p:blipFill>
+          <a:blip r:embed="rId8"/>
+          <a:stretch>
+            <a:fillRect/>
+          </a:stretch>
+        </p:blipFill>
+        <p:spPr>
+          <a:xfrm>
             <a:off x="7863840" y="3474720"/>
             <a:ext cx="3474720" cy="1920240"/>
           </a:xfrm>
@@ -5567,7 +5368,7 @@
 </file>
 
 <file path=ppt/slides/slide11.xml><?xml version="1.0" encoding="utf-8"?>
-<p:sld xmlns:a="http://schemas.openxmlformats.org/drawingml/2006/main" xmlns:p="http://schemas.openxmlformats.org/presentationml/2006/main" xmlns:r="http://schemas.openxmlformats.org/officeDocument/2006/relationships">
+<p:sld xmlns:a="http://schemas.openxmlformats.org/drawingml/2006/main" xmlns:r="http://schemas.openxmlformats.org/officeDocument/2006/relationships" xmlns:p="http://schemas.openxmlformats.org/presentationml/2006/main">
   <p:cSld>
     <p:spTree>
       <p:nvGrpSpPr>
@@ -5575,7 +5376,14 @@
         <p:cNvGrpSpPr/>
         <p:nvPr/>
       </p:nvGrpSpPr>
-      <p:grpSpPr/>
+      <p:grpSpPr>
+        <a:xfrm>
+          <a:off x="0" y="0"/>
+          <a:ext cx="0" cy="0"/>
+          <a:chOff x="0" y="0"/>
+          <a:chExt cx="0" cy="0"/>
+        </a:xfrm>
+      </p:grpSpPr>
       <p:sp>
         <p:nvSpPr>
           <p:cNvPr id="2" name="Rectangle 1"/>
@@ -5612,7 +5420,7 @@
           </a:fontRef>
         </p:style>
         <p:txBody>
-          <a:bodyPr rtlCol="0" anchor="ctr" wrap="square" lIns="548640" tIns="137160"/>
+          <a:bodyPr wrap="square" lIns="548640" tIns="137160" rtlCol="0" anchor="ctr"/>
           <a:lstStyle/>
           <a:p>
             <a:pPr algn="l">
@@ -5667,7 +5475,7 @@
           </a:fontRef>
         </p:style>
         <p:txBody>
-          <a:bodyPr rtlCol="0" anchor="ctr" wrap="square" lIns="137160" rIns="137160" tIns="137160"/>
+          <a:bodyPr wrap="square" lIns="137160" tIns="137160" rIns="137160" rtlCol="0" anchor="ctr"/>
           <a:lstStyle/>
           <a:p>
             <a:pPr algn="ctr">
@@ -5679,6 +5487,7 @@
               </a:defRPr>
             </a:pPr>
             <a:r>
+              <a:rPr dirty="0"/>
               <a:t>Decision Tree</a:t>
             </a:r>
           </a:p>
@@ -5695,7 +5504,12 @@
               </a:defRPr>
             </a:pPr>
             <a:r>
-              <a:t>max_depth=10</a:t>
+              <a:rPr sz="1600" dirty="0" err="1"/>
+              <a:t>max_depth</a:t>
+            </a:r>
+            <a:r>
+              <a:rPr sz="1600" dirty="0"/>
+              <a:t>=10</a:t>
             </a:r>
           </a:p>
         </p:txBody>
@@ -5738,7 +5552,7 @@
           </a:fontRef>
         </p:style>
         <p:txBody>
-          <a:bodyPr rtlCol="0" anchor="ctr" wrap="square" lIns="137160" rIns="137160" tIns="137160"/>
+          <a:bodyPr wrap="square" lIns="137160" tIns="137160" rIns="137160" rtlCol="0" anchor="ctr"/>
           <a:lstStyle/>
           <a:p>
             <a:pPr algn="ctr">
@@ -5750,6 +5564,7 @@
               </a:defRPr>
             </a:pPr>
             <a:r>
+              <a:rPr dirty="0"/>
               <a:t>Random Forest</a:t>
             </a:r>
           </a:p>
@@ -5766,7 +5581,12 @@
               </a:defRPr>
             </a:pPr>
             <a:r>
-              <a:t>n_estimators=200</a:t>
+              <a:rPr sz="1600" dirty="0" err="1"/>
+              <a:t>n_estimators</a:t>
+            </a:r>
+            <a:r>
+              <a:rPr sz="1600" dirty="0"/>
+              <a:t>=200</a:t>
             </a:r>
           </a:p>
         </p:txBody>
@@ -5809,7 +5629,7 @@
           </a:fontRef>
         </p:style>
         <p:txBody>
-          <a:bodyPr rtlCol="0" anchor="ctr" wrap="square" lIns="137160" rIns="137160" tIns="137160"/>
+          <a:bodyPr wrap="square" lIns="137160" tIns="137160" rIns="137160" rtlCol="0" anchor="ctr"/>
           <a:lstStyle/>
           <a:p>
             <a:pPr algn="ctr">
@@ -5821,6 +5641,7 @@
               </a:defRPr>
             </a:pPr>
             <a:r>
+              <a:rPr dirty="0"/>
               <a:t>KNN</a:t>
             </a:r>
           </a:p>
@@ -5837,6 +5658,7 @@
               </a:defRPr>
             </a:pPr>
             <a:r>
+              <a:rPr sz="1600" dirty="0"/>
               <a:t>best k=11 (tuned via accuracy)</a:t>
             </a:r>
           </a:p>
@@ -5880,7 +5702,7 @@
           </a:fontRef>
         </p:style>
         <p:txBody>
-          <a:bodyPr rtlCol="0" anchor="ctr" wrap="square" lIns="137160" rIns="137160" tIns="137160"/>
+          <a:bodyPr wrap="square" lIns="137160" tIns="137160" rIns="137160" rtlCol="0" anchor="ctr"/>
           <a:lstStyle/>
           <a:p>
             <a:pPr algn="ctr">
@@ -5892,6 +5714,7 @@
               </a:defRPr>
             </a:pPr>
             <a:r>
+              <a:rPr dirty="0"/>
               <a:t>Logistic Regression</a:t>
             </a:r>
           </a:p>
@@ -5908,7 +5731,16 @@
               </a:defRPr>
             </a:pPr>
             <a:r>
-              <a:t>multinomial, max_iter=1000</a:t>
+              <a:rPr sz="1600" dirty="0"/>
+              <a:t>multinomial, </a:t>
+            </a:r>
+            <a:r>
+              <a:rPr sz="1600" dirty="0" err="1"/>
+              <a:t>max_iter</a:t>
+            </a:r>
+            <a:r>
+              <a:rPr sz="1600" dirty="0"/>
+              <a:t>=1000</a:t>
             </a:r>
           </a:p>
         </p:txBody>
@@ -5951,7 +5783,7 @@
           </a:fontRef>
         </p:style>
         <p:txBody>
-          <a:bodyPr rtlCol="0" anchor="ctr" wrap="square" lIns="137160" rIns="137160" tIns="137160"/>
+          <a:bodyPr wrap="square" lIns="137160" tIns="137160" rIns="137160" rtlCol="0" anchor="ctr"/>
           <a:lstStyle/>
           <a:p>
             <a:pPr algn="ctr">
@@ -5963,6 +5795,7 @@
               </a:defRPr>
             </a:pPr>
             <a:r>
+              <a:rPr dirty="0"/>
               <a:t>SVM</a:t>
             </a:r>
           </a:p>
@@ -5979,6 +5812,7 @@
               </a:defRPr>
             </a:pPr>
             <a:r>
+              <a:rPr sz="1600" dirty="0"/>
               <a:t>RBF kernel, probability=True</a:t>
             </a:r>
           </a:p>
@@ -6022,7 +5856,7 @@
           </a:fontRef>
         </p:style>
         <p:txBody>
-          <a:bodyPr rtlCol="0" anchor="ctr" wrap="square" lIns="137160" rIns="137160" tIns="137160"/>
+          <a:bodyPr wrap="square" lIns="137160" tIns="137160" rIns="137160" rtlCol="0" anchor="ctr"/>
           <a:lstStyle/>
           <a:p>
             <a:pPr algn="ctr">
@@ -6034,8 +5868,10 @@
               </a:defRPr>
             </a:pPr>
             <a:r>
+              <a:rPr dirty="0" err="1"/>
               <a:t>XGBoost</a:t>
             </a:r>
+            <a:endParaRPr dirty="0"/>
           </a:p>
           <a:p>
             <a:pPr>
@@ -6050,7 +5886,28 @@
               </a:defRPr>
             </a:pPr>
             <a:r>
-              <a:t>n_estimators=200, max_depth=6, lr=0.1</a:t>
+              <a:rPr sz="1600" dirty="0" err="1"/>
+              <a:t>n_estimators</a:t>
+            </a:r>
+            <a:r>
+              <a:rPr sz="1600" dirty="0"/>
+              <a:t>=200, </a:t>
+            </a:r>
+            <a:r>
+              <a:rPr sz="1600" dirty="0" err="1"/>
+              <a:t>max_depth</a:t>
+            </a:r>
+            <a:r>
+              <a:rPr sz="1600" dirty="0"/>
+              <a:t>=6, </a:t>
+            </a:r>
+            <a:r>
+              <a:rPr sz="1600" dirty="0" err="1"/>
+              <a:t>lr</a:t>
+            </a:r>
+            <a:r>
+              <a:rPr sz="1600" dirty="0"/>
+              <a:t>=0.1</a:t>
             </a:r>
           </a:p>
         </p:txBody>
@@ -6063,7 +5920,7 @@
         </p:nvSpPr>
         <p:spPr>
           <a:xfrm>
-            <a:off x="548640" y="5486400"/>
+            <a:off x="548640" y="5806440"/>
             <a:ext cx="11064240" cy="640080"/>
           </a:xfrm>
           <a:prstGeom prst="roundRect">
@@ -6091,7 +5948,7 @@
           </a:fontRef>
         </p:style>
         <p:txBody>
-          <a:bodyPr rtlCol="0" anchor="ctr" wrap="square" lIns="137160" rIns="137160" tIns="91440"/>
+          <a:bodyPr wrap="square" lIns="137160" tIns="91440" rIns="137160" rtlCol="0" anchor="ctr"/>
           <a:lstStyle/>
           <a:p>
             <a:pPr algn="ctr">
@@ -6103,7 +5960,16 @@
               </a:defRPr>
             </a:pPr>
             <a:r>
-              <a:t>All models: random_state=42  |  80/20 stratified split  |  5-fold cross-validation  |  F1-macro as primary metric</a:t>
+              <a:rPr dirty="0"/>
+              <a:t>All models: </a:t>
+            </a:r>
+            <a:r>
+              <a:rPr dirty="0" err="1"/>
+              <a:t>random_state</a:t>
+            </a:r>
+            <a:r>
+              <a:rPr dirty="0"/>
+              <a:t>=42  |  80/20 stratified split  |  5-fold cross-validation  |  F1-macro as primary metric</a:t>
             </a:r>
           </a:p>
         </p:txBody>
@@ -6153,7 +6019,7 @@
 </file>
 
 <file path=ppt/slides/slide12.xml><?xml version="1.0" encoding="utf-8"?>
-<p:sld xmlns:a="http://schemas.openxmlformats.org/drawingml/2006/main" xmlns:p="http://schemas.openxmlformats.org/presentationml/2006/main" xmlns:r="http://schemas.openxmlformats.org/officeDocument/2006/relationships">
+<p:sld xmlns:a="http://schemas.openxmlformats.org/drawingml/2006/main" xmlns:r="http://schemas.openxmlformats.org/officeDocument/2006/relationships" xmlns:p="http://schemas.openxmlformats.org/presentationml/2006/main">
   <p:cSld>
     <p:spTree>
       <p:nvGrpSpPr>
@@ -6161,7 +6027,14 @@
         <p:cNvGrpSpPr/>
         <p:nvPr/>
       </p:nvGrpSpPr>
-      <p:grpSpPr/>
+      <p:grpSpPr>
+        <a:xfrm>
+          <a:off x="0" y="0"/>
+          <a:ext cx="0" cy="0"/>
+          <a:chOff x="0" y="0"/>
+          <a:chExt cx="0" cy="0"/>
+        </a:xfrm>
+      </p:grpSpPr>
       <p:sp>
         <p:nvSpPr>
           <p:cNvPr id="2" name="Rectangle 1"/>
@@ -6198,7 +6071,7 @@
           </a:fontRef>
         </p:style>
         <p:txBody>
-          <a:bodyPr rtlCol="0" anchor="ctr" wrap="square" lIns="548640" tIns="137160"/>
+          <a:bodyPr wrap="square" lIns="548640" tIns="137160" rtlCol="0" anchor="ctr"/>
           <a:lstStyle/>
           <a:p>
             <a:pPr algn="l">
@@ -6218,30 +6091,6 @@
       <p:pic>
         <p:nvPicPr>
           <p:cNvPr id="3" name="Picture 2" descr="xgb_cm.png"/>
-          <p:cNvPicPr>
-            <a:picLocks noChangeAspect="1"/>
-          </p:cNvPicPr>
-          <p:nvPr/>
-        </p:nvPicPr>
-        <p:blipFill>
-          <a:blip r:embed="rId2"/>
-          <a:stretch>
-            <a:fillRect/>
-          </a:stretch>
-        </p:blipFill>
-        <p:spPr>
-          <a:xfrm>
-            <a:off x="274320" y="1188720"/>
-            <a:ext cx="3383280" cy="2560320"/>
-          </a:xfrm>
-          <a:prstGeom prst="rect">
-            <a:avLst/>
-          </a:prstGeom>
-        </p:spPr>
-      </p:pic>
-      <p:pic>
-        <p:nvPicPr>
-          <p:cNvPr id="4" name="Picture 3" descr="xgb_roc.png"/>
           <p:cNvPicPr>
             <a:picLocks noChangeAspect="1"/>
           </p:cNvPicPr>
@@ -6255,7 +6104,7 @@
         </p:blipFill>
         <p:spPr>
           <a:xfrm>
-            <a:off x="274320" y="3840480"/>
+            <a:off x="274320" y="1188720"/>
             <a:ext cx="3383280" cy="2560320"/>
           </a:xfrm>
           <a:prstGeom prst="rect">
@@ -6265,7 +6114,7 @@
       </p:pic>
       <p:pic>
         <p:nvPicPr>
-          <p:cNvPr id="5" name="Picture 4" descr="lr_cm.png"/>
+          <p:cNvPr id="4" name="Picture 3" descr="xgb_roc.png"/>
           <p:cNvPicPr>
             <a:picLocks noChangeAspect="1"/>
           </p:cNvPicPr>
@@ -6279,7 +6128,7 @@
         </p:blipFill>
         <p:spPr>
           <a:xfrm>
-            <a:off x="3931920" y="1188720"/>
+            <a:off x="274320" y="3840480"/>
             <a:ext cx="3383280" cy="2560320"/>
           </a:xfrm>
           <a:prstGeom prst="rect">
@@ -6289,7 +6138,7 @@
       </p:pic>
       <p:pic>
         <p:nvPicPr>
-          <p:cNvPr id="6" name="Picture 5" descr="lr_roc.png"/>
+          <p:cNvPr id="5" name="Picture 4" descr="lr_cm.png"/>
           <p:cNvPicPr>
             <a:picLocks noChangeAspect="1"/>
           </p:cNvPicPr>
@@ -6303,7 +6152,7 @@
         </p:blipFill>
         <p:spPr>
           <a:xfrm>
-            <a:off x="3931920" y="3840480"/>
+            <a:off x="3931920" y="1188720"/>
             <a:ext cx="3383280" cy="2560320"/>
           </a:xfrm>
           <a:prstGeom prst="rect">
@@ -6313,7 +6162,7 @@
       </p:pic>
       <p:pic>
         <p:nvPicPr>
-          <p:cNvPr id="7" name="Picture 6" descr="knn_cm.png"/>
+          <p:cNvPr id="6" name="Picture 5" descr="lr_roc.png"/>
           <p:cNvPicPr>
             <a:picLocks noChangeAspect="1"/>
           </p:cNvPicPr>
@@ -6327,7 +6176,7 @@
         </p:blipFill>
         <p:spPr>
           <a:xfrm>
-            <a:off x="7589520" y="1188720"/>
+            <a:off x="3931920" y="3840480"/>
             <a:ext cx="3383280" cy="2560320"/>
           </a:xfrm>
           <a:prstGeom prst="rect">
@@ -6337,7 +6186,7 @@
       </p:pic>
       <p:pic>
         <p:nvPicPr>
-          <p:cNvPr id="8" name="Picture 7" descr="knn_roc.png"/>
+          <p:cNvPr id="7" name="Picture 6" descr="knn_cm.png"/>
           <p:cNvPicPr>
             <a:picLocks noChangeAspect="1"/>
           </p:cNvPicPr>
@@ -6351,6 +6200,30 @@
         </p:blipFill>
         <p:spPr>
           <a:xfrm>
+            <a:off x="7589520" y="1188720"/>
+            <a:ext cx="3383280" cy="2560320"/>
+          </a:xfrm>
+          <a:prstGeom prst="rect">
+            <a:avLst/>
+          </a:prstGeom>
+        </p:spPr>
+      </p:pic>
+      <p:pic>
+        <p:nvPicPr>
+          <p:cNvPr id="8" name="Picture 7" descr="knn_roc.png"/>
+          <p:cNvPicPr>
+            <a:picLocks noChangeAspect="1"/>
+          </p:cNvPicPr>
+          <p:nvPr/>
+        </p:nvPicPr>
+        <p:blipFill>
+          <a:blip r:embed="rId8"/>
+          <a:stretch>
+            <a:fillRect/>
+          </a:stretch>
+        </p:blipFill>
+        <p:spPr>
+          <a:xfrm>
             <a:off x="7589520" y="3840480"/>
             <a:ext cx="3383280" cy="2560320"/>
           </a:xfrm>
@@ -6404,7 +6277,7 @@
 </file>
 
 <file path=ppt/slides/slide13.xml><?xml version="1.0" encoding="utf-8"?>
-<p:sld xmlns:a="http://schemas.openxmlformats.org/drawingml/2006/main" xmlns:p="http://schemas.openxmlformats.org/presentationml/2006/main" xmlns:r="http://schemas.openxmlformats.org/officeDocument/2006/relationships">
+<p:sld xmlns:a="http://schemas.openxmlformats.org/drawingml/2006/main" xmlns:r="http://schemas.openxmlformats.org/officeDocument/2006/relationships" xmlns:p="http://schemas.openxmlformats.org/presentationml/2006/main">
   <p:cSld>
     <p:spTree>
       <p:nvGrpSpPr>
@@ -6412,7 +6285,14 @@
         <p:cNvGrpSpPr/>
         <p:nvPr/>
       </p:nvGrpSpPr>
-      <p:grpSpPr/>
+      <p:grpSpPr>
+        <a:xfrm>
+          <a:off x="0" y="0"/>
+          <a:ext cx="0" cy="0"/>
+          <a:chOff x="0" y="0"/>
+          <a:chExt cx="0" cy="0"/>
+        </a:xfrm>
+      </p:grpSpPr>
       <p:sp>
         <p:nvSpPr>
           <p:cNvPr id="2" name="Rectangle 1"/>
@@ -6449,7 +6329,7 @@
           </a:fontRef>
         </p:style>
         <p:txBody>
-          <a:bodyPr rtlCol="0" anchor="ctr" wrap="square" lIns="548640" tIns="137160"/>
+          <a:bodyPr wrap="square" lIns="548640" tIns="137160" rtlCol="0" anchor="ctr"/>
           <a:lstStyle/>
           <a:p>
             <a:pPr algn="l">
@@ -6469,30 +6349,6 @@
       <p:pic>
         <p:nvPicPr>
           <p:cNvPr id="3" name="Picture 2" descr="kmeans_elbow_silhouette.png"/>
-          <p:cNvPicPr>
-            <a:picLocks noChangeAspect="1"/>
-          </p:cNvPicPr>
-          <p:nvPr/>
-        </p:nvPicPr>
-        <p:blipFill>
-          <a:blip r:embed="rId2"/>
-          <a:stretch>
-            <a:fillRect/>
-          </a:stretch>
-        </p:blipFill>
-        <p:spPr>
-          <a:xfrm>
-            <a:off x="274320" y="1188720"/>
-            <a:ext cx="5486400" cy="2377440"/>
-          </a:xfrm>
-          <a:prstGeom prst="rect">
-            <a:avLst/>
-          </a:prstGeom>
-        </p:spPr>
-      </p:pic>
-      <p:pic>
-        <p:nvPicPr>
-          <p:cNvPr id="4" name="Picture 3" descr="kmeans_crosstab.png"/>
           <p:cNvPicPr>
             <a:picLocks noChangeAspect="1"/>
           </p:cNvPicPr>
@@ -6506,8 +6362,8 @@
         </p:blipFill>
         <p:spPr>
           <a:xfrm>
-            <a:off x="274320" y="3749039"/>
-            <a:ext cx="5029200" cy="2560320"/>
+            <a:off x="274320" y="1188720"/>
+            <a:ext cx="5486400" cy="2377440"/>
           </a:xfrm>
           <a:prstGeom prst="rect">
             <a:avLst/>
@@ -6516,7 +6372,7 @@
       </p:pic>
       <p:pic>
         <p:nvPicPr>
-          <p:cNvPr id="5" name="Picture 4" descr="hierarchical_dendrogram.png"/>
+          <p:cNvPr id="4" name="Picture 3" descr="kmeans_crosstab.png"/>
           <p:cNvPicPr>
             <a:picLocks noChangeAspect="1"/>
           </p:cNvPicPr>
@@ -6530,14 +6386,38 @@
         </p:blipFill>
         <p:spPr>
           <a:xfrm>
-            <a:off x="5943600" y="1188720"/>
-            <a:ext cx="5760720" cy="2377440"/>
+            <a:off x="274320" y="3749039"/>
+            <a:ext cx="5029200" cy="2560320"/>
           </a:xfrm>
           <a:prstGeom prst="rect">
             <a:avLst/>
           </a:prstGeom>
         </p:spPr>
       </p:pic>
+      <p:pic>
+        <p:nvPicPr>
+          <p:cNvPr id="5" name="Picture 4" descr="hierarchical_dendrogram.png"/>
+          <p:cNvPicPr>
+            <a:picLocks noChangeAspect="1"/>
+          </p:cNvPicPr>
+          <p:nvPr/>
+        </p:nvPicPr>
+        <p:blipFill>
+          <a:blip r:embed="rId5"/>
+          <a:stretch>
+            <a:fillRect/>
+          </a:stretch>
+        </p:blipFill>
+        <p:spPr>
+          <a:xfrm>
+            <a:off x="5943600" y="1188720"/>
+            <a:ext cx="5760720" cy="2377440"/>
+          </a:xfrm>
+          <a:prstGeom prst="rect">
+            <a:avLst/>
+          </a:prstGeom>
+        </p:spPr>
+      </p:pic>
       <p:sp>
         <p:nvSpPr>
           <p:cNvPr id="6" name="TextBox 5"/>
@@ -6547,7 +6427,7 @@
         <p:spPr>
           <a:xfrm>
             <a:off x="6217920" y="3840480"/>
-            <a:ext cx="5029200" cy="2560320"/>
+            <a:ext cx="5029200" cy="1615827"/>
           </a:xfrm>
           <a:prstGeom prst="rect">
             <a:avLst/>
@@ -6572,6 +6452,7 @@
               </a:defRPr>
             </a:pPr>
             <a:r>
+              <a:rPr sz="1600" dirty="0"/>
               <a:t>K-Means (k=3): Silhouette = 0.2145</a:t>
             </a:r>
           </a:p>
@@ -6588,6 +6469,7 @@
               </a:defRPr>
             </a:pPr>
             <a:r>
+              <a:rPr sz="1600" dirty="0"/>
               <a:t>Clusters partially recover outcome classes</a:t>
             </a:r>
           </a:p>
@@ -6604,6 +6486,7 @@
               </a:defRPr>
             </a:pPr>
             <a:r>
+              <a:rPr sz="1600" dirty="0"/>
               <a:t>Hierarchical (Ward): Silhouette = 0.1158</a:t>
             </a:r>
           </a:p>
@@ -6620,6 +6503,7 @@
               </a:defRPr>
             </a:pPr>
             <a:r>
+              <a:rPr sz="1600" dirty="0"/>
               <a:t>Low scores confirm hard boundary problem</a:t>
             </a:r>
           </a:p>
@@ -6636,6 +6520,7 @@
               </a:defRPr>
             </a:pPr>
             <a:r>
+              <a:rPr sz="1600" dirty="0"/>
               <a:t>Supervision needed for reliable prediction</a:t>
             </a:r>
           </a:p>
@@ -6686,7 +6571,7 @@
 </file>
 
 <file path=ppt/slides/slide14.xml><?xml version="1.0" encoding="utf-8"?>
-<p:sld xmlns:a="http://schemas.openxmlformats.org/drawingml/2006/main" xmlns:p="http://schemas.openxmlformats.org/presentationml/2006/main" xmlns:r="http://schemas.openxmlformats.org/officeDocument/2006/relationships">
+<p:sld xmlns:a="http://schemas.openxmlformats.org/drawingml/2006/main" xmlns:r="http://schemas.openxmlformats.org/officeDocument/2006/relationships" xmlns:p="http://schemas.openxmlformats.org/presentationml/2006/main">
   <p:cSld>
     <p:spTree>
       <p:nvGrpSpPr>
@@ -6694,7 +6579,14 @@
         <p:cNvGrpSpPr/>
         <p:nvPr/>
       </p:nvGrpSpPr>
-      <p:grpSpPr/>
+      <p:grpSpPr>
+        <a:xfrm>
+          <a:off x="0" y="0"/>
+          <a:ext cx="0" cy="0"/>
+          <a:chOff x="0" y="0"/>
+          <a:chExt cx="0" cy="0"/>
+        </a:xfrm>
+      </p:grpSpPr>
       <p:sp>
         <p:nvSpPr>
           <p:cNvPr id="2" name="Rectangle 1"/>
@@ -6731,7 +6623,7 @@
           </a:fontRef>
         </p:style>
         <p:txBody>
-          <a:bodyPr rtlCol="0" anchor="ctr" wrap="square" lIns="548640" tIns="137160"/>
+          <a:bodyPr wrap="square" lIns="548640" tIns="137160" rtlCol="0" anchor="ctr"/>
           <a:lstStyle/>
           <a:p>
             <a:pPr algn="l">
@@ -6757,7 +6649,7 @@
         <p:spPr>
           <a:xfrm>
             <a:off x="548640" y="1280160"/>
-            <a:ext cx="10972800" cy="1371600"/>
+            <a:ext cx="10972800" cy="984885"/>
           </a:xfrm>
           <a:prstGeom prst="rect">
             <a:avLst/>
@@ -6782,6 +6674,7 @@
               </a:defRPr>
             </a:pPr>
             <a:r>
+              <a:rPr dirty="0"/>
               <a:t>Binned numeric features into categorical ranges</a:t>
             </a:r>
           </a:p>
@@ -6798,7 +6691,32 @@
               </a:defRPr>
             </a:pPr>
             <a:r>
-              <a:t>Applied Apriori: min_support=0.05, min_confidence=0.60</a:t>
+              <a:rPr dirty="0"/>
+              <a:t>Applied </a:t>
+            </a:r>
+            <a:r>
+              <a:rPr dirty="0" err="1"/>
+              <a:t>Apriori</a:t>
+            </a:r>
+            <a:r>
+              <a:rPr dirty="0"/>
+              <a:t>: </a:t>
+            </a:r>
+            <a:r>
+              <a:rPr dirty="0" err="1"/>
+              <a:t>min_support</a:t>
+            </a:r>
+            <a:r>
+              <a:rPr dirty="0"/>
+              <a:t>=0.05, </a:t>
+            </a:r>
+            <a:r>
+              <a:rPr dirty="0" err="1"/>
+              <a:t>min_confidence</a:t>
+            </a:r>
+            <a:r>
+              <a:rPr dirty="0"/>
+              <a:t>=0.60</a:t>
             </a:r>
           </a:p>
           <a:p>
@@ -6814,7 +6732,16 @@
               </a:defRPr>
             </a:pPr>
             <a:r>
-              <a:t>189 frequent itemsets → 334 rules → 85 with Target as consequent</a:t>
+              <a:rPr dirty="0"/>
+              <a:t>189 frequent </a:t>
+            </a:r>
+            <a:r>
+              <a:rPr dirty="0" err="1"/>
+              <a:t>itemsets</a:t>
+            </a:r>
+            <a:r>
+              <a:rPr dirty="0"/>
+              <a:t> → 334 rules → 85 with Target as consequent</a:t>
             </a:r>
           </a:p>
         </p:txBody>
@@ -6829,7 +6756,7 @@
         </p:nvGraphicFramePr>
         <p:xfrm>
           <a:off x="457200" y="2926080"/>
-          <a:ext cx="9966960" cy="2743200"/>
+          <a:ext cx="9966960" cy="2838990"/>
         </p:xfrm>
         <a:graphic>
           <a:graphicData uri="http://schemas.openxmlformats.org/drawingml/2006/table">
@@ -6838,11 +6765,41 @@
                 <a:tableStyleId>{5C22544A-7EE6-4342-B048-85BDC9FD1C3A}</a:tableStyleId>
               </a:tblPr>
               <a:tblGrid>
-                <a:gridCol w="3657600"/>
-                <a:gridCol w="2743200"/>
-                <a:gridCol w="1188720"/>
-                <a:gridCol w="1188720"/>
-                <a:gridCol w="1188720"/>
+                <a:gridCol w="3657600">
+                  <a:extLst>
+                    <a:ext uri="{9D8B030D-6E8A-4147-A177-3AD203B41FA5}">
+                      <a16:colId xmlns:a16="http://schemas.microsoft.com/office/drawing/2014/main" val="20000"/>
+                    </a:ext>
+                  </a:extLst>
+                </a:gridCol>
+                <a:gridCol w="2743200">
+                  <a:extLst>
+                    <a:ext uri="{9D8B030D-6E8A-4147-A177-3AD203B41FA5}">
+                      <a16:colId xmlns:a16="http://schemas.microsoft.com/office/drawing/2014/main" val="20001"/>
+                    </a:ext>
+                  </a:extLst>
+                </a:gridCol>
+                <a:gridCol w="1188720">
+                  <a:extLst>
+                    <a:ext uri="{9D8B030D-6E8A-4147-A177-3AD203B41FA5}">
+                      <a16:colId xmlns:a16="http://schemas.microsoft.com/office/drawing/2014/main" val="20002"/>
+                    </a:ext>
+                  </a:extLst>
+                </a:gridCol>
+                <a:gridCol w="1188720">
+                  <a:extLst>
+                    <a:ext uri="{9D8B030D-6E8A-4147-A177-3AD203B41FA5}">
+                      <a16:colId xmlns:a16="http://schemas.microsoft.com/office/drawing/2014/main" val="20003"/>
+                    </a:ext>
+                  </a:extLst>
+                </a:gridCol>
+                <a:gridCol w="1188720">
+                  <a:extLst>
+                    <a:ext uri="{9D8B030D-6E8A-4147-A177-3AD203B41FA5}">
+                      <a16:colId xmlns:a16="http://schemas.microsoft.com/office/drawing/2014/main" val="20004"/>
+                    </a:ext>
+                  </a:extLst>
+                </a:gridCol>
               </a:tblGrid>
               <a:tr h="391885">
                 <a:tc>
@@ -6965,6 +6922,11 @@
                     </a:solidFill>
                   </a:tcPr>
                 </a:tc>
+                <a:extLst>
+                  <a:ext uri="{0D108BD9-81ED-4DB2-BD59-A6C34878D82A}">
+                    <a16:rowId xmlns:a16="http://schemas.microsoft.com/office/drawing/2014/main" val="10000"/>
+                  </a:ext>
+                </a:extLst>
               </a:tr>
               <a:tr h="391885">
                 <a:tc>
@@ -7087,6 +7049,11 @@
                     </a:solidFill>
                   </a:tcPr>
                 </a:tc>
+                <a:extLst>
+                  <a:ext uri="{0D108BD9-81ED-4DB2-BD59-A6C34878D82A}">
+                    <a16:rowId xmlns:a16="http://schemas.microsoft.com/office/drawing/2014/main" val="10001"/>
+                  </a:ext>
+                </a:extLst>
               </a:tr>
               <a:tr h="391885">
                 <a:tc>
@@ -7209,6 +7176,11 @@
                     </a:solidFill>
                   </a:tcPr>
                 </a:tc>
+                <a:extLst>
+                  <a:ext uri="{0D108BD9-81ED-4DB2-BD59-A6C34878D82A}">
+                    <a16:rowId xmlns:a16="http://schemas.microsoft.com/office/drawing/2014/main" val="10002"/>
+                  </a:ext>
+                </a:extLst>
               </a:tr>
               <a:tr h="391885">
                 <a:tc>
@@ -7331,6 +7303,11 @@
                     </a:solidFill>
                   </a:tcPr>
                 </a:tc>
+                <a:extLst>
+                  <a:ext uri="{0D108BD9-81ED-4DB2-BD59-A6C34878D82A}">
+                    <a16:rowId xmlns:a16="http://schemas.microsoft.com/office/drawing/2014/main" val="10003"/>
+                  </a:ext>
+                </a:extLst>
               </a:tr>
               <a:tr h="391885">
                 <a:tc>
@@ -7453,6 +7430,11 @@
                     </a:solidFill>
                   </a:tcPr>
                 </a:tc>
+                <a:extLst>
+                  <a:ext uri="{0D108BD9-81ED-4DB2-BD59-A6C34878D82A}">
+                    <a16:rowId xmlns:a16="http://schemas.microsoft.com/office/drawing/2014/main" val="10004"/>
+                  </a:ext>
+                </a:extLst>
               </a:tr>
               <a:tr h="391885">
                 <a:tc>
@@ -7575,6 +7557,11 @@
                     </a:solidFill>
                   </a:tcPr>
                 </a:tc>
+                <a:extLst>
+                  <a:ext uri="{0D108BD9-81ED-4DB2-BD59-A6C34878D82A}">
+                    <a16:rowId xmlns:a16="http://schemas.microsoft.com/office/drawing/2014/main" val="10005"/>
+                  </a:ext>
+                </a:extLst>
               </a:tr>
               <a:tr h="391890">
                 <a:tc>
@@ -7697,6 +7684,11 @@
                     </a:solidFill>
                   </a:tcPr>
                 </a:tc>
+                <a:extLst>
+                  <a:ext uri="{0D108BD9-81ED-4DB2-BD59-A6C34878D82A}">
+                    <a16:rowId xmlns:a16="http://schemas.microsoft.com/office/drawing/2014/main" val="10006"/>
+                  </a:ext>
+                </a:extLst>
               </a:tr>
             </a:tbl>
           </a:graphicData>
@@ -7738,7 +7730,7 @@
           </a:fontRef>
         </p:style>
         <p:txBody>
-          <a:bodyPr rtlCol="0" anchor="ctr" wrap="square" lIns="137160" rIns="137160" tIns="91440"/>
+          <a:bodyPr wrap="square" lIns="137160" tIns="91440" rIns="137160" rtlCol="0" anchor="ctr"/>
           <a:lstStyle/>
           <a:p>
             <a:pPr algn="ctr">
@@ -7800,7 +7792,7 @@
 </file>
 
 <file path=ppt/slides/slide15.xml><?xml version="1.0" encoding="utf-8"?>
-<p:sld xmlns:a="http://schemas.openxmlformats.org/drawingml/2006/main" xmlns:p="http://schemas.openxmlformats.org/presentationml/2006/main" xmlns:r="http://schemas.openxmlformats.org/officeDocument/2006/relationships">
+<p:sld xmlns:a="http://schemas.openxmlformats.org/drawingml/2006/main" xmlns:r="http://schemas.openxmlformats.org/officeDocument/2006/relationships" xmlns:p="http://schemas.openxmlformats.org/presentationml/2006/main">
   <p:cSld>
     <p:spTree>
       <p:nvGrpSpPr>
@@ -7808,7 +7800,14 @@
         <p:cNvGrpSpPr/>
         <p:nvPr/>
       </p:nvGrpSpPr>
-      <p:grpSpPr/>
+      <p:grpSpPr>
+        <a:xfrm>
+          <a:off x="0" y="0"/>
+          <a:ext cx="0" cy="0"/>
+          <a:chOff x="0" y="0"/>
+          <a:chExt cx="0" cy="0"/>
+        </a:xfrm>
+      </p:grpSpPr>
       <p:sp>
         <p:nvSpPr>
           <p:cNvPr id="2" name="Rectangle 1"/>
@@ -7845,7 +7844,7 @@
           </a:fontRef>
         </p:style>
         <p:txBody>
-          <a:bodyPr rtlCol="0" anchor="ctr" wrap="square" lIns="548640" tIns="137160"/>
+          <a:bodyPr wrap="square" lIns="548640" tIns="137160" rtlCol="0" anchor="ctr"/>
           <a:lstStyle/>
           <a:p>
             <a:pPr algn="l">
@@ -7872,7 +7871,7 @@
         </p:nvGraphicFramePr>
         <p:xfrm>
           <a:off x="457200" y="1280160"/>
-          <a:ext cx="6858000" cy="3474720"/>
+          <a:ext cx="6858000" cy="3496492"/>
         </p:xfrm>
         <a:graphic>
           <a:graphicData uri="http://schemas.openxmlformats.org/drawingml/2006/table">
@@ -7881,11 +7880,41 @@
                 <a:tableStyleId>{5C22544A-7EE6-4342-B048-85BDC9FD1C3A}</a:tableStyleId>
               </a:tblPr>
               <a:tblGrid>
-                <a:gridCol w="1828800"/>
-                <a:gridCol w="1097280"/>
-                <a:gridCol w="1097280"/>
-                <a:gridCol w="1097280"/>
-                <a:gridCol w="1737360"/>
+                <a:gridCol w="1828800">
+                  <a:extLst>
+                    <a:ext uri="{9D8B030D-6E8A-4147-A177-3AD203B41FA5}">
+                      <a16:colId xmlns:a16="http://schemas.microsoft.com/office/drawing/2014/main" val="20000"/>
+                    </a:ext>
+                  </a:extLst>
+                </a:gridCol>
+                <a:gridCol w="1097280">
+                  <a:extLst>
+                    <a:ext uri="{9D8B030D-6E8A-4147-A177-3AD203B41FA5}">
+                      <a16:colId xmlns:a16="http://schemas.microsoft.com/office/drawing/2014/main" val="20001"/>
+                    </a:ext>
+                  </a:extLst>
+                </a:gridCol>
+                <a:gridCol w="1097280">
+                  <a:extLst>
+                    <a:ext uri="{9D8B030D-6E8A-4147-A177-3AD203B41FA5}">
+                      <a16:colId xmlns:a16="http://schemas.microsoft.com/office/drawing/2014/main" val="20002"/>
+                    </a:ext>
+                  </a:extLst>
+                </a:gridCol>
+                <a:gridCol w="1097280">
+                  <a:extLst>
+                    <a:ext uri="{9D8B030D-6E8A-4147-A177-3AD203B41FA5}">
+                      <a16:colId xmlns:a16="http://schemas.microsoft.com/office/drawing/2014/main" val="20003"/>
+                    </a:ext>
+                  </a:extLst>
+                </a:gridCol>
+                <a:gridCol w="1737360">
+                  <a:extLst>
+                    <a:ext uri="{9D8B030D-6E8A-4147-A177-3AD203B41FA5}">
+                      <a16:colId xmlns:a16="http://schemas.microsoft.com/office/drawing/2014/main" val="20004"/>
+                    </a:ext>
+                  </a:extLst>
+                </a:gridCol>
               </a:tblGrid>
               <a:tr h="496388">
                 <a:tc>
@@ -8008,6 +8037,11 @@
                     </a:solidFill>
                   </a:tcPr>
                 </a:tc>
+                <a:extLst>
+                  <a:ext uri="{0D108BD9-81ED-4DB2-BD59-A6C34878D82A}">
+                    <a16:rowId xmlns:a16="http://schemas.microsoft.com/office/drawing/2014/main" val="10000"/>
+                  </a:ext>
+                </a:extLst>
               </a:tr>
               <a:tr h="496388">
                 <a:tc>
@@ -8130,6 +8164,11 @@
                     </a:solidFill>
                   </a:tcPr>
                 </a:tc>
+                <a:extLst>
+                  <a:ext uri="{0D108BD9-81ED-4DB2-BD59-A6C34878D82A}">
+                    <a16:rowId xmlns:a16="http://schemas.microsoft.com/office/drawing/2014/main" val="10001"/>
+                  </a:ext>
+                </a:extLst>
               </a:tr>
               <a:tr h="496388">
                 <a:tc>
@@ -8252,6 +8291,11 @@
                     </a:solidFill>
                   </a:tcPr>
                 </a:tc>
+                <a:extLst>
+                  <a:ext uri="{0D108BD9-81ED-4DB2-BD59-A6C34878D82A}">
+                    <a16:rowId xmlns:a16="http://schemas.microsoft.com/office/drawing/2014/main" val="10002"/>
+                  </a:ext>
+                </a:extLst>
               </a:tr>
               <a:tr h="496388">
                 <a:tc>
@@ -8374,6 +8418,11 @@
                     </a:solidFill>
                   </a:tcPr>
                 </a:tc>
+                <a:extLst>
+                  <a:ext uri="{0D108BD9-81ED-4DB2-BD59-A6C34878D82A}">
+                    <a16:rowId xmlns:a16="http://schemas.microsoft.com/office/drawing/2014/main" val="10003"/>
+                  </a:ext>
+                </a:extLst>
               </a:tr>
               <a:tr h="496388">
                 <a:tc>
@@ -8496,6 +8545,11 @@
                     </a:solidFill>
                   </a:tcPr>
                 </a:tc>
+                <a:extLst>
+                  <a:ext uri="{0D108BD9-81ED-4DB2-BD59-A6C34878D82A}">
+                    <a16:rowId xmlns:a16="http://schemas.microsoft.com/office/drawing/2014/main" val="10004"/>
+                  </a:ext>
+                </a:extLst>
               </a:tr>
               <a:tr h="496388">
                 <a:tc>
@@ -8618,6 +8672,11 @@
                     </a:solidFill>
                   </a:tcPr>
                 </a:tc>
+                <a:extLst>
+                  <a:ext uri="{0D108BD9-81ED-4DB2-BD59-A6C34878D82A}">
+                    <a16:rowId xmlns:a16="http://schemas.microsoft.com/office/drawing/2014/main" val="10005"/>
+                  </a:ext>
+                </a:extLst>
               </a:tr>
               <a:tr h="496392">
                 <a:tc>
@@ -8740,6 +8799,11 @@
                     </a:solidFill>
                   </a:tcPr>
                 </a:tc>
+                <a:extLst>
+                  <a:ext uri="{0D108BD9-81ED-4DB2-BD59-A6C34878D82A}">
+                    <a16:rowId xmlns:a16="http://schemas.microsoft.com/office/drawing/2014/main" val="10006"/>
+                  </a:ext>
+                </a:extLst>
               </a:tr>
             </a:tbl>
           </a:graphicData>
@@ -8754,7 +8818,7 @@
           <p:nvPr/>
         </p:nvPicPr>
         <p:blipFill>
-          <a:blip r:embed="rId2"/>
+          <a:blip r:embed="rId3"/>
           <a:stretch>
             <a:fillRect/>
           </a:stretch>
@@ -8805,7 +8869,7 @@
           </a:fontRef>
         </p:style>
         <p:txBody>
-          <a:bodyPr rtlCol="0" anchor="ctr" wrap="square" lIns="137160" rIns="137160" tIns="91440"/>
+          <a:bodyPr wrap="square" lIns="137160" tIns="91440" rIns="137160" rtlCol="0" anchor="ctr"/>
           <a:lstStyle/>
           <a:p>
             <a:pPr algn="ctr">
@@ -8871,7 +8935,7 @@
 </file>
 
 <file path=ppt/slides/slide16.xml><?xml version="1.0" encoding="utf-8"?>
-<p:sld xmlns:a="http://schemas.openxmlformats.org/drawingml/2006/main" xmlns:p="http://schemas.openxmlformats.org/presentationml/2006/main" xmlns:r="http://schemas.openxmlformats.org/officeDocument/2006/relationships">
+<p:sld xmlns:a="http://schemas.openxmlformats.org/drawingml/2006/main" xmlns:r="http://schemas.openxmlformats.org/officeDocument/2006/relationships" xmlns:p="http://schemas.openxmlformats.org/presentationml/2006/main">
   <p:cSld>
     <p:spTree>
       <p:nvGrpSpPr>
@@ -8879,7 +8943,14 @@
         <p:cNvGrpSpPr/>
         <p:nvPr/>
       </p:nvGrpSpPr>
-      <p:grpSpPr/>
+      <p:grpSpPr>
+        <a:xfrm>
+          <a:off x="0" y="0"/>
+          <a:ext cx="0" cy="0"/>
+          <a:chOff x="0" y="0"/>
+          <a:chExt cx="0" cy="0"/>
+        </a:xfrm>
+      </p:grpSpPr>
       <p:sp>
         <p:nvSpPr>
           <p:cNvPr id="2" name="Rectangle 1"/>
@@ -8916,7 +8987,7 @@
           </a:fontRef>
         </p:style>
         <p:txBody>
-          <a:bodyPr rtlCol="0" anchor="ctr" wrap="square" lIns="548640" tIns="137160"/>
+          <a:bodyPr wrap="square" lIns="548640" tIns="137160" rtlCol="0" anchor="ctr"/>
           <a:lstStyle/>
           <a:p>
             <a:pPr algn="l">
@@ -8942,7 +9013,7 @@
           <p:nvPr/>
         </p:nvPicPr>
         <p:blipFill>
-          <a:blip r:embed="rId2"/>
+          <a:blip r:embed="rId3"/>
           <a:stretch>
             <a:fillRect/>
           </a:stretch>
@@ -9171,7 +9242,7 @@
           </a:fontRef>
         </p:style>
         <p:txBody>
-          <a:bodyPr rtlCol="0" anchor="ctr" wrap="square" lIns="137160" rIns="137160" tIns="91440"/>
+          <a:bodyPr wrap="square" lIns="137160" tIns="91440" rIns="137160" rtlCol="0" anchor="ctr"/>
           <a:lstStyle/>
           <a:p>
             <a:pPr algn="ctr">
@@ -9245,7 +9316,7 @@
 </file>
 
 <file path=ppt/slides/slide17.xml><?xml version="1.0" encoding="utf-8"?>
-<p:sld xmlns:a="http://schemas.openxmlformats.org/drawingml/2006/main" xmlns:p="http://schemas.openxmlformats.org/presentationml/2006/main" xmlns:r="http://schemas.openxmlformats.org/officeDocument/2006/relationships">
+<p:sld xmlns:a="http://schemas.openxmlformats.org/drawingml/2006/main" xmlns:r="http://schemas.openxmlformats.org/officeDocument/2006/relationships" xmlns:p="http://schemas.openxmlformats.org/presentationml/2006/main">
   <p:cSld>
     <p:spTree>
       <p:nvGrpSpPr>
@@ -9253,7 +9324,14 @@
         <p:cNvGrpSpPr/>
         <p:nvPr/>
       </p:nvGrpSpPr>
-      <p:grpSpPr/>
+      <p:grpSpPr>
+        <a:xfrm>
+          <a:off x="0" y="0"/>
+          <a:ext cx="0" cy="0"/>
+          <a:chOff x="0" y="0"/>
+          <a:chExt cx="0" cy="0"/>
+        </a:xfrm>
+      </p:grpSpPr>
       <p:sp>
         <p:nvSpPr>
           <p:cNvPr id="2" name="Rectangle 1"/>
@@ -9290,7 +9368,7 @@
           </a:fontRef>
         </p:style>
         <p:txBody>
-          <a:bodyPr rtlCol="0" anchor="ctr" wrap="square" lIns="548640" tIns="137160"/>
+          <a:bodyPr wrap="square" lIns="548640" tIns="137160" rtlCol="0" anchor="ctr"/>
           <a:lstStyle/>
           <a:p>
             <a:pPr algn="l">
@@ -9430,7 +9508,7 @@
           </a:fontRef>
         </p:style>
         <p:txBody>
-          <a:bodyPr rtlCol="0" anchor="ctr" wrap="square" lIns="137160" rIns="137160" tIns="91440"/>
+          <a:bodyPr wrap="square" lIns="137160" tIns="91440" rIns="137160" rtlCol="0" anchor="ctr"/>
           <a:lstStyle/>
           <a:p>
             <a:pPr algn="ctr">
@@ -9528,7 +9606,7 @@
 </file>
 
 <file path=ppt/slides/slide18.xml><?xml version="1.0" encoding="utf-8"?>
-<p:sld xmlns:a="http://schemas.openxmlformats.org/drawingml/2006/main" xmlns:p="http://schemas.openxmlformats.org/presentationml/2006/main" xmlns:r="http://schemas.openxmlformats.org/officeDocument/2006/relationships">
+<p:sld xmlns:a="http://schemas.openxmlformats.org/drawingml/2006/main" xmlns:r="http://schemas.openxmlformats.org/officeDocument/2006/relationships" xmlns:p="http://schemas.openxmlformats.org/presentationml/2006/main">
   <p:cSld>
     <p:spTree>
       <p:nvGrpSpPr>
@@ -9536,7 +9614,14 @@
         <p:cNvGrpSpPr/>
         <p:nvPr/>
       </p:nvGrpSpPr>
-      <p:grpSpPr/>
+      <p:grpSpPr>
+        <a:xfrm>
+          <a:off x="0" y="0"/>
+          <a:ext cx="0" cy="0"/>
+          <a:chOff x="0" y="0"/>
+          <a:chExt cx="0" cy="0"/>
+        </a:xfrm>
+      </p:grpSpPr>
       <p:sp>
         <p:nvSpPr>
           <p:cNvPr id="2" name="Rectangle 1"/>
@@ -9573,7 +9658,7 @@
           </a:fontRef>
         </p:style>
         <p:txBody>
-          <a:bodyPr rtlCol="0" anchor="ctr" wrap="square" lIns="548640" tIns="137160"/>
+          <a:bodyPr wrap="square" lIns="548640" tIns="137160" rtlCol="0" anchor="ctr"/>
           <a:lstStyle/>
           <a:p>
             <a:pPr algn="l">
@@ -9849,7 +9934,7 @@
 </file>
 
 <file path=ppt/slides/slide19.xml><?xml version="1.0" encoding="utf-8"?>
-<p:sld xmlns:a="http://schemas.openxmlformats.org/drawingml/2006/main" xmlns:p="http://schemas.openxmlformats.org/presentationml/2006/main" xmlns:r="http://schemas.openxmlformats.org/officeDocument/2006/relationships">
+<p:sld xmlns:a="http://schemas.openxmlformats.org/drawingml/2006/main" xmlns:r="http://schemas.openxmlformats.org/officeDocument/2006/relationships" xmlns:p="http://schemas.openxmlformats.org/presentationml/2006/main">
   <p:cSld>
     <p:spTree>
       <p:nvGrpSpPr>
@@ -9857,7 +9942,14 @@
         <p:cNvGrpSpPr/>
         <p:nvPr/>
       </p:nvGrpSpPr>
-      <p:grpSpPr/>
+      <p:grpSpPr>
+        <a:xfrm>
+          <a:off x="0" y="0"/>
+          <a:ext cx="0" cy="0"/>
+          <a:chOff x="0" y="0"/>
+          <a:chExt cx="0" cy="0"/>
+        </a:xfrm>
+      </p:grpSpPr>
       <p:sp>
         <p:nvSpPr>
           <p:cNvPr id="2" name="Rectangle 1"/>
@@ -9898,6 +9990,7 @@
           <a:lstStyle/>
           <a:p>
             <a:pPr algn="ctr"/>
+            <a:endParaRPr/>
           </a:p>
         </p:txBody>
       </p:sp>
@@ -9941,6 +10034,7 @@
           <a:lstStyle/>
           <a:p>
             <a:pPr algn="ctr"/>
+            <a:endParaRPr/>
           </a:p>
         </p:txBody>
       </p:sp>
@@ -9952,8 +10046,8 @@
         </p:nvSpPr>
         <p:spPr>
           <a:xfrm>
-            <a:off x="1828800" y="1645920"/>
-            <a:ext cx="8503920" cy="1371600"/>
+            <a:off x="3626049" y="1645920"/>
+            <a:ext cx="4909422" cy="1323439"/>
           </a:xfrm>
           <a:prstGeom prst="rect">
             <a:avLst/>
@@ -9975,6 +10069,7 @@
               </a:defRPr>
             </a:pPr>
             <a:r>
+              <a:rPr sz="8000" dirty="0"/>
               <a:t>Thank You!</a:t>
             </a:r>
           </a:p>
@@ -9988,7 +10083,7 @@
         </p:nvSpPr>
         <p:spPr>
           <a:xfrm>
-            <a:off x="1828800" y="3291840"/>
+            <a:off x="1828800" y="3419857"/>
             <a:ext cx="8503920" cy="731520"/>
           </a:xfrm>
           <a:prstGeom prst="rect">
@@ -10025,7 +10120,7 @@
         <p:spPr>
           <a:xfrm>
             <a:off x="1828800" y="4389120"/>
-            <a:ext cx="8503920" cy="1828800"/>
+            <a:ext cx="8503920" cy="1415772"/>
           </a:xfrm>
           <a:prstGeom prst="rect">
             <a:avLst/>
@@ -10050,8 +10145,14 @@
               </a:defRPr>
             </a:pPr>
             <a:r>
+              <a:rPr dirty="0"/>
               <a:t>Lam Nguyen (018229432)  •  Tri Ngo</a:t>
             </a:r>
+            <a:r>
+              <a:rPr lang="vi-VN" dirty="0"/>
+              <a:t> (015712749)</a:t>
+            </a:r>
+            <a:endParaRPr dirty="0"/>
           </a:p>
           <a:p>
             <a:pPr algn="ctr">
@@ -10066,6 +10167,7 @@
               </a:defRPr>
             </a:pPr>
             <a:r>
+              <a:rPr dirty="0"/>
               <a:t>CMPE 255 — Data Mining  |  Spring 2026</a:t>
             </a:r>
           </a:p>
@@ -10082,6 +10184,7 @@
               </a:defRPr>
             </a:pPr>
             <a:r>
+              <a:rPr dirty="0"/>
               <a:t>San José State University</a:t>
             </a:r>
           </a:p>
@@ -10097,6 +10200,7 @@
                 <a:latin typeface="Calibri"/>
               </a:defRPr>
             </a:pPr>
+            <a:endParaRPr dirty="0"/>
           </a:p>
           <a:p>
             <a:pPr algn="ctr">
@@ -10111,7 +10215,12 @@
               </a:defRPr>
             </a:pPr>
             <a:r>
-              <a:t>github.com/duylam1407/CMPE255-Student-Dropout-Prediction</a:t>
+              <a:rPr dirty="0" err="1"/>
+              <a:t>github.com</a:t>
+            </a:r>
+            <a:r>
+              <a:rPr dirty="0"/>
+              <a:t>/duylam1407/CMPE255-Student-Dropout-Prediction</a:t>
             </a:r>
           </a:p>
         </p:txBody>
@@ -10161,7 +10270,7 @@
 </file>
 
 <file path=ppt/slides/slide2.xml><?xml version="1.0" encoding="utf-8"?>
-<p:sld xmlns:a="http://schemas.openxmlformats.org/drawingml/2006/main" xmlns:p="http://schemas.openxmlformats.org/presentationml/2006/main" xmlns:r="http://schemas.openxmlformats.org/officeDocument/2006/relationships">
+<p:sld xmlns:a="http://schemas.openxmlformats.org/drawingml/2006/main" xmlns:r="http://schemas.openxmlformats.org/officeDocument/2006/relationships" xmlns:p="http://schemas.openxmlformats.org/presentationml/2006/main">
   <p:cSld>
     <p:spTree>
       <p:nvGrpSpPr>
@@ -10169,7 +10278,14 @@
         <p:cNvGrpSpPr/>
         <p:nvPr/>
       </p:nvGrpSpPr>
-      <p:grpSpPr/>
+      <p:grpSpPr>
+        <a:xfrm>
+          <a:off x="0" y="0"/>
+          <a:ext cx="0" cy="0"/>
+          <a:chOff x="0" y="0"/>
+          <a:chExt cx="0" cy="0"/>
+        </a:xfrm>
+      </p:grpSpPr>
       <p:sp>
         <p:nvSpPr>
           <p:cNvPr id="2" name="Rectangle 1"/>
@@ -10206,7 +10322,7 @@
           </a:fontRef>
         </p:style>
         <p:txBody>
-          <a:bodyPr rtlCol="0" anchor="ctr" wrap="square" lIns="548640" tIns="137160"/>
+          <a:bodyPr wrap="square" lIns="548640" tIns="137160" rtlCol="0" anchor="ctr"/>
           <a:lstStyle/>
           <a:p>
             <a:pPr algn="l">
@@ -10346,7 +10462,7 @@
           </a:fontRef>
         </p:style>
         <p:txBody>
-          <a:bodyPr rtlCol="0" anchor="ctr" wrap="square" lIns="137160" rIns="137160" tIns="91440"/>
+          <a:bodyPr wrap="square" lIns="137160" tIns="91440" rIns="137160" rtlCol="0" anchor="ctr"/>
           <a:lstStyle/>
           <a:p>
             <a:pPr algn="ctr">
@@ -10372,7 +10488,7 @@
           <p:nvPr/>
         </p:nvPicPr>
         <p:blipFill>
-          <a:blip r:embed="rId2"/>
+          <a:blip r:embed="rId3"/>
           <a:stretch>
             <a:fillRect/>
           </a:stretch>
@@ -10432,7 +10548,7 @@
 </file>
 
 <file path=ppt/slides/slide3.xml><?xml version="1.0" encoding="utf-8"?>
-<p:sld xmlns:a="http://schemas.openxmlformats.org/drawingml/2006/main" xmlns:p="http://schemas.openxmlformats.org/presentationml/2006/main" xmlns:r="http://schemas.openxmlformats.org/officeDocument/2006/relationships">
+<p:sld xmlns:a="http://schemas.openxmlformats.org/drawingml/2006/main" xmlns:r="http://schemas.openxmlformats.org/officeDocument/2006/relationships" xmlns:p="http://schemas.openxmlformats.org/presentationml/2006/main">
   <p:cSld>
     <p:spTree>
       <p:nvGrpSpPr>
@@ -10440,7 +10556,14 @@
         <p:cNvGrpSpPr/>
         <p:nvPr/>
       </p:nvGrpSpPr>
-      <p:grpSpPr/>
+      <p:grpSpPr>
+        <a:xfrm>
+          <a:off x="0" y="0"/>
+          <a:ext cx="0" cy="0"/>
+          <a:chOff x="0" y="0"/>
+          <a:chExt cx="0" cy="0"/>
+        </a:xfrm>
+      </p:grpSpPr>
       <p:sp>
         <p:nvSpPr>
           <p:cNvPr id="2" name="Rectangle 1"/>
@@ -10477,7 +10600,7 @@
           </a:fontRef>
         </p:style>
         <p:txBody>
-          <a:bodyPr rtlCol="0" anchor="ctr" wrap="square" lIns="548640" tIns="137160"/>
+          <a:bodyPr wrap="square" lIns="548640" tIns="137160" rtlCol="0" anchor="ctr"/>
           <a:lstStyle/>
           <a:p>
             <a:pPr algn="l">
@@ -10503,7 +10626,7 @@
         <p:spPr>
           <a:xfrm>
             <a:off x="548640" y="1371600"/>
-            <a:ext cx="10972800" cy="4114800"/>
+            <a:ext cx="10972800" cy="2246769"/>
           </a:xfrm>
           <a:prstGeom prst="rect">
             <a:avLst/>
@@ -10528,7 +10651,7 @@
               </a:defRPr>
             </a:pPr>
             <a:r>
-              <a:rPr sz="1900" b="1">
+              <a:rPr sz="2000" b="1" dirty="0">
                 <a:solidFill>
                   <a:srgbClr val="333333"/>
                 </a:solidFill>
@@ -10537,7 +10660,7 @@
               <a:t>Research Question:</a:t>
             </a:r>
             <a:r>
-              <a:rPr sz="1900">
+              <a:rPr sz="2000" dirty="0">
                 <a:solidFill>
                   <a:srgbClr val="333333"/>
                 </a:solidFill>
@@ -10559,7 +10682,7 @@
               </a:defRPr>
             </a:pPr>
             <a:r>
-              <a:rPr sz="1900" b="1">
+              <a:rPr sz="2000" b="1" dirty="0">
                 <a:solidFill>
                   <a:srgbClr val="333333"/>
                 </a:solidFill>
@@ -10568,7 +10691,7 @@
               <a:t>Target Variable:</a:t>
             </a:r>
             <a:r>
-              <a:rPr sz="1900">
+              <a:rPr sz="2000" dirty="0">
                 <a:solidFill>
                   <a:srgbClr val="333333"/>
                 </a:solidFill>
@@ -10590,7 +10713,7 @@
               </a:defRPr>
             </a:pPr>
             <a:r>
-              <a:rPr sz="1900" b="1">
+              <a:rPr sz="2000" b="1" dirty="0">
                 <a:solidFill>
                   <a:srgbClr val="333333"/>
                 </a:solidFill>
@@ -10599,7 +10722,7 @@
               <a:t>Scope:</a:t>
             </a:r>
             <a:r>
-              <a:rPr sz="1900">
+              <a:rPr sz="2000" dirty="0">
                 <a:solidFill>
                   <a:srgbClr val="333333"/>
                 </a:solidFill>
@@ -10621,7 +10744,7 @@
               </a:defRPr>
             </a:pPr>
             <a:r>
-              <a:rPr sz="1900" b="1">
+              <a:rPr sz="2000" b="1" dirty="0">
                 <a:solidFill>
                   <a:srgbClr val="333333"/>
                 </a:solidFill>
@@ -10630,7 +10753,7 @@
               <a:t>Challenge:</a:t>
             </a:r>
             <a:r>
-              <a:rPr sz="1900">
+              <a:rPr sz="2000" dirty="0">
                 <a:solidFill>
                   <a:srgbClr val="333333"/>
                 </a:solidFill>
@@ -10652,7 +10775,7 @@
               </a:defRPr>
             </a:pPr>
             <a:r>
-              <a:rPr sz="1900" b="1">
+              <a:rPr sz="2000" b="1" dirty="0">
                 <a:solidFill>
                   <a:srgbClr val="333333"/>
                 </a:solidFill>
@@ -10661,7 +10784,7 @@
               <a:t>Expected Outcome:</a:t>
             </a:r>
             <a:r>
-              <a:rPr sz="1900">
+              <a:rPr sz="2000" dirty="0">
                 <a:solidFill>
                   <a:srgbClr val="333333"/>
                 </a:solidFill>
@@ -10717,7 +10840,7 @@
 </file>
 
 <file path=ppt/slides/slide4.xml><?xml version="1.0" encoding="utf-8"?>
-<p:sld xmlns:a="http://schemas.openxmlformats.org/drawingml/2006/main" xmlns:p="http://schemas.openxmlformats.org/presentationml/2006/main" xmlns:r="http://schemas.openxmlformats.org/officeDocument/2006/relationships">
+<p:sld xmlns:a="http://schemas.openxmlformats.org/drawingml/2006/main" xmlns:r="http://schemas.openxmlformats.org/officeDocument/2006/relationships" xmlns:p="http://schemas.openxmlformats.org/presentationml/2006/main">
   <p:cSld>
     <p:spTree>
       <p:nvGrpSpPr>
@@ -10725,7 +10848,14 @@
         <p:cNvGrpSpPr/>
         <p:nvPr/>
       </p:nvGrpSpPr>
-      <p:grpSpPr/>
+      <p:grpSpPr>
+        <a:xfrm>
+          <a:off x="0" y="0"/>
+          <a:ext cx="0" cy="0"/>
+          <a:chOff x="0" y="0"/>
+          <a:chExt cx="0" cy="0"/>
+        </a:xfrm>
+      </p:grpSpPr>
       <p:sp>
         <p:nvSpPr>
           <p:cNvPr id="2" name="Rectangle 1"/>
@@ -10762,7 +10892,7 @@
           </a:fontRef>
         </p:style>
         <p:txBody>
-          <a:bodyPr rtlCol="0" anchor="ctr" wrap="square" lIns="548640" tIns="137160"/>
+          <a:bodyPr wrap="square" lIns="548640" tIns="137160" rtlCol="0" anchor="ctr"/>
           <a:lstStyle/>
           <a:p>
             <a:pPr algn="l">
@@ -10787,8 +10917,8 @@
         </p:nvSpPr>
         <p:spPr>
           <a:xfrm>
-            <a:off x="548640" y="1280160"/>
-            <a:ext cx="5029200" cy="2286000"/>
+            <a:off x="548639" y="1280160"/>
+            <a:ext cx="6785034" cy="1631216"/>
           </a:xfrm>
           <a:prstGeom prst="rect">
             <a:avLst/>
@@ -10813,6 +10943,7 @@
               </a:defRPr>
             </a:pPr>
             <a:r>
+              <a:rPr dirty="0"/>
               <a:t>Source: UCI Machine Learning Repository (Dataset ID: 697)</a:t>
             </a:r>
           </a:p>
@@ -10829,7 +10960,16 @@
               </a:defRPr>
             </a:pPr>
             <a:r>
-              <a:t>Origin: Instituto Politécnico de Portalegre, Portugal</a:t>
+              <a:rPr dirty="0"/>
+              <a:t>Origin: Instituto Politécnico de </a:t>
+            </a:r>
+            <a:r>
+              <a:rPr dirty="0" err="1"/>
+              <a:t>Portalegre</a:t>
+            </a:r>
+            <a:r>
+              <a:rPr dirty="0"/>
+              <a:t>, Portugal</a:t>
             </a:r>
           </a:p>
           <a:p>
@@ -10845,6 +10985,7 @@
               </a:defRPr>
             </a:pPr>
             <a:r>
+              <a:rPr dirty="0"/>
               <a:t>Size: 4,424 students × 37 columns (36 features + 1 target)</a:t>
             </a:r>
           </a:p>
@@ -10861,6 +11002,7 @@
               </a:defRPr>
             </a:pPr>
             <a:r>
+              <a:rPr dirty="0"/>
               <a:t>Missing values: None  |  License: CC BY 4.0</a:t>
             </a:r>
           </a:p>
@@ -10877,6 +11019,7 @@
               </a:defRPr>
             </a:pPr>
             <a:r>
+              <a:rPr dirty="0"/>
               <a:t>Citation: Realinho et al. (2021)</a:t>
             </a:r>
           </a:p>
@@ -10920,7 +11063,7 @@
           </a:fontRef>
         </p:style>
         <p:txBody>
-          <a:bodyPr rtlCol="0" anchor="ctr" wrap="square"/>
+          <a:bodyPr wrap="square" rtlCol="0" anchor="ctr"/>
           <a:lstStyle/>
           <a:p>
             <a:pPr algn="ctr">
@@ -10932,6 +11075,7 @@
               </a:defRPr>
             </a:pPr>
             <a:r>
+              <a:rPr lang="en-US" dirty="0"/>
               <a:t>Demographic</a:t>
             </a:r>
           </a:p>
@@ -10948,6 +11092,7 @@
               </a:defRPr>
             </a:pPr>
             <a:r>
+              <a:rPr sz="1400" dirty="0"/>
               <a:t>Marital status</a:t>
             </a:r>
           </a:p>
@@ -10964,6 +11109,7 @@
               </a:defRPr>
             </a:pPr>
             <a:r>
+              <a:rPr sz="1400" dirty="0"/>
               <a:t>Nationality</a:t>
             </a:r>
           </a:p>
@@ -10980,6 +11126,7 @@
               </a:defRPr>
             </a:pPr>
             <a:r>
+              <a:rPr sz="1400" dirty="0"/>
               <a:t>Gender</a:t>
             </a:r>
           </a:p>
@@ -10996,6 +11143,7 @@
               </a:defRPr>
             </a:pPr>
             <a:r>
+              <a:rPr sz="1400" dirty="0"/>
               <a:t>Age at enrollment</a:t>
             </a:r>
           </a:p>
@@ -11039,7 +11187,7 @@
           </a:fontRef>
         </p:style>
         <p:txBody>
-          <a:bodyPr rtlCol="0" anchor="ctr" wrap="square"/>
+          <a:bodyPr wrap="square" rtlCol="0" anchor="ctr"/>
           <a:lstStyle/>
           <a:p>
             <a:pPr algn="ctr">
@@ -11051,6 +11199,7 @@
               </a:defRPr>
             </a:pPr>
             <a:r>
+              <a:rPr dirty="0"/>
               <a:t>Academic</a:t>
             </a:r>
           </a:p>
@@ -11067,6 +11216,7 @@
               </a:defRPr>
             </a:pPr>
             <a:r>
+              <a:rPr sz="1400" dirty="0"/>
               <a:t>Previous qualification</a:t>
             </a:r>
           </a:p>
@@ -11083,6 +11233,7 @@
               </a:defRPr>
             </a:pPr>
             <a:r>
+              <a:rPr sz="1400" dirty="0"/>
               <a:t>Admission grade</a:t>
             </a:r>
           </a:p>
@@ -11099,6 +11250,7 @@
               </a:defRPr>
             </a:pPr>
             <a:r>
+              <a:rPr sz="1400" dirty="0"/>
               <a:t>Course</a:t>
             </a:r>
           </a:p>
@@ -11115,6 +11267,7 @@
               </a:defRPr>
             </a:pPr>
             <a:r>
+              <a:rPr sz="1400" dirty="0"/>
               <a:t>Application mode</a:t>
             </a:r>
           </a:p>
@@ -11158,7 +11311,7 @@
           </a:fontRef>
         </p:style>
         <p:txBody>
-          <a:bodyPr rtlCol="0" anchor="ctr" wrap="square"/>
+          <a:bodyPr wrap="square" rtlCol="0" anchor="ctr"/>
           <a:lstStyle/>
           <a:p>
             <a:pPr algn="ctr">
@@ -11170,6 +11323,7 @@
               </a:defRPr>
             </a:pPr>
             <a:r>
+              <a:rPr dirty="0"/>
               <a:t>Socio-Economic</a:t>
             </a:r>
           </a:p>
@@ -11186,6 +11340,7 @@
               </a:defRPr>
             </a:pPr>
             <a:r>
+              <a:rPr sz="1400" dirty="0"/>
               <a:t>Scholarship holder</a:t>
             </a:r>
           </a:p>
@@ -11202,6 +11357,7 @@
               </a:defRPr>
             </a:pPr>
             <a:r>
+              <a:rPr sz="1400" dirty="0"/>
               <a:t>Debtor</a:t>
             </a:r>
           </a:p>
@@ -11218,6 +11374,7 @@
               </a:defRPr>
             </a:pPr>
             <a:r>
+              <a:rPr sz="1400" dirty="0"/>
               <a:t>Tuition fees</a:t>
             </a:r>
           </a:p>
@@ -11234,6 +11391,7 @@
               </a:defRPr>
             </a:pPr>
             <a:r>
+              <a:rPr sz="1400" dirty="0"/>
               <a:t>Parental education</a:t>
             </a:r>
           </a:p>
@@ -11277,7 +11435,7 @@
           </a:fontRef>
         </p:style>
         <p:txBody>
-          <a:bodyPr rtlCol="0" anchor="ctr" wrap="square"/>
+          <a:bodyPr wrap="square" rtlCol="0" anchor="ctr"/>
           <a:lstStyle/>
           <a:p>
             <a:pPr algn="ctr">
@@ -11289,8 +11447,21 @@
               </a:defRPr>
             </a:pPr>
             <a:r>
+              <a:rPr dirty="0"/>
               <a:t>Performance</a:t>
             </a:r>
+            <a:endParaRPr lang="vi-VN" dirty="0"/>
+          </a:p>
+          <a:p>
+            <a:pPr algn="ctr">
+              <a:defRPr sz="1300" b="1">
+                <a:solidFill>
+                  <a:srgbClr val="E24B4A"/>
+                </a:solidFill>
+                <a:latin typeface="Calibri"/>
+              </a:defRPr>
+            </a:pPr>
+            <a:endParaRPr dirty="0"/>
           </a:p>
           <a:p>
             <a:pPr algn="l">
@@ -11305,7 +11476,16 @@
               </a:defRPr>
             </a:pPr>
             <a:r>
-              <a:t>Units enrolled (sem 1 &amp; 2)</a:t>
+              <a:rPr sz="1400" dirty="0"/>
+              <a:t>Units enrolled (</a:t>
+            </a:r>
+            <a:r>
+              <a:rPr sz="1400" dirty="0" err="1"/>
+              <a:t>sem</a:t>
+            </a:r>
+            <a:r>
+              <a:rPr sz="1400" dirty="0"/>
+              <a:t> 1 &amp; 2)</a:t>
             </a:r>
           </a:p>
           <a:p>
@@ -11321,7 +11501,16 @@
               </a:defRPr>
             </a:pPr>
             <a:r>
-              <a:t>Units approved (sem 1 &amp; 2)</a:t>
+              <a:rPr sz="1400" dirty="0"/>
+              <a:t>Units approved (</a:t>
+            </a:r>
+            <a:r>
+              <a:rPr sz="1400" dirty="0" err="1"/>
+              <a:t>sem</a:t>
+            </a:r>
+            <a:r>
+              <a:rPr sz="1400" dirty="0"/>
+              <a:t> 1 &amp; 2)</a:t>
             </a:r>
           </a:p>
           <a:p>
@@ -11337,7 +11526,16 @@
               </a:defRPr>
             </a:pPr>
             <a:r>
-              <a:t>Grades (sem 1 &amp; 2)</a:t>
+              <a:rPr sz="1400" dirty="0"/>
+              <a:t>Grades (</a:t>
+            </a:r>
+            <a:r>
+              <a:rPr sz="1400" dirty="0" err="1"/>
+              <a:t>sem</a:t>
+            </a:r>
+            <a:r>
+              <a:rPr sz="1400" dirty="0"/>
+              <a:t> 1 &amp; 2)</a:t>
             </a:r>
           </a:p>
         </p:txBody>
@@ -11387,7 +11585,7 @@
 </file>
 
 <file path=ppt/slides/slide5.xml><?xml version="1.0" encoding="utf-8"?>
-<p:sld xmlns:a="http://schemas.openxmlformats.org/drawingml/2006/main" xmlns:p="http://schemas.openxmlformats.org/presentationml/2006/main" xmlns:r="http://schemas.openxmlformats.org/officeDocument/2006/relationships">
+<p:sld xmlns:a="http://schemas.openxmlformats.org/drawingml/2006/main" xmlns:r="http://schemas.openxmlformats.org/officeDocument/2006/relationships" xmlns:p="http://schemas.openxmlformats.org/presentationml/2006/main">
   <p:cSld>
     <p:spTree>
       <p:nvGrpSpPr>
@@ -11395,7 +11593,14 @@
         <p:cNvGrpSpPr/>
         <p:nvPr/>
       </p:nvGrpSpPr>
-      <p:grpSpPr/>
+      <p:grpSpPr>
+        <a:xfrm>
+          <a:off x="0" y="0"/>
+          <a:ext cx="0" cy="0"/>
+          <a:chOff x="0" y="0"/>
+          <a:chExt cx="0" cy="0"/>
+        </a:xfrm>
+      </p:grpSpPr>
       <p:sp>
         <p:nvSpPr>
           <p:cNvPr id="2" name="Rectangle 1"/>
@@ -11432,7 +11637,7 @@
           </a:fontRef>
         </p:style>
         <p:txBody>
-          <a:bodyPr rtlCol="0" anchor="ctr" wrap="square" lIns="548640" tIns="137160"/>
+          <a:bodyPr wrap="square" lIns="548640" tIns="137160" rtlCol="0" anchor="ctr"/>
           <a:lstStyle/>
           <a:p>
             <a:pPr algn="l">
@@ -11487,7 +11692,7 @@
           </a:fontRef>
         </p:style>
         <p:txBody>
-          <a:bodyPr rtlCol="0" anchor="ctr" wrap="square"/>
+          <a:bodyPr wrap="square" rtlCol="0" anchor="ctr"/>
           <a:lstStyle/>
           <a:p>
             <a:pPr algn="ctr">
@@ -11499,8 +11704,10 @@
               </a:defRPr>
             </a:pPr>
             <a:r>
+              <a:rPr dirty="0" err="1"/>
               <a:t>Student_Enrollment_Fact</a:t>
             </a:r>
+            <a:endParaRPr dirty="0"/>
           </a:p>
           <a:p>
             <a:pPr algn="l">
@@ -11515,7 +11722,12 @@
               </a:defRPr>
             </a:pPr>
             <a:r>
-              <a:t>student_id (PK)</a:t>
+              <a:rPr sz="1400" dirty="0" err="1"/>
+              <a:t>student_id</a:t>
+            </a:r>
+            <a:r>
+              <a:rPr sz="1400" dirty="0"/>
+              <a:t> (PK)</a:t>
             </a:r>
           </a:p>
           <a:p>
@@ -11531,7 +11743,12 @@
               </a:defRPr>
             </a:pPr>
             <a:r>
-              <a:t>course_id (FK)</a:t>
+              <a:rPr sz="1400" dirty="0" err="1"/>
+              <a:t>course_id</a:t>
+            </a:r>
+            <a:r>
+              <a:rPr sz="1400" dirty="0"/>
+              <a:t> (FK)</a:t>
             </a:r>
           </a:p>
           <a:p>
@@ -11547,6 +11764,7 @@
               </a:defRPr>
             </a:pPr>
             <a:r>
+              <a:rPr sz="1400" dirty="0"/>
               <a:t>sem1_grade, sem2_grade</a:t>
             </a:r>
           </a:p>
@@ -11563,6 +11781,7 @@
               </a:defRPr>
             </a:pPr>
             <a:r>
+              <a:rPr sz="1400" dirty="0"/>
               <a:t>sem1_approved, sem2_approved</a:t>
             </a:r>
           </a:p>
@@ -11579,8 +11798,10 @@
               </a:defRPr>
             </a:pPr>
             <a:r>
+              <a:rPr sz="1400" dirty="0" err="1"/>
               <a:t>target_outcome</a:t>
             </a:r>
+            <a:endParaRPr sz="1400" dirty="0"/>
           </a:p>
         </p:txBody>
       </p:sp>
@@ -11622,7 +11843,7 @@
           </a:fontRef>
         </p:style>
         <p:txBody>
-          <a:bodyPr rtlCol="0" anchor="ctr" wrap="square"/>
+          <a:bodyPr wrap="square" rtlCol="0" anchor="ctr"/>
           <a:lstStyle/>
           <a:p>
             <a:pPr algn="ctr">
@@ -11634,8 +11855,10 @@
               </a:defRPr>
             </a:pPr>
             <a:r>
+              <a:rPr dirty="0" err="1"/>
               <a:t>Student_Dim</a:t>
             </a:r>
+            <a:endParaRPr dirty="0"/>
           </a:p>
           <a:p>
             <a:pPr algn="l">
@@ -11650,6 +11873,7 @@
               </a:defRPr>
             </a:pPr>
             <a:r>
+              <a:rPr sz="1400" dirty="0"/>
               <a:t>age</a:t>
             </a:r>
           </a:p>
@@ -11666,6 +11890,7 @@
               </a:defRPr>
             </a:pPr>
             <a:r>
+              <a:rPr sz="1400" dirty="0"/>
               <a:t>gender</a:t>
             </a:r>
           </a:p>
@@ -11682,8 +11907,10 @@
               </a:defRPr>
             </a:pPr>
             <a:r>
+              <a:rPr sz="1400" dirty="0" err="1"/>
               <a:t>marital_status</a:t>
             </a:r>
+            <a:endParaRPr sz="1400" dirty="0"/>
           </a:p>
           <a:p>
             <a:pPr algn="l">
@@ -11698,6 +11925,7 @@
               </a:defRPr>
             </a:pPr>
             <a:r>
+              <a:rPr sz="1400" dirty="0"/>
               <a:t>nationality</a:t>
             </a:r>
           </a:p>
@@ -11741,7 +11969,7 @@
           </a:fontRef>
         </p:style>
         <p:txBody>
-          <a:bodyPr rtlCol="0" anchor="ctr" wrap="square"/>
+          <a:bodyPr wrap="square" rtlCol="0" anchor="ctr"/>
           <a:lstStyle/>
           <a:p>
             <a:pPr algn="ctr">
@@ -11753,8 +11981,10 @@
               </a:defRPr>
             </a:pPr>
             <a:r>
+              <a:rPr dirty="0" err="1"/>
               <a:t>Academic_Dim</a:t>
             </a:r>
+            <a:endParaRPr dirty="0"/>
           </a:p>
           <a:p>
             <a:pPr algn="l">
@@ -11769,8 +11999,10 @@
               </a:defRPr>
             </a:pPr>
             <a:r>
+              <a:rPr sz="1400" dirty="0" err="1"/>
               <a:t>prev_qualification</a:t>
             </a:r>
+            <a:endParaRPr sz="1400" dirty="0"/>
           </a:p>
           <a:p>
             <a:pPr algn="l">
@@ -11785,8 +12017,10 @@
               </a:defRPr>
             </a:pPr>
             <a:r>
+              <a:rPr sz="1400" dirty="0" err="1"/>
               <a:t>application_mode</a:t>
             </a:r>
+            <a:endParaRPr sz="1400" dirty="0"/>
           </a:p>
           <a:p>
             <a:pPr algn="l">
@@ -11801,8 +12035,10 @@
               </a:defRPr>
             </a:pPr>
             <a:r>
+              <a:rPr sz="1400" dirty="0" err="1"/>
               <a:t>admission_grade</a:t>
             </a:r>
+            <a:endParaRPr sz="1400" dirty="0"/>
           </a:p>
           <a:p>
             <a:pPr algn="l">
@@ -11817,6 +12053,7 @@
               </a:defRPr>
             </a:pPr>
             <a:r>
+              <a:rPr sz="1400" dirty="0"/>
               <a:t>course</a:t>
             </a:r>
           </a:p>
@@ -11860,7 +12097,7 @@
           </a:fontRef>
         </p:style>
         <p:txBody>
-          <a:bodyPr rtlCol="0" anchor="ctr" wrap="square"/>
+          <a:bodyPr wrap="square" rtlCol="0" anchor="ctr"/>
           <a:lstStyle/>
           <a:p>
             <a:pPr algn="ctr">
@@ -11872,8 +12109,10 @@
               </a:defRPr>
             </a:pPr>
             <a:r>
+              <a:rPr dirty="0" err="1"/>
               <a:t>Family_Dim</a:t>
             </a:r>
+            <a:endParaRPr dirty="0"/>
           </a:p>
           <a:p>
             <a:pPr algn="l">
@@ -11888,8 +12127,10 @@
               </a:defRPr>
             </a:pPr>
             <a:r>
+              <a:rPr sz="1400" dirty="0" err="1"/>
               <a:t>mother_qualification</a:t>
             </a:r>
+            <a:endParaRPr sz="1400" dirty="0"/>
           </a:p>
           <a:p>
             <a:pPr algn="l">
@@ -11904,8 +12145,10 @@
               </a:defRPr>
             </a:pPr>
             <a:r>
+              <a:rPr sz="1400" dirty="0" err="1"/>
               <a:t>father_qualification</a:t>
             </a:r>
+            <a:endParaRPr sz="1400" dirty="0"/>
           </a:p>
           <a:p>
             <a:pPr algn="l">
@@ -11920,8 +12163,10 @@
               </a:defRPr>
             </a:pPr>
             <a:r>
+              <a:rPr sz="1400" dirty="0" err="1"/>
               <a:t>mother_occupation</a:t>
             </a:r>
+            <a:endParaRPr sz="1400" dirty="0"/>
           </a:p>
           <a:p>
             <a:pPr algn="l">
@@ -11936,8 +12181,10 @@
               </a:defRPr>
             </a:pPr>
             <a:r>
+              <a:rPr sz="1400" dirty="0" err="1"/>
               <a:t>father_occupation</a:t>
             </a:r>
+            <a:endParaRPr sz="1400" dirty="0"/>
           </a:p>
         </p:txBody>
       </p:sp>
@@ -11979,7 +12226,7 @@
           </a:fontRef>
         </p:style>
         <p:txBody>
-          <a:bodyPr rtlCol="0" anchor="ctr" wrap="square"/>
+          <a:bodyPr wrap="square" rtlCol="0" anchor="ctr"/>
           <a:lstStyle/>
           <a:p>
             <a:pPr algn="ctr">
@@ -11991,8 +12238,10 @@
               </a:defRPr>
             </a:pPr>
             <a:r>
+              <a:rPr dirty="0" err="1"/>
               <a:t>Economic_Dim</a:t>
             </a:r>
+            <a:endParaRPr dirty="0"/>
           </a:p>
           <a:p>
             <a:pPr algn="l">
@@ -12007,6 +12256,7 @@
               </a:defRPr>
             </a:pPr>
             <a:r>
+              <a:rPr sz="1400" dirty="0"/>
               <a:t>scholarship</a:t>
             </a:r>
           </a:p>
@@ -12023,6 +12273,7 @@
               </a:defRPr>
             </a:pPr>
             <a:r>
+              <a:rPr sz="1400" dirty="0"/>
               <a:t>debtor</a:t>
             </a:r>
           </a:p>
@@ -12039,8 +12290,10 @@
               </a:defRPr>
             </a:pPr>
             <a:r>
+              <a:rPr sz="1400" dirty="0" err="1"/>
               <a:t>tuition_fees</a:t>
             </a:r>
+            <a:endParaRPr sz="1400" dirty="0"/>
           </a:p>
           <a:p>
             <a:pPr algn="l">
@@ -12055,7 +12308,12 @@
               </a:defRPr>
             </a:pPr>
             <a:r>
-              <a:t>unemployment_rate, GDP</a:t>
+              <a:rPr sz="1400" dirty="0" err="1"/>
+              <a:t>unemployment_rate</a:t>
+            </a:r>
+            <a:r>
+              <a:rPr sz="1400" dirty="0"/>
+              <a:t>, GDP</a:t>
             </a:r>
           </a:p>
         </p:txBody>
@@ -12208,7 +12466,7 @@
         </p:nvSpPr>
         <p:spPr>
           <a:xfrm>
-            <a:off x="3200400" y="1188720"/>
+            <a:off x="3200400" y="1097280"/>
             <a:ext cx="5760720" cy="457200"/>
           </a:xfrm>
           <a:prstGeom prst="rect">
@@ -12231,6 +12489,7 @@
               </a:defRPr>
             </a:pPr>
             <a:r>
+              <a:rPr dirty="0"/>
               <a:t>ETL: Source DBs → Extract → Transform (encode, normalize) → Load → Star Schema</a:t>
             </a:r>
           </a:p>
@@ -12281,7 +12540,7 @@
 </file>
 
 <file path=ppt/slides/slide6.xml><?xml version="1.0" encoding="utf-8"?>
-<p:sld xmlns:a="http://schemas.openxmlformats.org/drawingml/2006/main" xmlns:p="http://schemas.openxmlformats.org/presentationml/2006/main" xmlns:r="http://schemas.openxmlformats.org/officeDocument/2006/relationships">
+<p:sld xmlns:a="http://schemas.openxmlformats.org/drawingml/2006/main" xmlns:r="http://schemas.openxmlformats.org/officeDocument/2006/relationships" xmlns:p="http://schemas.openxmlformats.org/presentationml/2006/main">
   <p:cSld>
     <p:spTree>
       <p:nvGrpSpPr>
@@ -12289,7 +12548,14 @@
         <p:cNvGrpSpPr/>
         <p:nvPr/>
       </p:nvGrpSpPr>
-      <p:grpSpPr/>
+      <p:grpSpPr>
+        <a:xfrm>
+          <a:off x="0" y="0"/>
+          <a:ext cx="0" cy="0"/>
+          <a:chOff x="0" y="0"/>
+          <a:chExt cx="0" cy="0"/>
+        </a:xfrm>
+      </p:grpSpPr>
       <p:sp>
         <p:nvSpPr>
           <p:cNvPr id="2" name="Rectangle 1"/>
@@ -12326,7 +12592,7 @@
           </a:fontRef>
         </p:style>
         <p:txBody>
-          <a:bodyPr rtlCol="0" anchor="ctr" wrap="square" lIns="548640" tIns="137160"/>
+          <a:bodyPr wrap="square" lIns="548640" tIns="137160" rtlCol="0" anchor="ctr"/>
           <a:lstStyle/>
           <a:p>
             <a:pPr algn="l">
@@ -12379,7 +12645,7 @@
           </a:fontRef>
         </p:style>
         <p:txBody>
-          <a:bodyPr rtlCol="0" anchor="ctr" wrap="square" tIns="73152"/>
+          <a:bodyPr wrap="square" tIns="73152" rtlCol="0" anchor="ctr"/>
           <a:lstStyle/>
           <a:p>
             <a:pPr algn="ctr">
@@ -12452,6 +12718,7 @@
           <a:lstStyle/>
           <a:p>
             <a:pPr algn="ctr"/>
+            <a:endParaRPr/>
           </a:p>
         </p:txBody>
       </p:sp>
@@ -12491,7 +12758,7 @@
           </a:fontRef>
         </p:style>
         <p:txBody>
-          <a:bodyPr rtlCol="0" anchor="ctr" wrap="square" tIns="73152"/>
+          <a:bodyPr wrap="square" tIns="73152" rtlCol="0" anchor="ctr"/>
           <a:lstStyle/>
           <a:p>
             <a:pPr algn="ctr">
@@ -12564,6 +12831,7 @@
           <a:lstStyle/>
           <a:p>
             <a:pPr algn="ctr"/>
+            <a:endParaRPr/>
           </a:p>
         </p:txBody>
       </p:sp>
@@ -12603,7 +12871,7 @@
           </a:fontRef>
         </p:style>
         <p:txBody>
-          <a:bodyPr rtlCol="0" anchor="ctr" wrap="square" tIns="73152"/>
+          <a:bodyPr wrap="square" tIns="73152" rtlCol="0" anchor="ctr"/>
           <a:lstStyle/>
           <a:p>
             <a:pPr algn="ctr">
@@ -12676,6 +12944,7 @@
           <a:lstStyle/>
           <a:p>
             <a:pPr algn="ctr"/>
+            <a:endParaRPr/>
           </a:p>
         </p:txBody>
       </p:sp>
@@ -12715,7 +12984,7 @@
           </a:fontRef>
         </p:style>
         <p:txBody>
-          <a:bodyPr rtlCol="0" anchor="ctr" wrap="square" tIns="73152"/>
+          <a:bodyPr wrap="square" tIns="73152" rtlCol="0" anchor="ctr"/>
           <a:lstStyle/>
           <a:p>
             <a:pPr algn="ctr">
@@ -12788,6 +13057,7 @@
           <a:lstStyle/>
           <a:p>
             <a:pPr algn="ctr"/>
+            <a:endParaRPr/>
           </a:p>
         </p:txBody>
       </p:sp>
@@ -12827,7 +13097,7 @@
           </a:fontRef>
         </p:style>
         <p:txBody>
-          <a:bodyPr rtlCol="0" anchor="ctr" wrap="square" tIns="73152"/>
+          <a:bodyPr wrap="square" tIns="73152" rtlCol="0" anchor="ctr"/>
           <a:lstStyle/>
           <a:p>
             <a:pPr algn="ctr">
@@ -12869,7 +13139,7 @@
         <p:spPr>
           <a:xfrm>
             <a:off x="548640" y="4389120"/>
-            <a:ext cx="10972800" cy="1828800"/>
+            <a:ext cx="11064240" cy="938719"/>
           </a:xfrm>
           <a:prstGeom prst="rect">
             <a:avLst/>
@@ -12894,7 +13164,12 @@
               </a:defRPr>
             </a:pPr>
             <a:r>
-              <a:t>random_state=42 for full reproducibility across all operations</a:t>
+              <a:rPr b="1" dirty="0" err="1"/>
+              <a:t>random_state</a:t>
+            </a:r>
+            <a:r>
+              <a:rPr b="1" dirty="0"/>
+              <a:t>=42 for full reproducibility across all operations</a:t>
             </a:r>
           </a:p>
           <a:p>
@@ -12910,6 +13185,7 @@
               </a:defRPr>
             </a:pPr>
             <a:r>
+              <a:rPr b="1" dirty="0"/>
               <a:t>Stratified split preserves class ratios in both train and test sets</a:t>
             </a:r>
           </a:p>
@@ -12926,6 +13202,7 @@
               </a:defRPr>
             </a:pPr>
             <a:r>
+              <a:rPr b="1" dirty="0"/>
               <a:t>Unscaled copy saved separately for EDA visualizations</a:t>
             </a:r>
           </a:p>
@@ -12976,7 +13253,7 @@
 </file>
 
 <file path=ppt/slides/slide7.xml><?xml version="1.0" encoding="utf-8"?>
-<p:sld xmlns:a="http://schemas.openxmlformats.org/drawingml/2006/main" xmlns:p="http://schemas.openxmlformats.org/presentationml/2006/main" xmlns:r="http://schemas.openxmlformats.org/officeDocument/2006/relationships">
+<p:sld xmlns:a="http://schemas.openxmlformats.org/drawingml/2006/main" xmlns:r="http://schemas.openxmlformats.org/officeDocument/2006/relationships" xmlns:p="http://schemas.openxmlformats.org/presentationml/2006/main">
   <p:cSld>
     <p:spTree>
       <p:nvGrpSpPr>
@@ -12984,7 +13261,14 @@
         <p:cNvGrpSpPr/>
         <p:nvPr/>
       </p:nvGrpSpPr>
-      <p:grpSpPr/>
+      <p:grpSpPr>
+        <a:xfrm>
+          <a:off x="0" y="0"/>
+          <a:ext cx="0" cy="0"/>
+          <a:chOff x="0" y="0"/>
+          <a:chExt cx="0" cy="0"/>
+        </a:xfrm>
+      </p:grpSpPr>
       <p:sp>
         <p:nvSpPr>
           <p:cNvPr id="2" name="Rectangle 1"/>
@@ -13021,7 +13305,7 @@
           </a:fontRef>
         </p:style>
         <p:txBody>
-          <a:bodyPr rtlCol="0" anchor="ctr" wrap="square" lIns="548640" tIns="137160"/>
+          <a:bodyPr wrap="square" lIns="548640" tIns="137160" rtlCol="0" anchor="ctr"/>
           <a:lstStyle/>
           <a:p>
             <a:pPr algn="l">
@@ -13041,317 +13325,6 @@
       <p:pic>
         <p:nvPicPr>
           <p:cNvPr id="3" name="Picture 2" descr="class_distribution.png"/>
-          <p:cNvPicPr>
-            <a:picLocks noChangeAspect="1"/>
-          </p:cNvPicPr>
-          <p:nvPr/>
-        </p:nvPicPr>
-        <p:blipFill>
-          <a:blip r:embed="rId2"/>
-          <a:stretch>
-            <a:fillRect/>
-          </a:stretch>
-        </p:blipFill>
-        <p:spPr>
-          <a:xfrm>
-            <a:off x="365760" y="1280160"/>
-            <a:ext cx="5486400" cy="3415099"/>
-          </a:xfrm>
-          <a:prstGeom prst="rect">
-            <a:avLst/>
-          </a:prstGeom>
-        </p:spPr>
-      </p:pic>
-      <p:sp>
-        <p:nvSpPr>
-          <p:cNvPr id="4" name="TextBox 3"/>
-          <p:cNvSpPr txBox="1"/>
-          <p:nvPr/>
-        </p:nvSpPr>
-        <p:spPr>
-          <a:xfrm>
-            <a:off x="6400800" y="1645920"/>
-            <a:ext cx="5029200" cy="3200400"/>
-          </a:xfrm>
-          <a:prstGeom prst="rect">
-            <a:avLst/>
-          </a:prstGeom>
-          <a:noFill/>
-        </p:spPr>
-        <p:txBody>
-          <a:bodyPr wrap="square">
-            <a:spAutoFit/>
-          </a:bodyPr>
-          <a:lstStyle/>
-          <a:p>
-            <a:pPr>
-              <a:spcAft>
-                <a:spcPts val="600"/>
-              </a:spcAft>
-              <a:defRPr sz="1700">
-                <a:solidFill>
-                  <a:srgbClr val="333333"/>
-                </a:solidFill>
-                <a:latin typeface="Calibri"/>
-              </a:defRPr>
-            </a:pPr>
-            <a:r>
-              <a:t>Graduate: 2,209 students (49.9%)</a:t>
-            </a:r>
-          </a:p>
-          <a:p>
-            <a:pPr>
-              <a:spcAft>
-                <a:spcPts val="600"/>
-              </a:spcAft>
-              <a:defRPr sz="1700">
-                <a:solidFill>
-                  <a:srgbClr val="333333"/>
-                </a:solidFill>
-                <a:latin typeface="Calibri"/>
-              </a:defRPr>
-            </a:pPr>
-            <a:r>
-              <a:t>Dropout: 1,421 students (32.1%)</a:t>
-            </a:r>
-          </a:p>
-          <a:p>
-            <a:pPr>
-              <a:spcAft>
-                <a:spcPts val="600"/>
-              </a:spcAft>
-              <a:defRPr sz="1700">
-                <a:solidFill>
-                  <a:srgbClr val="333333"/>
-                </a:solidFill>
-                <a:latin typeface="Calibri"/>
-              </a:defRPr>
-            </a:pPr>
-            <a:r>
-              <a:t>Enrolled: 794 students (17.9%)</a:t>
-            </a:r>
-          </a:p>
-          <a:p>
-            <a:pPr>
-              <a:spcAft>
-                <a:spcPts val="600"/>
-              </a:spcAft>
-              <a:defRPr sz="1700">
-                <a:solidFill>
-                  <a:srgbClr val="333333"/>
-                </a:solidFill>
-                <a:latin typeface="Calibri"/>
-              </a:defRPr>
-            </a:pPr>
-            <a:r>
-              <a:t>Total: 4,424 students</a:t>
-            </a:r>
-          </a:p>
-          <a:p>
-            <a:pPr>
-              <a:spcAft>
-                <a:spcPts val="600"/>
-              </a:spcAft>
-              <a:defRPr sz="1700">
-                <a:solidFill>
-                  <a:srgbClr val="333333"/>
-                </a:solidFill>
-                <a:latin typeface="Calibri"/>
-              </a:defRPr>
-            </a:pPr>
-            <a:r>
-              <a:t>Notable imbalance — Enrolled class is underrepresented</a:t>
-            </a:r>
-          </a:p>
-        </p:txBody>
-      </p:sp>
-      <p:sp>
-        <p:nvSpPr>
-          <p:cNvPr id="5" name="Rounded Rectangle 4"/>
-          <p:cNvSpPr/>
-          <p:nvPr/>
-        </p:nvSpPr>
-        <p:spPr>
-          <a:xfrm>
-            <a:off x="6400800" y="4754880"/>
-            <a:ext cx="5029200" cy="731520"/>
-          </a:xfrm>
-          <a:prstGeom prst="roundRect">
-            <a:avLst/>
-          </a:prstGeom>
-          <a:solidFill>
-            <a:srgbClr val="1D9E75"/>
-          </a:solidFill>
-          <a:ln>
-            <a:noFill/>
-          </a:ln>
-        </p:spPr>
-        <p:style>
-          <a:lnRef idx="1">
-            <a:schemeClr val="accent1"/>
-          </a:lnRef>
-          <a:fillRef idx="3">
-            <a:schemeClr val="accent1"/>
-          </a:fillRef>
-          <a:effectRef idx="2">
-            <a:schemeClr val="accent1"/>
-          </a:effectRef>
-          <a:fontRef idx="minor">
-            <a:schemeClr val="lt1"/>
-          </a:fontRef>
-        </p:style>
-        <p:txBody>
-          <a:bodyPr rtlCol="0" anchor="ctr" wrap="square" lIns="137160" rIns="137160" tIns="91440"/>
-          <a:lstStyle/>
-          <a:p>
-            <a:pPr algn="ctr">
-              <a:defRPr sz="1400" b="1">
-                <a:solidFill>
-                  <a:srgbClr val="FFFFFF"/>
-                </a:solidFill>
-                <a:latin typeface="Calibri"/>
-              </a:defRPr>
-            </a:pPr>
-            <a:r>
-              <a:t>Stratified sampling ensures all classes represented in train/test</a:t>
-            </a:r>
-          </a:p>
-        </p:txBody>
-      </p:sp>
-      <p:sp>
-        <p:nvSpPr>
-          <p:cNvPr id="6" name="TextBox 5"/>
-          <p:cNvSpPr txBox="1"/>
-          <p:nvPr/>
-        </p:nvSpPr>
-        <p:spPr>
-          <a:xfrm>
-            <a:off x="11094415" y="6446520"/>
-            <a:ext cx="914400" cy="320040"/>
-          </a:xfrm>
-          <a:prstGeom prst="rect">
-            <a:avLst/>
-          </a:prstGeom>
-          <a:noFill/>
-        </p:spPr>
-        <p:txBody>
-          <a:bodyPr wrap="none">
-            <a:spAutoFit/>
-          </a:bodyPr>
-          <a:lstStyle/>
-          <a:p>
-            <a:pPr algn="r">
-              <a:defRPr sz="1100">
-                <a:solidFill>
-                  <a:srgbClr val="333333"/>
-                </a:solidFill>
-                <a:latin typeface="Calibri"/>
-              </a:defRPr>
-            </a:pPr>
-            <a:r>
-              <a:t>7 / 19</a:t>
-            </a:r>
-          </a:p>
-        </p:txBody>
-      </p:sp>
-    </p:spTree>
-  </p:cSld>
-  <p:clrMapOvr>
-    <a:masterClrMapping/>
-  </p:clrMapOvr>
-</p:sld>
-</file>
-
-<file path=ppt/slides/slide8.xml><?xml version="1.0" encoding="utf-8"?>
-<p:sld xmlns:a="http://schemas.openxmlformats.org/drawingml/2006/main" xmlns:p="http://schemas.openxmlformats.org/presentationml/2006/main" xmlns:r="http://schemas.openxmlformats.org/officeDocument/2006/relationships">
-  <p:cSld>
-    <p:spTree>
-      <p:nvGrpSpPr>
-        <p:cNvPr id="1" name=""/>
-        <p:cNvGrpSpPr/>
-        <p:nvPr/>
-      </p:nvGrpSpPr>
-      <p:grpSpPr/>
-      <p:sp>
-        <p:nvSpPr>
-          <p:cNvPr id="2" name="Rectangle 1"/>
-          <p:cNvSpPr/>
-          <p:nvPr/>
-        </p:nvSpPr>
-        <p:spPr>
-          <a:xfrm>
-            <a:off x="0" y="0"/>
-            <a:ext cx="12191695" cy="1005840"/>
-          </a:xfrm>
-          <a:prstGeom prst="rect">
-            <a:avLst/>
-          </a:prstGeom>
-          <a:solidFill>
-            <a:srgbClr val="1B3A5C"/>
-          </a:solidFill>
-          <a:ln>
-            <a:noFill/>
-          </a:ln>
-        </p:spPr>
-        <p:style>
-          <a:lnRef idx="1">
-            <a:schemeClr val="accent1"/>
-          </a:lnRef>
-          <a:fillRef idx="3">
-            <a:schemeClr val="accent1"/>
-          </a:fillRef>
-          <a:effectRef idx="2">
-            <a:schemeClr val="accent1"/>
-          </a:effectRef>
-          <a:fontRef idx="minor">
-            <a:schemeClr val="lt1"/>
-          </a:fontRef>
-        </p:style>
-        <p:txBody>
-          <a:bodyPr rtlCol="0" anchor="ctr" wrap="square" lIns="548640" tIns="137160"/>
-          <a:lstStyle/>
-          <a:p>
-            <a:pPr algn="l">
-              <a:defRPr sz="3000" b="1">
-                <a:solidFill>
-                  <a:srgbClr val="FFFFFF"/>
-                </a:solidFill>
-                <a:latin typeface="Calibri"/>
-              </a:defRPr>
-            </a:pPr>
-            <a:r>
-              <a:t>EDA — Feature Distributions &amp; Correlations</a:t>
-            </a:r>
-          </a:p>
-        </p:txBody>
-      </p:sp>
-      <p:pic>
-        <p:nvPicPr>
-          <p:cNvPr id="3" name="Picture 2" descr="feature_distributions.png"/>
-          <p:cNvPicPr>
-            <a:picLocks noChangeAspect="1"/>
-          </p:cNvPicPr>
-          <p:nvPr/>
-        </p:nvPicPr>
-        <p:blipFill>
-          <a:blip r:embed="rId2"/>
-          <a:stretch>
-            <a:fillRect/>
-          </a:stretch>
-        </p:blipFill>
-        <p:spPr>
-          <a:xfrm>
-            <a:off x="274320" y="1188720"/>
-            <a:ext cx="5943600" cy="4345705"/>
-          </a:xfrm>
-          <a:prstGeom prst="rect">
-            <a:avLst/>
-          </a:prstGeom>
-        </p:spPr>
-      </p:pic>
-      <p:pic>
-        <p:nvPicPr>
-          <p:cNvPr id="4" name="Picture 3" descr="top_correlated_features.png"/>
           <p:cNvPicPr>
             <a:picLocks noChangeAspect="1"/>
           </p:cNvPicPr>
@@ -13365,8 +13338,8 @@
         </p:blipFill>
         <p:spPr>
           <a:xfrm>
-            <a:off x="6309360" y="1188720"/>
-            <a:ext cx="5486400" cy="3810205"/>
+            <a:off x="365760" y="1280160"/>
+            <a:ext cx="5486400" cy="3415099"/>
           </a:xfrm>
           <a:prstGeom prst="rect">
             <a:avLst/>
@@ -13375,14 +13348,122 @@
       </p:pic>
       <p:sp>
         <p:nvSpPr>
+          <p:cNvPr id="4" name="TextBox 3"/>
+          <p:cNvSpPr txBox="1"/>
+          <p:nvPr/>
+        </p:nvSpPr>
+        <p:spPr>
+          <a:xfrm>
+            <a:off x="6400800" y="1645920"/>
+            <a:ext cx="5029200" cy="3200400"/>
+          </a:xfrm>
+          <a:prstGeom prst="rect">
+            <a:avLst/>
+          </a:prstGeom>
+          <a:noFill/>
+        </p:spPr>
+        <p:txBody>
+          <a:bodyPr wrap="square">
+            <a:spAutoFit/>
+          </a:bodyPr>
+          <a:lstStyle/>
+          <a:p>
+            <a:pPr>
+              <a:spcAft>
+                <a:spcPts val="600"/>
+              </a:spcAft>
+              <a:defRPr sz="1700">
+                <a:solidFill>
+                  <a:srgbClr val="333333"/>
+                </a:solidFill>
+                <a:latin typeface="Calibri"/>
+              </a:defRPr>
+            </a:pPr>
+            <a:r>
+              <a:rPr dirty="0"/>
+              <a:t>Graduate: 2,209 students (49.9%)</a:t>
+            </a:r>
+          </a:p>
+          <a:p>
+            <a:pPr>
+              <a:spcAft>
+                <a:spcPts val="600"/>
+              </a:spcAft>
+              <a:defRPr sz="1700">
+                <a:solidFill>
+                  <a:srgbClr val="333333"/>
+                </a:solidFill>
+                <a:latin typeface="Calibri"/>
+              </a:defRPr>
+            </a:pPr>
+            <a:r>
+              <a:rPr dirty="0"/>
+              <a:t>Dropout: 1,421 students (32.1%)</a:t>
+            </a:r>
+          </a:p>
+          <a:p>
+            <a:pPr>
+              <a:spcAft>
+                <a:spcPts val="600"/>
+              </a:spcAft>
+              <a:defRPr sz="1700">
+                <a:solidFill>
+                  <a:srgbClr val="333333"/>
+                </a:solidFill>
+                <a:latin typeface="Calibri"/>
+              </a:defRPr>
+            </a:pPr>
+            <a:r>
+              <a:rPr dirty="0"/>
+              <a:t>Enrolled: 794 students (17.9%)</a:t>
+            </a:r>
+          </a:p>
+          <a:p>
+            <a:pPr>
+              <a:spcAft>
+                <a:spcPts val="600"/>
+              </a:spcAft>
+              <a:defRPr sz="1700">
+                <a:solidFill>
+                  <a:srgbClr val="333333"/>
+                </a:solidFill>
+                <a:latin typeface="Calibri"/>
+              </a:defRPr>
+            </a:pPr>
+            <a:r>
+              <a:rPr dirty="0"/>
+              <a:t>Total: 4,424 students</a:t>
+            </a:r>
+          </a:p>
+          <a:p>
+            <a:pPr>
+              <a:spcAft>
+                <a:spcPts val="600"/>
+              </a:spcAft>
+              <a:defRPr sz="1700">
+                <a:solidFill>
+                  <a:srgbClr val="333333"/>
+                </a:solidFill>
+                <a:latin typeface="Calibri"/>
+              </a:defRPr>
+            </a:pPr>
+            <a:r>
+              <a:rPr dirty="0"/>
+              <a:t>Notable imbalance — Enrolled class is underrepresented</a:t>
+            </a:r>
+          </a:p>
+        </p:txBody>
+      </p:sp>
+      <p:sp>
+        <p:nvSpPr>
           <p:cNvPr id="5" name="Rounded Rectangle 4"/>
           <p:cNvSpPr/>
           <p:nvPr/>
         </p:nvSpPr>
         <p:spPr>
           <a:xfrm>
-            <a:off x="548640" y="5486400"/>
-            <a:ext cx="11064240" cy="640080"/>
+            <a:off x="6400800" y="4754880"/>
+            <a:ext cx="5029200" cy="731520"/>
           </a:xfrm>
           <a:prstGeom prst="roundRect">
             <a:avLst/>
@@ -13409,11 +13490,11 @@
           </a:fontRef>
         </p:style>
         <p:txBody>
-          <a:bodyPr rtlCol="0" anchor="ctr" wrap="square" lIns="137160" rIns="137160" tIns="91440"/>
+          <a:bodyPr wrap="square" lIns="137160" tIns="91440" rIns="137160" rtlCol="0" anchor="ctr"/>
           <a:lstStyle/>
           <a:p>
             <a:pPr algn="ctr">
-              <a:defRPr sz="1500" b="1">
+              <a:defRPr sz="1400" b="1">
                 <a:solidFill>
                   <a:srgbClr val="FFFFFF"/>
                 </a:solidFill>
@@ -13421,7 +13502,7 @@
               </a:defRPr>
             </a:pPr>
             <a:r>
-              <a:t>Key Insight: Students who drop out have dramatically fewer approved curricular units in both semesters</a:t>
+              <a:t>Stratified sampling ensures all classes represented in train/test</a:t>
             </a:r>
           </a:p>
         </p:txBody>
@@ -13457,7 +13538,7 @@
               </a:defRPr>
             </a:pPr>
             <a:r>
-              <a:t>8 / 19</a:t>
+              <a:t>7 / 19</a:t>
             </a:r>
           </a:p>
         </p:txBody>
@@ -13470,8 +13551,8 @@
 </p:sld>
 </file>
 
-<file path=ppt/slides/slide9.xml><?xml version="1.0" encoding="utf-8"?>
-<p:sld xmlns:a="http://schemas.openxmlformats.org/drawingml/2006/main" xmlns:p="http://schemas.openxmlformats.org/presentationml/2006/main" xmlns:r="http://schemas.openxmlformats.org/officeDocument/2006/relationships">
+<file path=ppt/slides/slide8.xml><?xml version="1.0" encoding="utf-8"?>
+<p:sld xmlns:a="http://schemas.openxmlformats.org/drawingml/2006/main" xmlns:r="http://schemas.openxmlformats.org/officeDocument/2006/relationships" xmlns:p="http://schemas.openxmlformats.org/presentationml/2006/main">
   <p:cSld>
     <p:spTree>
       <p:nvGrpSpPr>
@@ -13479,7 +13560,14 @@
         <p:cNvGrpSpPr/>
         <p:nvPr/>
       </p:nvGrpSpPr>
-      <p:grpSpPr/>
+      <p:grpSpPr>
+        <a:xfrm>
+          <a:off x="0" y="0"/>
+          <a:ext cx="0" cy="0"/>
+          <a:chOff x="0" y="0"/>
+          <a:chExt cx="0" cy="0"/>
+        </a:xfrm>
+      </p:grpSpPr>
       <p:sp>
         <p:nvSpPr>
           <p:cNvPr id="2" name="Rectangle 1"/>
@@ -13516,7 +13604,7 @@
           </a:fontRef>
         </p:style>
         <p:txBody>
-          <a:bodyPr rtlCol="0" anchor="ctr" wrap="square" lIns="548640" tIns="137160"/>
+          <a:bodyPr wrap="square" lIns="548640" tIns="137160" rtlCol="0" anchor="ctr"/>
           <a:lstStyle/>
           <a:p>
             <a:pPr algn="l">
@@ -13528,38 +13616,14 @@
               </a:defRPr>
             </a:pPr>
             <a:r>
-              <a:t>EDA — Deeper Insights</a:t>
+              <a:t>EDA — Feature Distributions &amp; Correlations</a:t>
             </a:r>
           </a:p>
         </p:txBody>
       </p:sp>
       <p:pic>
         <p:nvPicPr>
-          <p:cNvPr id="3" name="Picture 2" descr="boxplots_grades.png"/>
-          <p:cNvPicPr>
-            <a:picLocks noChangeAspect="1"/>
-          </p:cNvPicPr>
-          <p:nvPr/>
-        </p:nvPicPr>
-        <p:blipFill>
-          <a:blip r:embed="rId2"/>
-          <a:stretch>
-            <a:fillRect/>
-          </a:stretch>
-        </p:blipFill>
-        <p:spPr>
-          <a:xfrm>
-            <a:off x="182880" y="1188720"/>
-            <a:ext cx="3931920" cy="1667059"/>
-          </a:xfrm>
-          <a:prstGeom prst="rect">
-            <a:avLst/>
-          </a:prstGeom>
-        </p:spPr>
-      </p:pic>
-      <p:pic>
-        <p:nvPicPr>
-          <p:cNvPr id="4" name="Picture 3" descr="stacked_bar_binary.png"/>
+          <p:cNvPr id="3" name="Picture 2" descr="feature_distributions.png"/>
           <p:cNvPicPr>
             <a:picLocks noChangeAspect="1"/>
           </p:cNvPicPr>
@@ -13573,8 +13637,8 @@
         </p:blipFill>
         <p:spPr>
           <a:xfrm>
-            <a:off x="4206240" y="1188720"/>
-            <a:ext cx="3931920" cy="1301854"/>
+            <a:off x="274319" y="1188720"/>
+            <a:ext cx="6128041" cy="4480560"/>
           </a:xfrm>
           <a:prstGeom prst="rect">
             <a:avLst/>
@@ -13583,7 +13647,7 @@
       </p:pic>
       <p:pic>
         <p:nvPicPr>
-          <p:cNvPr id="5" name="Picture 4" descr="pca_scatter.png"/>
+          <p:cNvPr id="4" name="Picture 3" descr="top_correlated_features.png"/>
           <p:cNvPicPr>
             <a:picLocks noChangeAspect="1"/>
           </p:cNvPicPr>
@@ -13597,8 +13661,8 @@
         </p:blipFill>
         <p:spPr>
           <a:xfrm>
-            <a:off x="8229600" y="1188720"/>
-            <a:ext cx="3749039" cy="2608137"/>
+            <a:off x="6309360" y="1188720"/>
+            <a:ext cx="5486400" cy="3810205"/>
           </a:xfrm>
           <a:prstGeom prst="rect">
             <a:avLst/>
@@ -13607,121 +13671,13 @@
       </p:pic>
       <p:sp>
         <p:nvSpPr>
-          <p:cNvPr id="6" name="TextBox 5"/>
-          <p:cNvSpPr txBox="1"/>
-          <p:nvPr/>
-        </p:nvSpPr>
-        <p:spPr>
-          <a:xfrm>
-            <a:off x="457200" y="5029200"/>
-            <a:ext cx="3200400" cy="365760"/>
-          </a:xfrm>
-          <a:prstGeom prst="rect">
-            <a:avLst/>
-          </a:prstGeom>
-          <a:noFill/>
-        </p:spPr>
-        <p:txBody>
-          <a:bodyPr wrap="none">
-            <a:spAutoFit/>
-          </a:bodyPr>
-          <a:lstStyle/>
-          <a:p>
-            <a:pPr algn="ctr">
-              <a:defRPr sz="1200" i="1">
-                <a:solidFill>
-                  <a:srgbClr val="333333"/>
-                </a:solidFill>
-                <a:latin typeface="Calibri"/>
-              </a:defRPr>
-            </a:pPr>
-            <a:r>
-              <a:t>Semester grades by outcome</a:t>
-            </a:r>
-          </a:p>
-        </p:txBody>
-      </p:sp>
-      <p:sp>
-        <p:nvSpPr>
-          <p:cNvPr id="7" name="TextBox 6"/>
-          <p:cNvSpPr txBox="1"/>
-          <p:nvPr/>
-        </p:nvSpPr>
-        <p:spPr>
-          <a:xfrm>
-            <a:off x="4572000" y="5029200"/>
-            <a:ext cx="3200400" cy="365760"/>
-          </a:xfrm>
-          <a:prstGeom prst="rect">
-            <a:avLst/>
-          </a:prstGeom>
-          <a:noFill/>
-        </p:spPr>
-        <p:txBody>
-          <a:bodyPr wrap="none">
-            <a:spAutoFit/>
-          </a:bodyPr>
-          <a:lstStyle/>
-          <a:p>
-            <a:pPr algn="ctr">
-              <a:defRPr sz="1200" i="1">
-                <a:solidFill>
-                  <a:srgbClr val="333333"/>
-                </a:solidFill>
-                <a:latin typeface="Calibri"/>
-              </a:defRPr>
-            </a:pPr>
-            <a:r>
-              <a:t>Financial factors vs outcome</a:t>
-            </a:r>
-          </a:p>
-        </p:txBody>
-      </p:sp>
-      <p:sp>
-        <p:nvSpPr>
-          <p:cNvPr id="8" name="TextBox 7"/>
-          <p:cNvSpPr txBox="1"/>
-          <p:nvPr/>
-        </p:nvSpPr>
-        <p:spPr>
-          <a:xfrm>
-            <a:off x="8686800" y="5029200"/>
-            <a:ext cx="3200400" cy="365760"/>
-          </a:xfrm>
-          <a:prstGeom prst="rect">
-            <a:avLst/>
-          </a:prstGeom>
-          <a:noFill/>
-        </p:spPr>
-        <p:txBody>
-          <a:bodyPr wrap="none">
-            <a:spAutoFit/>
-          </a:bodyPr>
-          <a:lstStyle/>
-          <a:p>
-            <a:pPr algn="ctr">
-              <a:defRPr sz="1200" i="1">
-                <a:solidFill>
-                  <a:srgbClr val="333333"/>
-                </a:solidFill>
-                <a:latin typeface="Calibri"/>
-              </a:defRPr>
-            </a:pPr>
-            <a:r>
-              <a:t>PCA 2D projection</a:t>
-            </a:r>
-          </a:p>
-        </p:txBody>
-      </p:sp>
-      <p:sp>
-        <p:nvSpPr>
-          <p:cNvPr id="9" name="Rounded Rectangle 8"/>
+          <p:cNvPr id="5" name="Rounded Rectangle 4"/>
           <p:cNvSpPr/>
           <p:nvPr/>
         </p:nvSpPr>
         <p:spPr>
           <a:xfrm>
-            <a:off x="548640" y="5577840"/>
+            <a:off x="563727" y="5806440"/>
             <a:ext cx="11064240" cy="640080"/>
           </a:xfrm>
           <a:prstGeom prst="roundRect">
@@ -13749,7 +13705,357 @@
           </a:fontRef>
         </p:style>
         <p:txBody>
-          <a:bodyPr rtlCol="0" anchor="ctr" wrap="square" lIns="137160" rIns="137160" tIns="91440"/>
+          <a:bodyPr wrap="square" lIns="137160" tIns="91440" rIns="137160" rtlCol="0" anchor="ctr"/>
+          <a:lstStyle/>
+          <a:p>
+            <a:pPr algn="ctr">
+              <a:defRPr sz="1500" b="1">
+                <a:solidFill>
+                  <a:srgbClr val="FFFFFF"/>
+                </a:solidFill>
+                <a:latin typeface="Calibri"/>
+              </a:defRPr>
+            </a:pPr>
+            <a:r>
+              <a:rPr dirty="0"/>
+              <a:t>Key Insight: Students who drop out have dramatically fewer approved curricular units in both semesters</a:t>
+            </a:r>
+          </a:p>
+        </p:txBody>
+      </p:sp>
+      <p:sp>
+        <p:nvSpPr>
+          <p:cNvPr id="6" name="TextBox 5"/>
+          <p:cNvSpPr txBox="1"/>
+          <p:nvPr/>
+        </p:nvSpPr>
+        <p:spPr>
+          <a:xfrm>
+            <a:off x="11094415" y="6446520"/>
+            <a:ext cx="914400" cy="320040"/>
+          </a:xfrm>
+          <a:prstGeom prst="rect">
+            <a:avLst/>
+          </a:prstGeom>
+          <a:noFill/>
+        </p:spPr>
+        <p:txBody>
+          <a:bodyPr wrap="none">
+            <a:spAutoFit/>
+          </a:bodyPr>
+          <a:lstStyle/>
+          <a:p>
+            <a:pPr algn="r">
+              <a:defRPr sz="1100">
+                <a:solidFill>
+                  <a:srgbClr val="333333"/>
+                </a:solidFill>
+                <a:latin typeface="Calibri"/>
+              </a:defRPr>
+            </a:pPr>
+            <a:r>
+              <a:t>8 / 19</a:t>
+            </a:r>
+          </a:p>
+        </p:txBody>
+      </p:sp>
+    </p:spTree>
+  </p:cSld>
+  <p:clrMapOvr>
+    <a:masterClrMapping/>
+  </p:clrMapOvr>
+</p:sld>
+</file>
+
+<file path=ppt/slides/slide9.xml><?xml version="1.0" encoding="utf-8"?>
+<p:sld xmlns:a="http://schemas.openxmlformats.org/drawingml/2006/main" xmlns:r="http://schemas.openxmlformats.org/officeDocument/2006/relationships" xmlns:p="http://schemas.openxmlformats.org/presentationml/2006/main">
+  <p:cSld>
+    <p:spTree>
+      <p:nvGrpSpPr>
+        <p:cNvPr id="1" name=""/>
+        <p:cNvGrpSpPr/>
+        <p:nvPr/>
+      </p:nvGrpSpPr>
+      <p:grpSpPr>
+        <a:xfrm>
+          <a:off x="0" y="0"/>
+          <a:ext cx="0" cy="0"/>
+          <a:chOff x="0" y="0"/>
+          <a:chExt cx="0" cy="0"/>
+        </a:xfrm>
+      </p:grpSpPr>
+      <p:sp>
+        <p:nvSpPr>
+          <p:cNvPr id="2" name="Rectangle 1"/>
+          <p:cNvSpPr/>
+          <p:nvPr/>
+        </p:nvSpPr>
+        <p:spPr>
+          <a:xfrm>
+            <a:off x="0" y="0"/>
+            <a:ext cx="12191695" cy="1005840"/>
+          </a:xfrm>
+          <a:prstGeom prst="rect">
+            <a:avLst/>
+          </a:prstGeom>
+          <a:solidFill>
+            <a:srgbClr val="1B3A5C"/>
+          </a:solidFill>
+          <a:ln>
+            <a:noFill/>
+          </a:ln>
+        </p:spPr>
+        <p:style>
+          <a:lnRef idx="1">
+            <a:schemeClr val="accent1"/>
+          </a:lnRef>
+          <a:fillRef idx="3">
+            <a:schemeClr val="accent1"/>
+          </a:fillRef>
+          <a:effectRef idx="2">
+            <a:schemeClr val="accent1"/>
+          </a:effectRef>
+          <a:fontRef idx="minor">
+            <a:schemeClr val="lt1"/>
+          </a:fontRef>
+        </p:style>
+        <p:txBody>
+          <a:bodyPr wrap="square" lIns="548640" tIns="137160" rtlCol="0" anchor="ctr"/>
+          <a:lstStyle/>
+          <a:p>
+            <a:pPr algn="l">
+              <a:defRPr sz="3000" b="1">
+                <a:solidFill>
+                  <a:srgbClr val="FFFFFF"/>
+                </a:solidFill>
+                <a:latin typeface="Calibri"/>
+              </a:defRPr>
+            </a:pPr>
+            <a:r>
+              <a:t>EDA — Deeper Insights</a:t>
+            </a:r>
+          </a:p>
+        </p:txBody>
+      </p:sp>
+      <p:pic>
+        <p:nvPicPr>
+          <p:cNvPr id="3" name="Picture 2" descr="boxplots_grades.png"/>
+          <p:cNvPicPr>
+            <a:picLocks noChangeAspect="1"/>
+          </p:cNvPicPr>
+          <p:nvPr/>
+        </p:nvPicPr>
+        <p:blipFill>
+          <a:blip r:embed="rId3"/>
+          <a:stretch>
+            <a:fillRect/>
+          </a:stretch>
+        </p:blipFill>
+        <p:spPr>
+          <a:xfrm>
+            <a:off x="182879" y="1188720"/>
+            <a:ext cx="5175429" cy="2194283"/>
+          </a:xfrm>
+          <a:prstGeom prst="rect">
+            <a:avLst/>
+          </a:prstGeom>
+        </p:spPr>
+      </p:pic>
+      <p:pic>
+        <p:nvPicPr>
+          <p:cNvPr id="4" name="Picture 3" descr="stacked_bar_binary.png"/>
+          <p:cNvPicPr>
+            <a:picLocks noChangeAspect="1"/>
+          </p:cNvPicPr>
+          <p:nvPr/>
+        </p:nvPicPr>
+        <p:blipFill>
+          <a:blip r:embed="rId4"/>
+          <a:stretch>
+            <a:fillRect/>
+          </a:stretch>
+        </p:blipFill>
+        <p:spPr>
+          <a:xfrm>
+            <a:off x="182880" y="3916510"/>
+            <a:ext cx="5175428" cy="1713578"/>
+          </a:xfrm>
+          <a:prstGeom prst="rect">
+            <a:avLst/>
+          </a:prstGeom>
+        </p:spPr>
+      </p:pic>
+      <p:pic>
+        <p:nvPicPr>
+          <p:cNvPr id="5" name="Picture 4" descr="pca_scatter.png"/>
+          <p:cNvPicPr>
+            <a:picLocks noChangeAspect="1"/>
+          </p:cNvPicPr>
+          <p:nvPr/>
+        </p:nvPicPr>
+        <p:blipFill>
+          <a:blip r:embed="rId5"/>
+          <a:stretch>
+            <a:fillRect/>
+          </a:stretch>
+        </p:blipFill>
+        <p:spPr>
+          <a:xfrm>
+            <a:off x="5936032" y="1270642"/>
+            <a:ext cx="6072783" cy="4224722"/>
+          </a:xfrm>
+          <a:prstGeom prst="rect">
+            <a:avLst/>
+          </a:prstGeom>
+        </p:spPr>
+      </p:pic>
+      <p:sp>
+        <p:nvSpPr>
+          <p:cNvPr id="6" name="TextBox 5"/>
+          <p:cNvSpPr txBox="1"/>
+          <p:nvPr/>
+        </p:nvSpPr>
+        <p:spPr>
+          <a:xfrm>
+            <a:off x="1170394" y="3431097"/>
+            <a:ext cx="3200400" cy="365760"/>
+          </a:xfrm>
+          <a:prstGeom prst="rect">
+            <a:avLst/>
+          </a:prstGeom>
+          <a:noFill/>
+        </p:spPr>
+        <p:txBody>
+          <a:bodyPr wrap="none">
+            <a:spAutoFit/>
+          </a:bodyPr>
+          <a:lstStyle/>
+          <a:p>
+            <a:pPr algn="ctr">
+              <a:defRPr sz="1200" i="1">
+                <a:solidFill>
+                  <a:srgbClr val="333333"/>
+                </a:solidFill>
+                <a:latin typeface="Calibri"/>
+              </a:defRPr>
+            </a:pPr>
+            <a:r>
+              <a:t>Semester grades by outcome</a:t>
+            </a:r>
+          </a:p>
+        </p:txBody>
+      </p:sp>
+      <p:sp>
+        <p:nvSpPr>
+          <p:cNvPr id="7" name="TextBox 6"/>
+          <p:cNvSpPr txBox="1"/>
+          <p:nvPr/>
+        </p:nvSpPr>
+        <p:spPr>
+          <a:xfrm>
+            <a:off x="1170393" y="5685088"/>
+            <a:ext cx="3200400" cy="365760"/>
+          </a:xfrm>
+          <a:prstGeom prst="rect">
+            <a:avLst/>
+          </a:prstGeom>
+          <a:noFill/>
+        </p:spPr>
+        <p:txBody>
+          <a:bodyPr wrap="none">
+            <a:spAutoFit/>
+          </a:bodyPr>
+          <a:lstStyle/>
+          <a:p>
+            <a:pPr algn="ctr">
+              <a:defRPr sz="1200" i="1">
+                <a:solidFill>
+                  <a:srgbClr val="333333"/>
+                </a:solidFill>
+                <a:latin typeface="Calibri"/>
+              </a:defRPr>
+            </a:pPr>
+            <a:r>
+              <a:rPr dirty="0"/>
+              <a:t>Financial factors vs outcome</a:t>
+            </a:r>
+          </a:p>
+        </p:txBody>
+      </p:sp>
+      <p:sp>
+        <p:nvSpPr>
+          <p:cNvPr id="8" name="TextBox 7"/>
+          <p:cNvSpPr txBox="1"/>
+          <p:nvPr/>
+        </p:nvSpPr>
+        <p:spPr>
+          <a:xfrm>
+            <a:off x="7424871" y="5529752"/>
+            <a:ext cx="3200400" cy="365760"/>
+          </a:xfrm>
+          <a:prstGeom prst="rect">
+            <a:avLst/>
+          </a:prstGeom>
+          <a:noFill/>
+        </p:spPr>
+        <p:txBody>
+          <a:bodyPr wrap="none">
+            <a:spAutoFit/>
+          </a:bodyPr>
+          <a:lstStyle/>
+          <a:p>
+            <a:pPr algn="ctr">
+              <a:defRPr sz="1200" i="1">
+                <a:solidFill>
+                  <a:srgbClr val="333333"/>
+                </a:solidFill>
+                <a:latin typeface="Calibri"/>
+              </a:defRPr>
+            </a:pPr>
+            <a:r>
+              <a:rPr dirty="0"/>
+              <a:t>PCA 2D projection</a:t>
+            </a:r>
+          </a:p>
+        </p:txBody>
+      </p:sp>
+      <p:sp>
+        <p:nvSpPr>
+          <p:cNvPr id="9" name="Rounded Rectangle 8"/>
+          <p:cNvSpPr/>
+          <p:nvPr/>
+        </p:nvSpPr>
+        <p:spPr>
+          <a:xfrm>
+            <a:off x="640080" y="6011132"/>
+            <a:ext cx="11064240" cy="640080"/>
+          </a:xfrm>
+          <a:prstGeom prst="roundRect">
+            <a:avLst/>
+          </a:prstGeom>
+          <a:solidFill>
+            <a:srgbClr val="1D9E75"/>
+          </a:solidFill>
+          <a:ln>
+            <a:noFill/>
+          </a:ln>
+        </p:spPr>
+        <p:style>
+          <a:lnRef idx="1">
+            <a:schemeClr val="accent1"/>
+          </a:lnRef>
+          <a:fillRef idx="3">
+            <a:schemeClr val="accent1"/>
+          </a:fillRef>
+          <a:effectRef idx="2">
+            <a:schemeClr val="accent1"/>
+          </a:effectRef>
+          <a:fontRef idx="minor">
+            <a:schemeClr val="lt1"/>
+          </a:fontRef>
+        </p:style>
+        <p:txBody>
+          <a:bodyPr wrap="square" lIns="137160" tIns="91440" rIns="137160" rtlCol="0" anchor="ctr"/>
           <a:lstStyle/>
           <a:p>
             <a:pPr algn="ctr">
@@ -14141,44 +14447,44 @@
         <a:sysClr val="window" lastClr="FFFFFF"/>
       </a:lt1>
       <a:dk2>
-        <a:srgbClr val="1F497D"/>
+        <a:srgbClr val="0E2841"/>
       </a:dk2>
       <a:lt2>
-        <a:srgbClr val="EEECE1"/>
+        <a:srgbClr val="E8E8E8"/>
       </a:lt2>
       <a:accent1>
-        <a:srgbClr val="4F81BD"/>
+        <a:srgbClr val="156082"/>
       </a:accent1>
       <a:accent2>
-        <a:srgbClr val="C0504D"/>
+        <a:srgbClr val="E97132"/>
       </a:accent2>
       <a:accent3>
-        <a:srgbClr val="9BBB59"/>
+        <a:srgbClr val="196B24"/>
       </a:accent3>
       <a:accent4>
-        <a:srgbClr val="8064A2"/>
+        <a:srgbClr val="0F9ED5"/>
       </a:accent4>
       <a:accent5>
-        <a:srgbClr val="4BACC6"/>
+        <a:srgbClr val="A02B93"/>
       </a:accent5>
       <a:accent6>
-        <a:srgbClr val="F79646"/>
+        <a:srgbClr val="4EA72E"/>
       </a:accent6>
       <a:hlink>
-        <a:srgbClr val="0000FF"/>
+        <a:srgbClr val="467886"/>
       </a:hlink>
       <a:folHlink>
-        <a:srgbClr val="800080"/>
+        <a:srgbClr val="96607D"/>
       </a:folHlink>
     </a:clrScheme>
     <a:fontScheme name="Office">
       <a:majorFont>
-        <a:latin typeface="Calibri"/>
+        <a:latin typeface="Aptos Display" panose="02110004020202020204"/>
         <a:ea typeface=""/>
         <a:cs typeface=""/>
-        <a:font script="Jpan" typeface="ＭＳ Ｐゴシック"/>
+        <a:font script="Jpan" typeface="游ゴシック Light"/>
         <a:font script="Hang" typeface="맑은 고딕"/>
-        <a:font script="Hans" typeface="宋体"/>
+        <a:font script="Hans" typeface="等线 Light"/>
         <a:font script="Hant" typeface="新細明體"/>
         <a:font script="Arab" typeface="Times New Roman"/>
         <a:font script="Hebr" typeface="Times New Roman"/>
@@ -14206,14 +14512,31 @@
         <a:font script="Viet" typeface="Times New Roman"/>
         <a:font script="Uigh" typeface="Microsoft Uighur"/>
         <a:font script="Geor" typeface="Sylfaen"/>
+        <a:font script="Armn" typeface="Arial"/>
+        <a:font script="Bugi" typeface="Leelawadee UI"/>
+        <a:font script="Bopo" typeface="Microsoft JhengHei"/>
+        <a:font script="Java" typeface="Javanese Text"/>
+        <a:font script="Lisu" typeface="Segoe UI"/>
+        <a:font script="Mymr" typeface="Myanmar Text"/>
+        <a:font script="Nkoo" typeface="Ebrima"/>
+        <a:font script="Olck" typeface="Nirmala UI"/>
+        <a:font script="Osma" typeface="Ebrima"/>
+        <a:font script="Phag" typeface="Phagspa"/>
+        <a:font script="Syrn" typeface="Estrangelo Edessa"/>
+        <a:font script="Syrj" typeface="Estrangelo Edessa"/>
+        <a:font script="Syre" typeface="Estrangelo Edessa"/>
+        <a:font script="Sora" typeface="Nirmala UI"/>
+        <a:font script="Tale" typeface="Microsoft Tai Le"/>
+        <a:font script="Talu" typeface="Microsoft New Tai Lue"/>
+        <a:font script="Tfng" typeface="Ebrima"/>
       </a:majorFont>
       <a:minorFont>
-        <a:latin typeface="Calibri"/>
+        <a:latin typeface="Aptos" panose="02110004020202020204"/>
         <a:ea typeface=""/>
         <a:cs typeface=""/>
-        <a:font script="Jpan" typeface="ＭＳ Ｐゴシック"/>
+        <a:font script="Jpan" typeface="游ゴシック"/>
         <a:font script="Hang" typeface="맑은 고딕"/>
-        <a:font script="Hans" typeface="宋体"/>
+        <a:font script="Hans" typeface="等线"/>
         <a:font script="Hant" typeface="新細明體"/>
         <a:font script="Arab" typeface="Arial"/>
         <a:font script="Hebr" typeface="Arial"/>
@@ -14241,6 +14564,23 @@
         <a:font script="Viet" typeface="Arial"/>
         <a:font script="Uigh" typeface="Microsoft Uighur"/>
         <a:font script="Geor" typeface="Sylfaen"/>
+        <a:font script="Armn" typeface="Arial"/>
+        <a:font script="Bugi" typeface="Leelawadee UI"/>
+        <a:font script="Bopo" typeface="Microsoft JhengHei"/>
+        <a:font script="Java" typeface="Javanese Text"/>
+        <a:font script="Lisu" typeface="Segoe UI"/>
+        <a:font script="Mymr" typeface="Myanmar Text"/>
+        <a:font script="Nkoo" typeface="Ebrima"/>
+        <a:font script="Olck" typeface="Nirmala UI"/>
+        <a:font script="Osma" typeface="Ebrima"/>
+        <a:font script="Phag" typeface="Phagspa"/>
+        <a:font script="Syrn" typeface="Estrangelo Edessa"/>
+        <a:font script="Syrj" typeface="Estrangelo Edessa"/>
+        <a:font script="Syre" typeface="Estrangelo Edessa"/>
+        <a:font script="Sora" typeface="Nirmala UI"/>
+        <a:font script="Tale" typeface="Microsoft Tai Le"/>
+        <a:font script="Talu" typeface="Microsoft New Tai Lue"/>
+        <a:font script="Tfng" typeface="Ebrima"/>
       </a:minorFont>
     </a:fontScheme>
     <a:fmtScheme name="Office">
@@ -14252,180 +14592,136 @@
           <a:gsLst>
             <a:gs pos="0">
               <a:schemeClr val="phClr">
-                <a:tint val="50000"/>
-                <a:satMod val="300000"/>
+                <a:lumMod val="110000"/>
+                <a:satMod val="105000"/>
+                <a:tint val="67000"/>
               </a:schemeClr>
             </a:gs>
-            <a:gs pos="35000">
+            <a:gs pos="50000">
               <a:schemeClr val="phClr">
-                <a:tint val="37000"/>
-                <a:satMod val="300000"/>
+                <a:lumMod val="105000"/>
+                <a:satMod val="103000"/>
+                <a:tint val="73000"/>
               </a:schemeClr>
             </a:gs>
             <a:gs pos="100000">
               <a:schemeClr val="phClr">
-                <a:tint val="15000"/>
-                <a:satMod val="350000"/>
+                <a:lumMod val="105000"/>
+                <a:satMod val="109000"/>
+                <a:tint val="81000"/>
               </a:schemeClr>
             </a:gs>
           </a:gsLst>
-          <a:lin ang="16200000" scaled="1"/>
+          <a:lin ang="5400000" scaled="0"/>
         </a:gradFill>
         <a:gradFill rotWithShape="1">
           <a:gsLst>
             <a:gs pos="0">
               <a:schemeClr val="phClr">
-                <a:tint val="100000"/>
+                <a:satMod val="103000"/>
+                <a:lumMod val="102000"/>
+                <a:tint val="94000"/>
+              </a:schemeClr>
+            </a:gs>
+            <a:gs pos="50000">
+              <a:schemeClr val="phClr">
+                <a:satMod val="110000"/>
+                <a:lumMod val="100000"/>
                 <a:shade val="100000"/>
-                <a:satMod val="130000"/>
               </a:schemeClr>
             </a:gs>
             <a:gs pos="100000">
               <a:schemeClr val="phClr">
-                <a:tint val="50000"/>
-                <a:shade val="100000"/>
-                <a:satMod val="350000"/>
+                <a:lumMod val="99000"/>
+                <a:satMod val="120000"/>
+                <a:shade val="78000"/>
               </a:schemeClr>
             </a:gs>
           </a:gsLst>
-          <a:lin ang="16200000" scaled="0"/>
+          <a:lin ang="5400000" scaled="0"/>
         </a:gradFill>
       </a:fillStyleLst>
       <a:lnStyleLst>
-        <a:ln w="9525" cap="flat" cmpd="sng" algn="ctr">
+        <a:ln w="12700" cap="flat" cmpd="sng" algn="ctr">
           <a:solidFill>
-            <a:schemeClr val="phClr">
-              <a:shade val="95000"/>
-              <a:satMod val="105000"/>
-            </a:schemeClr>
+            <a:schemeClr val="phClr"/>
           </a:solidFill>
           <a:prstDash val="solid"/>
+          <a:miter lim="800000"/>
+        </a:ln>
+        <a:ln w="19050" cap="flat" cmpd="sng" algn="ctr">
+          <a:solidFill>
+            <a:schemeClr val="phClr"/>
+          </a:solidFill>
+          <a:prstDash val="solid"/>
+          <a:miter lim="800000"/>
         </a:ln>
         <a:ln w="25400" cap="flat" cmpd="sng" algn="ctr">
           <a:solidFill>
             <a:schemeClr val="phClr"/>
           </a:solidFill>
           <a:prstDash val="solid"/>
-        </a:ln>
-        <a:ln w="38100" cap="flat" cmpd="sng" algn="ctr">
-          <a:solidFill>
-            <a:schemeClr val="phClr"/>
-          </a:solidFill>
-          <a:prstDash val="solid"/>
+          <a:miter lim="800000"/>
         </a:ln>
       </a:lnStyleLst>
       <a:effectStyleLst>
         <a:effectStyle>
+          <a:effectLst/>
+        </a:effectStyle>
+        <a:effectStyle>
+          <a:effectLst/>
+        </a:effectStyle>
+        <a:effectStyle>
           <a:effectLst>
-            <a:outerShdw blurRad="40000" dist="20000" dir="5400000" rotWithShape="0">
+            <a:outerShdw blurRad="57150" dist="19050" dir="5400000" algn="ctr" rotWithShape="0">
               <a:srgbClr val="000000">
-                <a:alpha val="38000"/>
+                <a:alpha val="63000"/>
               </a:srgbClr>
             </a:outerShdw>
           </a:effectLst>
-        </a:effectStyle>
-        <a:effectStyle>
-          <a:effectLst>
-            <a:outerShdw blurRad="40000" dist="23000" dir="5400000" rotWithShape="0">
-              <a:srgbClr val="000000">
-                <a:alpha val="35000"/>
-              </a:srgbClr>
-            </a:outerShdw>
-          </a:effectLst>
-        </a:effectStyle>
-        <a:effectStyle>
-          <a:effectLst>
-            <a:outerShdw blurRad="40000" dist="23000" dir="5400000" rotWithShape="0">
-              <a:srgbClr val="000000">
-                <a:alpha val="35000"/>
-              </a:srgbClr>
-            </a:outerShdw>
-          </a:effectLst>
-          <a:scene3d>
-            <a:camera prst="orthographicFront">
-              <a:rot lat="0" lon="0" rev="0"/>
-            </a:camera>
-            <a:lightRig rig="threePt" dir="t">
-              <a:rot lat="0" lon="0" rev="1200000"/>
-            </a:lightRig>
-          </a:scene3d>
-          <a:sp3d>
-            <a:bevelT w="63500" h="25400"/>
-          </a:sp3d>
         </a:effectStyle>
       </a:effectStyleLst>
       <a:bgFillStyleLst>
         <a:solidFill>
           <a:schemeClr val="phClr"/>
         </a:solidFill>
+        <a:solidFill>
+          <a:schemeClr val="phClr">
+            <a:tint val="95000"/>
+            <a:satMod val="170000"/>
+          </a:schemeClr>
+        </a:solidFill>
         <a:gradFill rotWithShape="1">
           <a:gsLst>
             <a:gs pos="0">
               <a:schemeClr val="phClr">
-                <a:tint val="40000"/>
-                <a:satMod val="350000"/>
+                <a:tint val="93000"/>
+                <a:satMod val="150000"/>
+                <a:shade val="98000"/>
+                <a:lumMod val="102000"/>
               </a:schemeClr>
             </a:gs>
-            <a:gs pos="40000">
+            <a:gs pos="50000">
               <a:schemeClr val="phClr">
-                <a:tint val="45000"/>
-                <a:shade val="99000"/>
-                <a:satMod val="350000"/>
+                <a:tint val="98000"/>
+                <a:satMod val="130000"/>
+                <a:shade val="90000"/>
+                <a:lumMod val="103000"/>
               </a:schemeClr>
             </a:gs>
             <a:gs pos="100000">
               <a:schemeClr val="phClr">
-                <a:shade val="20000"/>
-                <a:satMod val="255000"/>
+                <a:shade val="63000"/>
+                <a:satMod val="120000"/>
               </a:schemeClr>
             </a:gs>
           </a:gsLst>
-          <a:path path="circle">
-            <a:fillToRect l="50000" t="-80000" r="50000" b="180000"/>
-          </a:path>
-        </a:gradFill>
-        <a:gradFill rotWithShape="1">
-          <a:gsLst>
-            <a:gs pos="0">
-              <a:schemeClr val="phClr">
-                <a:tint val="80000"/>
-                <a:satMod val="300000"/>
-              </a:schemeClr>
-            </a:gs>
-            <a:gs pos="100000">
-              <a:schemeClr val="phClr">
-                <a:shade val="30000"/>
-                <a:satMod val="200000"/>
-              </a:schemeClr>
-            </a:gs>
-          </a:gsLst>
-          <a:path path="circle">
-            <a:fillToRect l="50000" t="50000" r="50000" b="50000"/>
-          </a:path>
+          <a:lin ang="5400000" scaled="0"/>
         </a:gradFill>
       </a:bgFillStyleLst>
     </a:fmtScheme>
   </a:themeElements>
   <a:objectDefaults>
-    <a:spDef>
-      <a:spPr/>
-      <a:bodyPr/>
-      <a:lstStyle/>
-      <a:style>
-        <a:lnRef idx="1">
-          <a:schemeClr val="accent1"/>
-        </a:lnRef>
-        <a:fillRef idx="3">
-          <a:schemeClr val="accent1"/>
-        </a:fillRef>
-        <a:effectRef idx="2">
-          <a:schemeClr val="accent1"/>
-        </a:effectRef>
-        <a:fontRef idx="minor">
-          <a:schemeClr val="lt1"/>
-        </a:fontRef>
-      </a:style>
-    </a:spDef>
     <a:lnDef>
       <a:spPr/>
       <a:bodyPr/>
@@ -14447,5 +14743,10 @@
     </a:lnDef>
   </a:objectDefaults>
   <a:extraClrSchemeLst/>
+  <a:extLst>
+    <a:ext uri="{05A4C25C-085E-4340-85A3-A5531E510DB2}">
+      <thm15:themeFamily xmlns:thm15="http://schemas.microsoft.com/office/thememl/2012/main" name="Office Theme" id="{2E142A2C-CD16-42D6-873A-C26D2A0506FA}" vid="{1BDDFF52-6CD6-40A5-AB3C-68EB2F1E4D0A}"/>
+    </a:ext>
+  </a:extLst>
 </a:theme>
 </file>